--- a/presentation/presentation.pptx
+++ b/presentation/presentation.pptx
@@ -3151,7 +3151,7 @@
         <p:spPr>
           <a:xfrm>
             <a:off x="0" y="0"/>
-            <a:ext cx="12191695" cy="164592"/>
+            <a:ext cx="12191695" cy="146304"/>
           </a:xfrm>
           <a:prstGeom prst="rect">
             <a:avLst/>
@@ -3194,8 +3194,8 @@
         </p:nvSpPr>
         <p:spPr>
           <a:xfrm>
-            <a:off x="1097280" y="1371600"/>
-            <a:ext cx="10058400" cy="548640"/>
+            <a:off x="1005840" y="1188720"/>
+            <a:ext cx="10058400" cy="420624"/>
           </a:xfrm>
           <a:prstGeom prst="rect">
             <a:avLst/>
@@ -3209,11 +3209,11 @@
           <a:lstStyle/>
           <a:p>
             <a:r>
-              <a:rPr sz="1400" b="1" i="0">
+              <a:rPr sz="1300" b="1" i="0">
                 <a:solidFill>
                   <a:srgbClr val="94A3B8"/>
                 </a:solidFill>
-                <a:latin typeface="Arial"/>
+                <a:latin typeface="Calibri"/>
               </a:rPr>
               <a:t>Université Euromed de Fès  ·  EIDIA</a:t>
             </a:r>
@@ -3228,8 +3228,8 @@
         </p:nvSpPr>
         <p:spPr>
           <a:xfrm>
-            <a:off x="1097280" y="2286000"/>
-            <a:ext cx="10058400" cy="1463040"/>
+            <a:off x="1005840" y="1828800"/>
+            <a:ext cx="10058400" cy="1371600"/>
           </a:xfrm>
           <a:prstGeom prst="rect">
             <a:avLst/>
@@ -3243,20 +3243,20 @@
           <a:lstStyle/>
           <a:p>
             <a:r>
-              <a:rPr sz="4600" b="1" i="0">
+              <a:rPr sz="4400" b="1" i="0">
                 <a:solidFill>
                   <a:srgbClr val="0F172A"/>
                 </a:solidFill>
-                <a:latin typeface="Arial"/>
+                <a:latin typeface="Calibri"/>
               </a:rPr>
               <a:t>Compréhension </a:t>
             </a:r>
             <a:r>
-              <a:rPr sz="4600" b="1" i="0">
+              <a:rPr sz="4400" b="1" i="0">
                 <a:solidFill>
                   <a:srgbClr val="4F46E5"/>
                 </a:solidFill>
-                <a:latin typeface="Arial"/>
+                <a:latin typeface="Calibri"/>
               </a:rPr>
               <a:t>Audio</a:t>
             </a:r>
@@ -3268,11 +3268,11 @@
               </a:spcBef>
             </a:pPr>
             <a:r>
-              <a:rPr sz="1800" b="0" i="0">
+              <a:rPr sz="1700" b="0" i="0">
                 <a:solidFill>
                   <a:srgbClr val="334155"/>
                 </a:solidFill>
-                <a:latin typeface="Arial"/>
+                <a:latin typeface="Calibri"/>
               </a:rPr>
               <a:t>Audio Understanding par Intelligence Artificielle</a:t>
             </a:r>
@@ -3287,18 +3287,18 @@
         </p:nvSpPr>
         <p:spPr>
           <a:xfrm>
-            <a:off x="1097280" y="4023360"/>
-            <a:ext cx="3749039" cy="457200"/>
+            <a:off x="1005840" y="3566160"/>
+            <a:ext cx="3931920" cy="475488"/>
           </a:xfrm>
           <a:prstGeom prst="roundRect">
             <a:avLst>
-              <a:gd name="adj" fmla="val 6000"/>
+              <a:gd name="adj" fmla="val 5000"/>
             </a:avLst>
           </a:prstGeom>
           <a:solidFill>
             <a:srgbClr val="FFFFFF"/>
           </a:solidFill>
-          <a:ln w="15875">
+          <a:ln w="19050">
             <a:solidFill>
               <a:srgbClr val="4F46E5"/>
             </a:solidFill>
@@ -3320,12 +3320,12 @@
           </a:fontRef>
         </p:style>
         <p:txBody>
-          <a:bodyPr rtlCol="0" anchor="ctr"/>
+          <a:bodyPr rtlCol="0" anchor="ctr" lIns="127000" rIns="127000" tIns="0" bIns="0"/>
           <a:lstStyle/>
           <a:p>
             <a:pPr algn="ctr"/>
             <a:r>
-              <a:rPr sz="1500" b="1" i="0">
+              <a:rPr sz="1400" b="1" i="0">
                 <a:solidFill>
                   <a:srgbClr val="4338CA"/>
                 </a:solidFill>
@@ -3344,8 +3344,8 @@
         </p:nvSpPr>
         <p:spPr>
           <a:xfrm>
-            <a:off x="1097280" y="5029200"/>
-            <a:ext cx="10058400" cy="1280160"/>
+            <a:off x="1005840" y="4663440"/>
+            <a:ext cx="10058400" cy="1737360"/>
           </a:xfrm>
           <a:prstGeom prst="rect">
             <a:avLst/>
@@ -3359,11 +3359,11 @@
           <a:lstStyle/>
           <a:p>
             <a:r>
-              <a:rPr sz="1300" b="0" i="1">
+              <a:rPr sz="1200" b="0" i="1">
                 <a:solidFill>
                   <a:srgbClr val="94A3B8"/>
                 </a:solidFill>
-                <a:latin typeface="Arial"/>
+                <a:latin typeface="Calibri"/>
               </a:rPr>
               <a:t>Projet de Fin du Module — Architectures Modernes de Réseaux de Neurones</a:t>
             </a:r>
@@ -3371,7 +3371,7 @@
           <a:p>
             <a:pPr>
               <a:spcBef>
-                <a:spcPts val="1000"/>
+                <a:spcPts val="1600"/>
               </a:spcBef>
             </a:pPr>
             <a:r>
@@ -3379,7 +3379,7 @@
                 <a:solidFill>
                   <a:srgbClr val="0F172A"/>
                 </a:solidFill>
-                <a:latin typeface="Arial"/>
+                <a:latin typeface="Calibri"/>
               </a:rPr>
               <a:t>Tassnim &amp; Zineb</a:t>
             </a:r>
@@ -3387,17 +3387,17 @@
           <a:p>
             <a:pPr>
               <a:spcBef>
-                <a:spcPts val="200"/>
+                <a:spcPts val="400"/>
               </a:spcBef>
             </a:pPr>
             <a:r>
-              <a:rPr sz="1300" b="0" i="0">
+              <a:rPr sz="1200" b="0" i="0">
                 <a:solidFill>
                   <a:srgbClr val="334155"/>
                 </a:solidFill>
-                <a:latin typeface="Arial"/>
-              </a:rPr>
-              <a:t>Encadrant : Pr. Smail Tigani   ·   Année : 2025 / 2026</a:t>
+                <a:latin typeface="Calibri"/>
+              </a:rPr>
+              <a:t>Encadrant : Pr. Smail Tigani   ·   Année 2025 / 2026</a:t>
             </a:r>
           </a:p>
         </p:txBody>
@@ -3472,8 +3472,8 @@
         </p:nvSpPr>
         <p:spPr>
           <a:xfrm>
-            <a:off x="640080" y="411480"/>
-            <a:ext cx="9601200" cy="731520"/>
+            <a:off x="502920" y="329184"/>
+            <a:ext cx="9722815" cy="713232"/>
           </a:xfrm>
           <a:prstGeom prst="rect">
             <a:avLst/>
@@ -3481,17 +3481,17 @@
           <a:noFill/>
         </p:spPr>
         <p:txBody>
-          <a:bodyPr wrap="square" anchor="t" lIns="0" rIns="0" tIns="0" bIns="0">
+          <a:bodyPr wrap="square" anchor="ctr" lIns="0" rIns="0" tIns="0" bIns="0">
             <a:spAutoFit/>
           </a:bodyPr>
           <a:lstStyle/>
           <a:p>
             <a:r>
-              <a:rPr sz="2800" b="1" i="0">
+              <a:rPr sz="2600" b="1" i="0">
                 <a:solidFill>
                   <a:srgbClr val="4338CA"/>
                 </a:solidFill>
-                <a:latin typeface="Arial"/>
+                <a:latin typeface="Calibri"/>
               </a:rPr>
               <a:t>Pistes d'amélioration</a:t>
             </a:r>
@@ -3506,8 +3506,8 @@
         </p:nvSpPr>
         <p:spPr>
           <a:xfrm>
-            <a:off x="10424160" y="502920"/>
-            <a:ext cx="1188720" cy="457200"/>
+            <a:off x="10408615" y="329184"/>
+            <a:ext cx="1280160" cy="713232"/>
           </a:xfrm>
           <a:prstGeom prst="rect">
             <a:avLst/>
@@ -3515,14 +3515,14 @@
           <a:noFill/>
         </p:spPr>
         <p:txBody>
-          <a:bodyPr wrap="square" anchor="t" lIns="0" rIns="0" tIns="0" bIns="0">
+          <a:bodyPr wrap="square" anchor="ctr" lIns="0" rIns="0" tIns="0" bIns="0">
             <a:spAutoFit/>
           </a:bodyPr>
           <a:lstStyle/>
           <a:p>
             <a:pPr algn="r"/>
             <a:r>
-              <a:rPr sz="1200" b="0" i="0">
+              <a:rPr sz="1100" b="0" i="0">
                 <a:solidFill>
                   <a:srgbClr val="94A3B8"/>
                 </a:solidFill>
@@ -3541,8 +3541,8 @@
         </p:nvSpPr>
         <p:spPr>
           <a:xfrm>
-            <a:off x="640080" y="1207008"/>
-            <a:ext cx="10908792" cy="31750"/>
+            <a:off x="502920" y="1143000"/>
+            <a:ext cx="11185855" cy="31750"/>
           </a:xfrm>
           <a:prstGeom prst="rect">
             <a:avLst/>
@@ -3585,18 +3585,18 @@
         </p:nvSpPr>
         <p:spPr>
           <a:xfrm>
-            <a:off x="640080" y="1600200"/>
-            <a:ext cx="5394960" cy="1325880"/>
+            <a:off x="502920" y="1353312"/>
+            <a:ext cx="5528919" cy="1737360"/>
           </a:xfrm>
           <a:prstGeom prst="roundRect">
             <a:avLst>
-              <a:gd name="adj" fmla="val 6000"/>
+              <a:gd name="adj" fmla="val 5000"/>
             </a:avLst>
           </a:prstGeom>
           <a:solidFill>
             <a:srgbClr val="F8FAFC"/>
           </a:solidFill>
-          <a:ln w="12700">
+          <a:ln w="9525">
             <a:solidFill>
               <a:srgbClr val="E2E8F0"/>
             </a:solidFill>
@@ -3627,19 +3627,17 @@
       </p:sp>
       <p:sp>
         <p:nvSpPr>
-          <p:cNvPr id="7" name="Rounded Rectangle 6"/>
+          <p:cNvPr id="7" name="Rectangle 6"/>
           <p:cNvSpPr/>
           <p:nvPr/>
         </p:nvSpPr>
         <p:spPr>
           <a:xfrm>
-            <a:off x="640080" y="1600200"/>
-            <a:ext cx="64008" cy="1325880"/>
-          </a:xfrm>
-          <a:prstGeom prst="roundRect">
-            <a:avLst>
-              <a:gd name="adj" fmla="val 50000"/>
-            </a:avLst>
+            <a:off x="502920" y="1389888"/>
+            <a:ext cx="64008" cy="1664208"/>
+          </a:xfrm>
+          <a:prstGeom prst="rect">
+            <a:avLst/>
           </a:prstGeom>
           <a:solidFill>
             <a:srgbClr val="4F46E5"/>
@@ -3679,8 +3677,8 @@
         </p:nvSpPr>
         <p:spPr>
           <a:xfrm>
-            <a:off x="896112" y="1783080"/>
-            <a:ext cx="4983480" cy="1005840"/>
+            <a:off x="694944" y="1353312"/>
+            <a:ext cx="5263743" cy="1737360"/>
           </a:xfrm>
           <a:prstGeom prst="rect">
             <a:avLst/>
@@ -3688,22 +3686,22 @@
           <a:noFill/>
         </p:spPr>
         <p:txBody>
-          <a:bodyPr wrap="square" anchor="t" lIns="0" rIns="0" tIns="0" bIns="0">
+          <a:bodyPr wrap="square" anchor="ctr" lIns="50800" rIns="50800" tIns="76200" bIns="76200">
             <a:spAutoFit/>
           </a:bodyPr>
           <a:lstStyle/>
           <a:p>
             <a:pPr>
               <a:spcAft>
-                <a:spcPts val="600"/>
+                <a:spcPts val="500"/>
               </a:spcAft>
             </a:pPr>
             <a:r>
-              <a:rPr sz="1500" b="1" i="0">
+              <a:rPr sz="1400" b="1" i="0">
                 <a:solidFill>
                   <a:srgbClr val="0F172A"/>
                 </a:solidFill>
-                <a:latin typeface="Arial"/>
+                <a:latin typeface="Calibri"/>
               </a:rPr>
               <a:t>Streaming des réponses</a:t>
             </a:r>
@@ -3711,17 +3709,17 @@
           <a:p>
             <a:pPr>
               <a:spcAft>
-                <a:spcPts val="300"/>
+                <a:spcPts val="200"/>
               </a:spcAft>
             </a:pPr>
             <a:r>
-              <a:rPr sz="1200" b="0" i="0">
+              <a:rPr sz="1100" b="0" i="0">
                 <a:solidFill>
                   <a:srgbClr val="334155"/>
                 </a:solidFill>
-                <a:latin typeface="Arial"/>
-              </a:rPr>
-              <a:t>Server-Sent Events : afficher les tokens au fur et à mesure.</a:t>
+                <a:latin typeface="Calibri"/>
+              </a:rPr>
+              <a:t>· Server-Sent Events : afficher les tokens au fur et à mesure.</a:t>
             </a:r>
           </a:p>
         </p:txBody>
@@ -3734,18 +3732,18 @@
         </p:nvSpPr>
         <p:spPr>
           <a:xfrm>
-            <a:off x="6153912" y="1600200"/>
-            <a:ext cx="5394960" cy="1325880"/>
+            <a:off x="6159855" y="1353312"/>
+            <a:ext cx="5528919" cy="1737360"/>
           </a:xfrm>
           <a:prstGeom prst="roundRect">
             <a:avLst>
-              <a:gd name="adj" fmla="val 6000"/>
+              <a:gd name="adj" fmla="val 5000"/>
             </a:avLst>
           </a:prstGeom>
           <a:solidFill>
             <a:srgbClr val="F8FAFC"/>
           </a:solidFill>
-          <a:ln w="12700">
+          <a:ln w="9525">
             <a:solidFill>
               <a:srgbClr val="E2E8F0"/>
             </a:solidFill>
@@ -3776,19 +3774,17 @@
       </p:sp>
       <p:sp>
         <p:nvSpPr>
-          <p:cNvPr id="10" name="Rounded Rectangle 9"/>
+          <p:cNvPr id="10" name="Rectangle 9"/>
           <p:cNvSpPr/>
           <p:nvPr/>
         </p:nvSpPr>
         <p:spPr>
           <a:xfrm>
-            <a:off x="6153912" y="1600200"/>
-            <a:ext cx="64008" cy="1325880"/>
-          </a:xfrm>
-          <a:prstGeom prst="roundRect">
-            <a:avLst>
-              <a:gd name="adj" fmla="val 50000"/>
-            </a:avLst>
+            <a:off x="6159855" y="1389888"/>
+            <a:ext cx="64008" cy="1664208"/>
+          </a:xfrm>
+          <a:prstGeom prst="rect">
+            <a:avLst/>
           </a:prstGeom>
           <a:solidFill>
             <a:srgbClr val="4F46E5"/>
@@ -3828,8 +3824,8 @@
         </p:nvSpPr>
         <p:spPr>
           <a:xfrm>
-            <a:off x="6409944" y="1783080"/>
-            <a:ext cx="4983480" cy="1005840"/>
+            <a:off x="6351879" y="1353312"/>
+            <a:ext cx="5263743" cy="1737360"/>
           </a:xfrm>
           <a:prstGeom prst="rect">
             <a:avLst/>
@@ -3837,22 +3833,22 @@
           <a:noFill/>
         </p:spPr>
         <p:txBody>
-          <a:bodyPr wrap="square" anchor="t" lIns="0" rIns="0" tIns="0" bIns="0">
+          <a:bodyPr wrap="square" anchor="ctr" lIns="50800" rIns="50800" tIns="76200" bIns="76200">
             <a:spAutoFit/>
           </a:bodyPr>
           <a:lstStyle/>
           <a:p>
             <a:pPr>
               <a:spcAft>
-                <a:spcPts val="600"/>
+                <a:spcPts val="500"/>
               </a:spcAft>
             </a:pPr>
             <a:r>
-              <a:rPr sz="1500" b="1" i="0">
+              <a:rPr sz="1400" b="1" i="0">
                 <a:solidFill>
                   <a:srgbClr val="0F172A"/>
                 </a:solidFill>
-                <a:latin typeface="Arial"/>
+                <a:latin typeface="Calibri"/>
               </a:rPr>
               <a:t>Conversation multi-tours</a:t>
             </a:r>
@@ -3860,17 +3856,17 @@
           <a:p>
             <a:pPr>
               <a:spcAft>
-                <a:spcPts val="300"/>
+                <a:spcPts val="200"/>
               </a:spcAft>
             </a:pPr>
             <a:r>
-              <a:rPr sz="1200" b="0" i="0">
+              <a:rPr sz="1100" b="0" i="0">
                 <a:solidFill>
                   <a:srgbClr val="334155"/>
                 </a:solidFill>
-                <a:latin typeface="Arial"/>
-              </a:rPr>
-              <a:t>Conserver l'historique des échanges sur un même audio.</a:t>
+                <a:latin typeface="Calibri"/>
+              </a:rPr>
+              <a:t>· Conserver l'historique des échanges sur un même audio.</a:t>
             </a:r>
           </a:p>
         </p:txBody>
@@ -3883,18 +3879,18 @@
         </p:nvSpPr>
         <p:spPr>
           <a:xfrm>
-            <a:off x="640080" y="3108960"/>
-            <a:ext cx="5394960" cy="1325880"/>
+            <a:off x="502920" y="3218688"/>
+            <a:ext cx="5528919" cy="1737360"/>
           </a:xfrm>
           <a:prstGeom prst="roundRect">
             <a:avLst>
-              <a:gd name="adj" fmla="val 6000"/>
+              <a:gd name="adj" fmla="val 5000"/>
             </a:avLst>
           </a:prstGeom>
           <a:solidFill>
             <a:srgbClr val="F8FAFC"/>
           </a:solidFill>
-          <a:ln w="12700">
+          <a:ln w="9525">
             <a:solidFill>
               <a:srgbClr val="E2E8F0"/>
             </a:solidFill>
@@ -3925,19 +3921,17 @@
       </p:sp>
       <p:sp>
         <p:nvSpPr>
-          <p:cNvPr id="13" name="Rounded Rectangle 12"/>
+          <p:cNvPr id="13" name="Rectangle 12"/>
           <p:cNvSpPr/>
           <p:nvPr/>
         </p:nvSpPr>
         <p:spPr>
           <a:xfrm>
-            <a:off x="640080" y="3108960"/>
-            <a:ext cx="64008" cy="1325880"/>
-          </a:xfrm>
-          <a:prstGeom prst="roundRect">
-            <a:avLst>
-              <a:gd name="adj" fmla="val 50000"/>
-            </a:avLst>
+            <a:off x="502920" y="3255264"/>
+            <a:ext cx="64008" cy="1664208"/>
+          </a:xfrm>
+          <a:prstGeom prst="rect">
+            <a:avLst/>
           </a:prstGeom>
           <a:solidFill>
             <a:srgbClr val="4F46E5"/>
@@ -3977,8 +3971,8 @@
         </p:nvSpPr>
         <p:spPr>
           <a:xfrm>
-            <a:off x="896112" y="3291840"/>
-            <a:ext cx="4983480" cy="1005840"/>
+            <a:off x="694944" y="3218688"/>
+            <a:ext cx="5263743" cy="1737360"/>
           </a:xfrm>
           <a:prstGeom prst="rect">
             <a:avLst/>
@@ -3986,22 +3980,22 @@
           <a:noFill/>
         </p:spPr>
         <p:txBody>
-          <a:bodyPr wrap="square" anchor="t" lIns="0" rIns="0" tIns="0" bIns="0">
+          <a:bodyPr wrap="square" anchor="ctr" lIns="50800" rIns="50800" tIns="76200" bIns="76200">
             <a:spAutoFit/>
           </a:bodyPr>
           <a:lstStyle/>
           <a:p>
             <a:pPr>
               <a:spcAft>
-                <a:spcPts val="600"/>
+                <a:spcPts val="500"/>
               </a:spcAft>
             </a:pPr>
             <a:r>
-              <a:rPr sz="1500" b="1" i="0">
+              <a:rPr sz="1400" b="1" i="0">
                 <a:solidFill>
                   <a:srgbClr val="0F172A"/>
                 </a:solidFill>
-                <a:latin typeface="Arial"/>
+                <a:latin typeface="Calibri"/>
               </a:rPr>
               <a:t>Détection de langue</a:t>
             </a:r>
@@ -4009,17 +4003,17 @@
           <a:p>
             <a:pPr>
               <a:spcAft>
-                <a:spcPts val="300"/>
+                <a:spcPts val="200"/>
               </a:spcAft>
             </a:pPr>
             <a:r>
-              <a:rPr sz="1200" b="0" i="0">
+              <a:rPr sz="1100" b="0" i="0">
                 <a:solidFill>
                   <a:srgbClr val="334155"/>
                 </a:solidFill>
-                <a:latin typeface="Arial"/>
-              </a:rPr>
-              <a:t>Identifier la langue du locuteur et adapter la réponse.</a:t>
+                <a:latin typeface="Calibri"/>
+              </a:rPr>
+              <a:t>· Identifier la langue et adapter la réponse automatiquement.</a:t>
             </a:r>
           </a:p>
         </p:txBody>
@@ -4032,18 +4026,18 @@
         </p:nvSpPr>
         <p:spPr>
           <a:xfrm>
-            <a:off x="6153912" y="3108960"/>
-            <a:ext cx="5394960" cy="1325880"/>
+            <a:off x="6159855" y="3218688"/>
+            <a:ext cx="5528919" cy="1737360"/>
           </a:xfrm>
           <a:prstGeom prst="roundRect">
             <a:avLst>
-              <a:gd name="adj" fmla="val 6000"/>
+              <a:gd name="adj" fmla="val 5000"/>
             </a:avLst>
           </a:prstGeom>
           <a:solidFill>
             <a:srgbClr val="F8FAFC"/>
           </a:solidFill>
-          <a:ln w="12700">
+          <a:ln w="9525">
             <a:solidFill>
               <a:srgbClr val="E2E8F0"/>
             </a:solidFill>
@@ -4074,19 +4068,17 @@
       </p:sp>
       <p:sp>
         <p:nvSpPr>
-          <p:cNvPr id="16" name="Rounded Rectangle 15"/>
+          <p:cNvPr id="16" name="Rectangle 15"/>
           <p:cNvSpPr/>
           <p:nvPr/>
         </p:nvSpPr>
         <p:spPr>
           <a:xfrm>
-            <a:off x="6153912" y="3108960"/>
-            <a:ext cx="64008" cy="1325880"/>
-          </a:xfrm>
-          <a:prstGeom prst="roundRect">
-            <a:avLst>
-              <a:gd name="adj" fmla="val 50000"/>
-            </a:avLst>
+            <a:off x="6159855" y="3255264"/>
+            <a:ext cx="64008" cy="1664208"/>
+          </a:xfrm>
+          <a:prstGeom prst="rect">
+            <a:avLst/>
           </a:prstGeom>
           <a:solidFill>
             <a:srgbClr val="4F46E5"/>
@@ -4126,8 +4118,8 @@
         </p:nvSpPr>
         <p:spPr>
           <a:xfrm>
-            <a:off x="6409944" y="3291840"/>
-            <a:ext cx="4983480" cy="1005840"/>
+            <a:off x="6351879" y="3218688"/>
+            <a:ext cx="5263743" cy="1737360"/>
           </a:xfrm>
           <a:prstGeom prst="rect">
             <a:avLst/>
@@ -4135,22 +4127,22 @@
           <a:noFill/>
         </p:spPr>
         <p:txBody>
-          <a:bodyPr wrap="square" anchor="t" lIns="0" rIns="0" tIns="0" bIns="0">
+          <a:bodyPr wrap="square" anchor="ctr" lIns="50800" rIns="50800" tIns="76200" bIns="76200">
             <a:spAutoFit/>
           </a:bodyPr>
           <a:lstStyle/>
           <a:p>
             <a:pPr>
               <a:spcAft>
-                <a:spcPts val="600"/>
+                <a:spcPts val="500"/>
               </a:spcAft>
             </a:pPr>
             <a:r>
-              <a:rPr sz="1500" b="1" i="0">
+              <a:rPr sz="1400" b="1" i="0">
                 <a:solidFill>
                   <a:srgbClr val="0F172A"/>
                 </a:solidFill>
-                <a:latin typeface="Arial"/>
+                <a:latin typeface="Calibri"/>
               </a:rPr>
               <a:t>Traitement des audios longs</a:t>
             </a:r>
@@ -4158,17 +4150,17 @@
           <a:p>
             <a:pPr>
               <a:spcAft>
-                <a:spcPts val="300"/>
+                <a:spcPts val="200"/>
               </a:spcAft>
             </a:pPr>
             <a:r>
-              <a:rPr sz="1200" b="0" i="0">
+              <a:rPr sz="1100" b="0" i="0">
                 <a:solidFill>
                   <a:srgbClr val="334155"/>
                 </a:solidFill>
-                <a:latin typeface="Arial"/>
-              </a:rPr>
-              <a:t>Découpage (chunking) pour réunions et conférences.</a:t>
+                <a:latin typeface="Calibri"/>
+              </a:rPr>
+              <a:t>· Découpage (chunking) pour réunions et conférences.</a:t>
             </a:r>
           </a:p>
         </p:txBody>
@@ -4181,18 +4173,18 @@
         </p:nvSpPr>
         <p:spPr>
           <a:xfrm>
-            <a:off x="640080" y="4617720"/>
-            <a:ext cx="5394960" cy="1325880"/>
+            <a:off x="502920" y="5084064"/>
+            <a:ext cx="5528919" cy="1737360"/>
           </a:xfrm>
           <a:prstGeom prst="roundRect">
             <a:avLst>
-              <a:gd name="adj" fmla="val 6000"/>
+              <a:gd name="adj" fmla="val 5000"/>
             </a:avLst>
           </a:prstGeom>
           <a:solidFill>
             <a:srgbClr val="F8FAFC"/>
           </a:solidFill>
-          <a:ln w="12700">
+          <a:ln w="9525">
             <a:solidFill>
               <a:srgbClr val="E2E8F0"/>
             </a:solidFill>
@@ -4223,19 +4215,17 @@
       </p:sp>
       <p:sp>
         <p:nvSpPr>
-          <p:cNvPr id="19" name="Rounded Rectangle 18"/>
+          <p:cNvPr id="19" name="Rectangle 18"/>
           <p:cNvSpPr/>
           <p:nvPr/>
         </p:nvSpPr>
         <p:spPr>
           <a:xfrm>
-            <a:off x="640080" y="4617720"/>
-            <a:ext cx="64008" cy="1325880"/>
-          </a:xfrm>
-          <a:prstGeom prst="roundRect">
-            <a:avLst>
-              <a:gd name="adj" fmla="val 50000"/>
-            </a:avLst>
+            <a:off x="502920" y="5120640"/>
+            <a:ext cx="64008" cy="1664208"/>
+          </a:xfrm>
+          <a:prstGeom prst="rect">
+            <a:avLst/>
           </a:prstGeom>
           <a:solidFill>
             <a:srgbClr val="4F46E5"/>
@@ -4275,8 +4265,8 @@
         </p:nvSpPr>
         <p:spPr>
           <a:xfrm>
-            <a:off x="896112" y="4800600"/>
-            <a:ext cx="4983480" cy="1005840"/>
+            <a:off x="694944" y="5084064"/>
+            <a:ext cx="5263743" cy="1737360"/>
           </a:xfrm>
           <a:prstGeom prst="rect">
             <a:avLst/>
@@ -4284,22 +4274,22 @@
           <a:noFill/>
         </p:spPr>
         <p:txBody>
-          <a:bodyPr wrap="square" anchor="t" lIns="0" rIns="0" tIns="0" bIns="0">
+          <a:bodyPr wrap="square" anchor="ctr" lIns="50800" rIns="50800" tIns="76200" bIns="76200">
             <a:spAutoFit/>
           </a:bodyPr>
           <a:lstStyle/>
           <a:p>
             <a:pPr>
               <a:spcAft>
-                <a:spcPts val="600"/>
+                <a:spcPts val="500"/>
               </a:spcAft>
             </a:pPr>
             <a:r>
-              <a:rPr sz="1500" b="1" i="0">
+              <a:rPr sz="1400" b="1" i="0">
                 <a:solidFill>
                   <a:srgbClr val="0F172A"/>
                 </a:solidFill>
-                <a:latin typeface="Arial"/>
+                <a:latin typeface="Calibri"/>
               </a:rPr>
               <a:t>Quantification avancée</a:t>
             </a:r>
@@ -4307,17 +4297,17 @@
           <a:p>
             <a:pPr>
               <a:spcAft>
-                <a:spcPts val="300"/>
+                <a:spcPts val="200"/>
               </a:spcAft>
             </a:pPr>
             <a:r>
-              <a:rPr sz="1200" b="0" i="0">
+              <a:rPr sz="1100" b="0" i="0">
                 <a:solidFill>
                   <a:srgbClr val="334155"/>
                 </a:solidFill>
-                <a:latin typeface="Arial"/>
-              </a:rPr>
-              <a:t>GPTQ / AWQ au-delà du 4/8 bits déjà pris en charge.</a:t>
+                <a:latin typeface="Calibri"/>
+              </a:rPr>
+              <a:t>· GPTQ / AWQ au-delà du 4/8 bits déjà pris en charge.</a:t>
             </a:r>
           </a:p>
         </p:txBody>
@@ -4330,18 +4320,18 @@
         </p:nvSpPr>
         <p:spPr>
           <a:xfrm>
-            <a:off x="6153912" y="4617720"/>
-            <a:ext cx="5394960" cy="1325880"/>
+            <a:off x="6159855" y="5084064"/>
+            <a:ext cx="5528919" cy="1737360"/>
           </a:xfrm>
           <a:prstGeom prst="roundRect">
             <a:avLst>
-              <a:gd name="adj" fmla="val 6000"/>
+              <a:gd name="adj" fmla="val 5000"/>
             </a:avLst>
           </a:prstGeom>
           <a:solidFill>
             <a:srgbClr val="F8FAFC"/>
           </a:solidFill>
-          <a:ln w="12700">
+          <a:ln w="9525">
             <a:solidFill>
               <a:srgbClr val="E2E8F0"/>
             </a:solidFill>
@@ -4372,19 +4362,17 @@
       </p:sp>
       <p:sp>
         <p:nvSpPr>
-          <p:cNvPr id="22" name="Rounded Rectangle 21"/>
+          <p:cNvPr id="22" name="Rectangle 21"/>
           <p:cNvSpPr/>
           <p:nvPr/>
         </p:nvSpPr>
         <p:spPr>
           <a:xfrm>
-            <a:off x="6153912" y="4617720"/>
-            <a:ext cx="64008" cy="1325880"/>
-          </a:xfrm>
-          <a:prstGeom prst="roundRect">
-            <a:avLst>
-              <a:gd name="adj" fmla="val 50000"/>
-            </a:avLst>
+            <a:off x="6159855" y="5120640"/>
+            <a:ext cx="64008" cy="1664208"/>
+          </a:xfrm>
+          <a:prstGeom prst="rect">
+            <a:avLst/>
           </a:prstGeom>
           <a:solidFill>
             <a:srgbClr val="4F46E5"/>
@@ -4424,8 +4412,8 @@
         </p:nvSpPr>
         <p:spPr>
           <a:xfrm>
-            <a:off x="6409944" y="4800600"/>
-            <a:ext cx="4983480" cy="1005840"/>
+            <a:off x="6351879" y="5084064"/>
+            <a:ext cx="5263743" cy="1737360"/>
           </a:xfrm>
           <a:prstGeom prst="rect">
             <a:avLst/>
@@ -4433,22 +4421,22 @@
           <a:noFill/>
         </p:spPr>
         <p:txBody>
-          <a:bodyPr wrap="square" anchor="t" lIns="0" rIns="0" tIns="0" bIns="0">
+          <a:bodyPr wrap="square" anchor="ctr" lIns="50800" rIns="50800" tIns="76200" bIns="76200">
             <a:spAutoFit/>
           </a:bodyPr>
           <a:lstStyle/>
           <a:p>
             <a:pPr>
               <a:spcAft>
-                <a:spcPts val="600"/>
+                <a:spcPts val="500"/>
               </a:spcAft>
             </a:pPr>
             <a:r>
-              <a:rPr sz="1500" b="1" i="0">
+              <a:rPr sz="1400" b="1" i="0">
                 <a:solidFill>
                   <a:srgbClr val="0F172A"/>
                 </a:solidFill>
-                <a:latin typeface="Arial"/>
+                <a:latin typeface="Calibri"/>
               </a:rPr>
               <a:t>Évaluation formelle (WER)</a:t>
             </a:r>
@@ -4456,17 +4444,17 @@
           <a:p>
             <a:pPr>
               <a:spcAft>
-                <a:spcPts val="300"/>
+                <a:spcPts val="200"/>
               </a:spcAft>
             </a:pPr>
             <a:r>
-              <a:rPr sz="1200" b="0" i="0">
+              <a:rPr sz="1100" b="0" i="0">
                 <a:solidFill>
                   <a:srgbClr val="334155"/>
                 </a:solidFill>
-                <a:latin typeface="Arial"/>
-              </a:rPr>
-              <a:t>Mesurer le Word Error Rate sur un corpus francophone.</a:t>
+                <a:latin typeface="Calibri"/>
+              </a:rPr>
+              <a:t>· Mesurer le Word Error Rate sur un corpus francophone.</a:t>
             </a:r>
           </a:p>
         </p:txBody>
@@ -4542,7 +4530,7 @@
         <p:spPr>
           <a:xfrm>
             <a:off x="0" y="0"/>
-            <a:ext cx="12191695" cy="164592"/>
+            <a:ext cx="12191695" cy="146304"/>
           </a:xfrm>
           <a:prstGeom prst="rect">
             <a:avLst/>
@@ -4585,8 +4573,8 @@
         </p:nvSpPr>
         <p:spPr>
           <a:xfrm>
-            <a:off x="1097280" y="1188720"/>
-            <a:ext cx="10058400" cy="914400"/>
+            <a:off x="914400" y="914400"/>
+            <a:ext cx="10332720" cy="777240"/>
           </a:xfrm>
           <a:prstGeom prst="rect">
             <a:avLst/>
@@ -4600,11 +4588,11 @@
           <a:lstStyle/>
           <a:p>
             <a:r>
-              <a:rPr sz="3400" b="1" i="0">
+              <a:rPr sz="3200" b="1" i="0">
                 <a:solidFill>
                   <a:srgbClr val="0F172A"/>
                 </a:solidFill>
-                <a:latin typeface="Arial"/>
+                <a:latin typeface="Calibri"/>
               </a:rPr>
               <a:t>Merci de votre attention</a:t>
             </a:r>
@@ -4619,18 +4607,18 @@
         </p:nvSpPr>
         <p:spPr>
           <a:xfrm>
-            <a:off x="1097280" y="2468880"/>
-            <a:ext cx="9966960" cy="868680"/>
+            <a:off x="914400" y="1874519"/>
+            <a:ext cx="10332720" cy="822960"/>
           </a:xfrm>
           <a:prstGeom prst="roundRect">
             <a:avLst>
-              <a:gd name="adj" fmla="val 6000"/>
+              <a:gd name="adj" fmla="val 5000"/>
             </a:avLst>
           </a:prstGeom>
           <a:solidFill>
             <a:srgbClr val="F8FAFC"/>
           </a:solidFill>
-          <a:ln w="12700">
+          <a:ln w="9525">
             <a:solidFill>
               <a:srgbClr val="E2E8F0"/>
             </a:solidFill>
@@ -4661,19 +4649,17 @@
       </p:sp>
       <p:sp>
         <p:nvSpPr>
-          <p:cNvPr id="6" name="Rounded Rectangle 5"/>
+          <p:cNvPr id="6" name="Rectangle 5"/>
           <p:cNvSpPr/>
           <p:nvPr/>
         </p:nvSpPr>
         <p:spPr>
           <a:xfrm>
-            <a:off x="1097280" y="2468880"/>
-            <a:ext cx="64008" cy="868680"/>
-          </a:xfrm>
-          <a:prstGeom prst="roundRect">
-            <a:avLst>
-              <a:gd name="adj" fmla="val 50000"/>
-            </a:avLst>
+            <a:off x="914400" y="1911095"/>
+            <a:ext cx="64008" cy="749808"/>
+          </a:xfrm>
+          <a:prstGeom prst="rect">
+            <a:avLst/>
           </a:prstGeom>
           <a:solidFill>
             <a:srgbClr val="059669"/>
@@ -4713,8 +4699,8 @@
         </p:nvSpPr>
         <p:spPr>
           <a:xfrm>
-            <a:off x="1417320" y="2468880"/>
-            <a:ext cx="9509760" cy="868680"/>
+            <a:off x="1106424" y="1874519"/>
+            <a:ext cx="10067544" cy="822960"/>
           </a:xfrm>
           <a:prstGeom prst="rect">
             <a:avLst/>
@@ -4722,7 +4708,7 @@
           <a:noFill/>
         </p:spPr>
         <p:txBody>
-          <a:bodyPr wrap="square" anchor="ctr" lIns="0" rIns="0" tIns="0" bIns="0">
+          <a:bodyPr wrap="square" anchor="ctr" lIns="50800" rIns="50800" tIns="0" bIns="0">
             <a:spAutoFit/>
           </a:bodyPr>
           <a:lstStyle/>
@@ -4732,7 +4718,7 @@
                 <a:solidFill>
                   <a:srgbClr val="334155"/>
                 </a:solidFill>
-                <a:latin typeface="Arial"/>
+                <a:latin typeface="Calibri"/>
               </a:rPr>
               <a:t>3 endpoints POST opérationnels — /transcribe · /understand · /analyze</a:t>
             </a:r>
@@ -4747,18 +4733,18 @@
         </p:nvSpPr>
         <p:spPr>
           <a:xfrm>
-            <a:off x="1097280" y="3474720"/>
-            <a:ext cx="9966960" cy="868680"/>
+            <a:off x="914400" y="2825496"/>
+            <a:ext cx="10332720" cy="822960"/>
           </a:xfrm>
           <a:prstGeom prst="roundRect">
             <a:avLst>
-              <a:gd name="adj" fmla="val 6000"/>
+              <a:gd name="adj" fmla="val 5000"/>
             </a:avLst>
           </a:prstGeom>
           <a:solidFill>
             <a:srgbClr val="F8FAFC"/>
           </a:solidFill>
-          <a:ln w="12700">
+          <a:ln w="9525">
             <a:solidFill>
               <a:srgbClr val="E2E8F0"/>
             </a:solidFill>
@@ -4789,19 +4775,17 @@
       </p:sp>
       <p:sp>
         <p:nvSpPr>
-          <p:cNvPr id="9" name="Rounded Rectangle 8"/>
+          <p:cNvPr id="9" name="Rectangle 8"/>
           <p:cNvSpPr/>
           <p:nvPr/>
         </p:nvSpPr>
         <p:spPr>
           <a:xfrm>
-            <a:off x="1097280" y="3474720"/>
-            <a:ext cx="64008" cy="868680"/>
-          </a:xfrm>
-          <a:prstGeom prst="roundRect">
-            <a:avLst>
-              <a:gd name="adj" fmla="val 50000"/>
-            </a:avLst>
+            <a:off x="914400" y="2862072"/>
+            <a:ext cx="64008" cy="749808"/>
+          </a:xfrm>
+          <a:prstGeom prst="rect">
+            <a:avLst/>
           </a:prstGeom>
           <a:solidFill>
             <a:srgbClr val="059669"/>
@@ -4841,8 +4825,8 @@
         </p:nvSpPr>
         <p:spPr>
           <a:xfrm>
-            <a:off x="1417320" y="3474720"/>
-            <a:ext cx="9509760" cy="868680"/>
+            <a:off x="1106424" y="2825496"/>
+            <a:ext cx="10067544" cy="822960"/>
           </a:xfrm>
           <a:prstGeom prst="rect">
             <a:avLst/>
@@ -4850,7 +4834,7 @@
           <a:noFill/>
         </p:spPr>
         <p:txBody>
-          <a:bodyPr wrap="square" anchor="ctr" lIns="0" rIns="0" tIns="0" bIns="0">
+          <a:bodyPr wrap="square" anchor="ctr" lIns="50800" rIns="50800" tIns="0" bIns="0">
             <a:spAutoFit/>
           </a:bodyPr>
           <a:lstStyle/>
@@ -4860,9 +4844,9 @@
                 <a:solidFill>
                   <a:srgbClr val="334155"/>
                 </a:solidFill>
-                <a:latin typeface="Arial"/>
-              </a:rPr>
-              <a:t>Interface web claire : import, enregistrement micro et 3 onglets</a:t>
+                <a:latin typeface="Calibri"/>
+              </a:rPr>
+              <a:t>Interface web claire : import fichier, enregistrement micro et 3 onglets</a:t>
             </a:r>
           </a:p>
         </p:txBody>
@@ -4875,18 +4859,18 @@
         </p:nvSpPr>
         <p:spPr>
           <a:xfrm>
-            <a:off x="1097280" y="4480560"/>
-            <a:ext cx="9966960" cy="868680"/>
+            <a:off x="914400" y="3776472"/>
+            <a:ext cx="10332720" cy="822960"/>
           </a:xfrm>
           <a:prstGeom prst="roundRect">
             <a:avLst>
-              <a:gd name="adj" fmla="val 6000"/>
+              <a:gd name="adj" fmla="val 5000"/>
             </a:avLst>
           </a:prstGeom>
           <a:solidFill>
             <a:srgbClr val="F8FAFC"/>
           </a:solidFill>
-          <a:ln w="12700">
+          <a:ln w="9525">
             <a:solidFill>
               <a:srgbClr val="E2E8F0"/>
             </a:solidFill>
@@ -4917,19 +4901,17 @@
       </p:sp>
       <p:sp>
         <p:nvSpPr>
-          <p:cNvPr id="12" name="Rounded Rectangle 11"/>
+          <p:cNvPr id="12" name="Rectangle 11"/>
           <p:cNvSpPr/>
           <p:nvPr/>
         </p:nvSpPr>
         <p:spPr>
           <a:xfrm>
-            <a:off x="1097280" y="4480560"/>
-            <a:ext cx="64008" cy="868680"/>
-          </a:xfrm>
-          <a:prstGeom prst="roundRect">
-            <a:avLst>
-              <a:gd name="adj" fmla="val 50000"/>
-            </a:avLst>
+            <a:off x="914400" y="3813048"/>
+            <a:ext cx="64008" cy="749808"/>
+          </a:xfrm>
+          <a:prstGeom prst="rect">
+            <a:avLst/>
           </a:prstGeom>
           <a:solidFill>
             <a:srgbClr val="059669"/>
@@ -4969,8 +4951,8 @@
         </p:nvSpPr>
         <p:spPr>
           <a:xfrm>
-            <a:off x="1417320" y="4480560"/>
-            <a:ext cx="9509760" cy="868680"/>
+            <a:off x="1106424" y="3776472"/>
+            <a:ext cx="10067544" cy="822960"/>
           </a:xfrm>
           <a:prstGeom prst="rect">
             <a:avLst/>
@@ -4978,7 +4960,7 @@
           <a:noFill/>
         </p:spPr>
         <p:txBody>
-          <a:bodyPr wrap="square" anchor="ctr" lIns="0" rIns="0" tIns="0" bIns="0">
+          <a:bodyPr wrap="square" anchor="ctr" lIns="50800" rIns="50800" tIns="0" bIns="0">
             <a:spAutoFit/>
           </a:bodyPr>
           <a:lstStyle/>
@@ -4988,7 +4970,7 @@
                 <a:solidFill>
                   <a:srgbClr val="334155"/>
                 </a:solidFill>
-                <a:latin typeface="Arial"/>
+                <a:latin typeface="Calibri"/>
               </a:rPr>
               <a:t>Déployé sur GPU Colab A100 — modèle open source, aucune API payante</a:t>
             </a:r>
@@ -5003,8 +4985,8 @@
         </p:nvSpPr>
         <p:spPr>
           <a:xfrm>
-            <a:off x="1097280" y="5760720"/>
-            <a:ext cx="10058400" cy="731520"/>
+            <a:off x="914400" y="4892040"/>
+            <a:ext cx="10332720" cy="822960"/>
           </a:xfrm>
           <a:prstGeom prst="rect">
             <a:avLst/>
@@ -5022,7 +5004,7 @@
                 <a:solidFill>
                   <a:srgbClr val="0F172A"/>
                 </a:solidFill>
-                <a:latin typeface="Arial"/>
+                <a:latin typeface="Calibri"/>
               </a:rPr>
               <a:t>Tassnim &amp; Zineb</a:t>
             </a:r>
@@ -5030,7 +5012,7 @@
           <a:p>
             <a:pPr>
               <a:spcBef>
-                <a:spcPts val="200"/>
+                <a:spcPts val="400"/>
               </a:spcBef>
             </a:pPr>
             <a:r>
@@ -5038,7 +5020,7 @@
                 <a:solidFill>
                   <a:srgbClr val="94A3B8"/>
                 </a:solidFill>
-                <a:latin typeface="Arial"/>
+                <a:latin typeface="Calibri"/>
               </a:rPr>
               <a:t>Pr. Smail Tigani · Université Euromed de Fès · EIDIA · 2025/2026</a:t>
             </a:r>
@@ -5115,8 +5097,8 @@
         </p:nvSpPr>
         <p:spPr>
           <a:xfrm>
-            <a:off x="640080" y="411480"/>
-            <a:ext cx="9601200" cy="731520"/>
+            <a:off x="502920" y="329184"/>
+            <a:ext cx="9722815" cy="713232"/>
           </a:xfrm>
           <a:prstGeom prst="rect">
             <a:avLst/>
@@ -5124,17 +5106,17 @@
           <a:noFill/>
         </p:spPr>
         <p:txBody>
-          <a:bodyPr wrap="square" anchor="t" lIns="0" rIns="0" tIns="0" bIns="0">
+          <a:bodyPr wrap="square" anchor="ctr" lIns="0" rIns="0" tIns="0" bIns="0">
             <a:spAutoFit/>
           </a:bodyPr>
           <a:lstStyle/>
           <a:p>
             <a:r>
-              <a:rPr sz="2800" b="1" i="0">
+              <a:rPr sz="2600" b="1" i="0">
                 <a:solidFill>
                   <a:srgbClr val="4338CA"/>
                 </a:solidFill>
-                <a:latin typeface="Arial"/>
+                <a:latin typeface="Calibri"/>
               </a:rPr>
               <a:t>Plan de la présentation</a:t>
             </a:r>
@@ -5149,8 +5131,8 @@
         </p:nvSpPr>
         <p:spPr>
           <a:xfrm>
-            <a:off x="10424160" y="502920"/>
-            <a:ext cx="1188720" cy="457200"/>
+            <a:off x="10408615" y="329184"/>
+            <a:ext cx="1280160" cy="713232"/>
           </a:xfrm>
           <a:prstGeom prst="rect">
             <a:avLst/>
@@ -5158,14 +5140,14 @@
           <a:noFill/>
         </p:spPr>
         <p:txBody>
-          <a:bodyPr wrap="square" anchor="t" lIns="0" rIns="0" tIns="0" bIns="0">
+          <a:bodyPr wrap="square" anchor="ctr" lIns="0" rIns="0" tIns="0" bIns="0">
             <a:spAutoFit/>
           </a:bodyPr>
           <a:lstStyle/>
           <a:p>
             <a:pPr algn="r"/>
             <a:r>
-              <a:rPr sz="1200" b="0" i="0">
+              <a:rPr sz="1100" b="0" i="0">
                 <a:solidFill>
                   <a:srgbClr val="94A3B8"/>
                 </a:solidFill>
@@ -5184,8 +5166,8 @@
         </p:nvSpPr>
         <p:spPr>
           <a:xfrm>
-            <a:off x="640080" y="1207008"/>
-            <a:ext cx="10908792" cy="31750"/>
+            <a:off x="502920" y="1143000"/>
+            <a:ext cx="11185855" cy="31750"/>
           </a:xfrm>
           <a:prstGeom prst="rect">
             <a:avLst/>
@@ -5228,18 +5210,18 @@
         </p:nvSpPr>
         <p:spPr>
           <a:xfrm>
-            <a:off x="640080" y="1554480"/>
-            <a:ext cx="5394960" cy="868680"/>
+            <a:off x="502920" y="1408176"/>
+            <a:ext cx="5528919" cy="987552"/>
           </a:xfrm>
           <a:prstGeom prst="roundRect">
             <a:avLst>
-              <a:gd name="adj" fmla="val 6000"/>
+              <a:gd name="adj" fmla="val 5000"/>
             </a:avLst>
           </a:prstGeom>
           <a:solidFill>
             <a:srgbClr val="F8FAFC"/>
           </a:solidFill>
-          <a:ln w="12700">
+          <a:ln w="9525">
             <a:solidFill>
               <a:srgbClr val="E2E8F0"/>
             </a:solidFill>
@@ -5270,19 +5252,17 @@
       </p:sp>
       <p:sp>
         <p:nvSpPr>
-          <p:cNvPr id="7" name="Rounded Rectangle 6"/>
+          <p:cNvPr id="7" name="Rectangle 6"/>
           <p:cNvSpPr/>
           <p:nvPr/>
         </p:nvSpPr>
         <p:spPr>
           <a:xfrm>
-            <a:off x="640080" y="1554480"/>
-            <a:ext cx="64008" cy="868680"/>
-          </a:xfrm>
-          <a:prstGeom prst="roundRect">
-            <a:avLst>
-              <a:gd name="adj" fmla="val 50000"/>
-            </a:avLst>
+            <a:off x="502920" y="1444752"/>
+            <a:ext cx="64008" cy="914400"/>
+          </a:xfrm>
+          <a:prstGeom prst="rect">
+            <a:avLst/>
           </a:prstGeom>
           <a:solidFill>
             <a:srgbClr val="4F46E5"/>
@@ -5322,8 +5302,8 @@
         </p:nvSpPr>
         <p:spPr>
           <a:xfrm>
-            <a:off x="960119" y="1554480"/>
-            <a:ext cx="4937760" cy="868680"/>
+            <a:off x="694944" y="1408176"/>
+            <a:ext cx="5263743" cy="987552"/>
           </a:xfrm>
           <a:prstGeom prst="rect">
             <a:avLst/>
@@ -5331,26 +5311,26 @@
           <a:noFill/>
         </p:spPr>
         <p:txBody>
-          <a:bodyPr wrap="square" anchor="ctr" lIns="0" rIns="0" tIns="0" bIns="0">
+          <a:bodyPr wrap="square" anchor="ctr" lIns="76200" rIns="76200" tIns="50800" bIns="50800">
             <a:spAutoFit/>
           </a:bodyPr>
           <a:lstStyle/>
           <a:p>
             <a:r>
-              <a:rPr sz="1600" b="1" i="0">
+              <a:rPr sz="1500" b="1" i="0">
                 <a:solidFill>
                   <a:srgbClr val="4F46E5"/>
                 </a:solidFill>
-                <a:latin typeface="Arial"/>
+                <a:latin typeface="Calibri"/>
               </a:rPr>
               <a:t>1.  </a:t>
             </a:r>
             <a:r>
-              <a:rPr sz="1500" b="1" i="0">
+              <a:rPr sz="1400" b="1" i="0">
                 <a:solidFill>
                   <a:srgbClr val="0F172A"/>
                 </a:solidFill>
-                <a:latin typeface="Arial"/>
+                <a:latin typeface="Calibri"/>
               </a:rPr>
               <a:t>Contexte &amp; objectifs</a:t>
             </a:r>
@@ -5365,18 +5345,18 @@
         </p:nvSpPr>
         <p:spPr>
           <a:xfrm>
-            <a:off x="6153912" y="1554480"/>
-            <a:ext cx="5394960" cy="868680"/>
+            <a:off x="6159855" y="1408176"/>
+            <a:ext cx="5528919" cy="987552"/>
           </a:xfrm>
           <a:prstGeom prst="roundRect">
             <a:avLst>
-              <a:gd name="adj" fmla="val 6000"/>
+              <a:gd name="adj" fmla="val 5000"/>
             </a:avLst>
           </a:prstGeom>
           <a:solidFill>
             <a:srgbClr val="F8FAFC"/>
           </a:solidFill>
-          <a:ln w="12700">
+          <a:ln w="9525">
             <a:solidFill>
               <a:srgbClr val="E2E8F0"/>
             </a:solidFill>
@@ -5407,19 +5387,17 @@
       </p:sp>
       <p:sp>
         <p:nvSpPr>
-          <p:cNvPr id="10" name="Rounded Rectangle 9"/>
+          <p:cNvPr id="10" name="Rectangle 9"/>
           <p:cNvSpPr/>
           <p:nvPr/>
         </p:nvSpPr>
         <p:spPr>
           <a:xfrm>
-            <a:off x="6153912" y="1554480"/>
-            <a:ext cx="64008" cy="868680"/>
-          </a:xfrm>
-          <a:prstGeom prst="roundRect">
-            <a:avLst>
-              <a:gd name="adj" fmla="val 50000"/>
-            </a:avLst>
+            <a:off x="6159855" y="1444752"/>
+            <a:ext cx="64008" cy="914400"/>
+          </a:xfrm>
+          <a:prstGeom prst="rect">
+            <a:avLst/>
           </a:prstGeom>
           <a:solidFill>
             <a:srgbClr val="4F46E5"/>
@@ -5459,8 +5437,8 @@
         </p:nvSpPr>
         <p:spPr>
           <a:xfrm>
-            <a:off x="6473952" y="1554480"/>
-            <a:ext cx="4937760" cy="868680"/>
+            <a:off x="6351879" y="1408176"/>
+            <a:ext cx="5263743" cy="987552"/>
           </a:xfrm>
           <a:prstGeom prst="rect">
             <a:avLst/>
@@ -5468,26 +5446,26 @@
           <a:noFill/>
         </p:spPr>
         <p:txBody>
-          <a:bodyPr wrap="square" anchor="ctr" lIns="0" rIns="0" tIns="0" bIns="0">
+          <a:bodyPr wrap="square" anchor="ctr" lIns="76200" rIns="76200" tIns="50800" bIns="50800">
             <a:spAutoFit/>
           </a:bodyPr>
           <a:lstStyle/>
           <a:p>
             <a:r>
-              <a:rPr sz="1600" b="1" i="0">
+              <a:rPr sz="1500" b="1" i="0">
                 <a:solidFill>
                   <a:srgbClr val="4F46E5"/>
                 </a:solidFill>
-                <a:latin typeface="Arial"/>
+                <a:latin typeface="Calibri"/>
               </a:rPr>
               <a:t>2.  </a:t>
             </a:r>
             <a:r>
-              <a:rPr sz="1500" b="1" i="0">
+              <a:rPr sz="1400" b="1" i="0">
                 <a:solidFill>
                   <a:srgbClr val="0F172A"/>
                 </a:solidFill>
-                <a:latin typeface="Arial"/>
+                <a:latin typeface="Calibri"/>
               </a:rPr>
               <a:t>Le modèle Qwen2-Audio</a:t>
             </a:r>
@@ -5502,18 +5480,18 @@
         </p:nvSpPr>
         <p:spPr>
           <a:xfrm>
-            <a:off x="640080" y="2624328"/>
-            <a:ext cx="5394960" cy="868680"/>
+            <a:off x="502920" y="2551176"/>
+            <a:ext cx="5528919" cy="987552"/>
           </a:xfrm>
           <a:prstGeom prst="roundRect">
             <a:avLst>
-              <a:gd name="adj" fmla="val 6000"/>
+              <a:gd name="adj" fmla="val 5000"/>
             </a:avLst>
           </a:prstGeom>
           <a:solidFill>
             <a:srgbClr val="F8FAFC"/>
           </a:solidFill>
-          <a:ln w="12700">
+          <a:ln w="9525">
             <a:solidFill>
               <a:srgbClr val="E2E8F0"/>
             </a:solidFill>
@@ -5544,19 +5522,17 @@
       </p:sp>
       <p:sp>
         <p:nvSpPr>
-          <p:cNvPr id="13" name="Rounded Rectangle 12"/>
+          <p:cNvPr id="13" name="Rectangle 12"/>
           <p:cNvSpPr/>
           <p:nvPr/>
         </p:nvSpPr>
         <p:spPr>
           <a:xfrm>
-            <a:off x="640080" y="2624328"/>
-            <a:ext cx="64008" cy="868680"/>
-          </a:xfrm>
-          <a:prstGeom prst="roundRect">
-            <a:avLst>
-              <a:gd name="adj" fmla="val 50000"/>
-            </a:avLst>
+            <a:off x="502920" y="2587752"/>
+            <a:ext cx="64008" cy="914400"/>
+          </a:xfrm>
+          <a:prstGeom prst="rect">
+            <a:avLst/>
           </a:prstGeom>
           <a:solidFill>
             <a:srgbClr val="4F46E5"/>
@@ -5596,8 +5572,8 @@
         </p:nvSpPr>
         <p:spPr>
           <a:xfrm>
-            <a:off x="960119" y="2624328"/>
-            <a:ext cx="4937760" cy="868680"/>
+            <a:off x="694944" y="2551176"/>
+            <a:ext cx="5263743" cy="987552"/>
           </a:xfrm>
           <a:prstGeom prst="rect">
             <a:avLst/>
@@ -5605,26 +5581,26 @@
           <a:noFill/>
         </p:spPr>
         <p:txBody>
-          <a:bodyPr wrap="square" anchor="ctr" lIns="0" rIns="0" tIns="0" bIns="0">
+          <a:bodyPr wrap="square" anchor="ctr" lIns="76200" rIns="76200" tIns="50800" bIns="50800">
             <a:spAutoFit/>
           </a:bodyPr>
           <a:lstStyle/>
           <a:p>
             <a:r>
-              <a:rPr sz="1600" b="1" i="0">
+              <a:rPr sz="1500" b="1" i="0">
                 <a:solidFill>
                   <a:srgbClr val="4F46E5"/>
                 </a:solidFill>
-                <a:latin typeface="Arial"/>
+                <a:latin typeface="Calibri"/>
               </a:rPr>
               <a:t>3.  </a:t>
             </a:r>
             <a:r>
-              <a:rPr sz="1500" b="1" i="0">
+              <a:rPr sz="1400" b="1" i="0">
                 <a:solidFill>
                   <a:srgbClr val="0F172A"/>
                 </a:solidFill>
-                <a:latin typeface="Arial"/>
+                <a:latin typeface="Calibri"/>
               </a:rPr>
               <a:t>API opérationnelle (FastAPI)</a:t>
             </a:r>
@@ -5639,18 +5615,18 @@
         </p:nvSpPr>
         <p:spPr>
           <a:xfrm>
-            <a:off x="6153912" y="2624328"/>
-            <a:ext cx="5394960" cy="868680"/>
+            <a:off x="6159855" y="2551176"/>
+            <a:ext cx="5528919" cy="987552"/>
           </a:xfrm>
           <a:prstGeom prst="roundRect">
             <a:avLst>
-              <a:gd name="adj" fmla="val 6000"/>
+              <a:gd name="adj" fmla="val 5000"/>
             </a:avLst>
           </a:prstGeom>
           <a:solidFill>
             <a:srgbClr val="F8FAFC"/>
           </a:solidFill>
-          <a:ln w="12700">
+          <a:ln w="9525">
             <a:solidFill>
               <a:srgbClr val="E2E8F0"/>
             </a:solidFill>
@@ -5681,19 +5657,17 @@
       </p:sp>
       <p:sp>
         <p:nvSpPr>
-          <p:cNvPr id="16" name="Rounded Rectangle 15"/>
+          <p:cNvPr id="16" name="Rectangle 15"/>
           <p:cNvSpPr/>
           <p:nvPr/>
         </p:nvSpPr>
         <p:spPr>
           <a:xfrm>
-            <a:off x="6153912" y="2624328"/>
-            <a:ext cx="64008" cy="868680"/>
-          </a:xfrm>
-          <a:prstGeom prst="roundRect">
-            <a:avLst>
-              <a:gd name="adj" fmla="val 50000"/>
-            </a:avLst>
+            <a:off x="6159855" y="2587752"/>
+            <a:ext cx="64008" cy="914400"/>
+          </a:xfrm>
+          <a:prstGeom prst="rect">
+            <a:avLst/>
           </a:prstGeom>
           <a:solidFill>
             <a:srgbClr val="4F46E5"/>
@@ -5733,8 +5707,8 @@
         </p:nvSpPr>
         <p:spPr>
           <a:xfrm>
-            <a:off x="6473952" y="2624328"/>
-            <a:ext cx="4937760" cy="868680"/>
+            <a:off x="6351879" y="2551176"/>
+            <a:ext cx="5263743" cy="987552"/>
           </a:xfrm>
           <a:prstGeom prst="rect">
             <a:avLst/>
@@ -5742,26 +5716,26 @@
           <a:noFill/>
         </p:spPr>
         <p:txBody>
-          <a:bodyPr wrap="square" anchor="ctr" lIns="0" rIns="0" tIns="0" bIns="0">
+          <a:bodyPr wrap="square" anchor="ctr" lIns="76200" rIns="76200" tIns="50800" bIns="50800">
             <a:spAutoFit/>
           </a:bodyPr>
           <a:lstStyle/>
           <a:p>
             <a:r>
-              <a:rPr sz="1600" b="1" i="0">
+              <a:rPr sz="1500" b="1" i="0">
                 <a:solidFill>
                   <a:srgbClr val="4F46E5"/>
                 </a:solidFill>
-                <a:latin typeface="Arial"/>
+                <a:latin typeface="Calibri"/>
               </a:rPr>
               <a:t>4.  </a:t>
             </a:r>
             <a:r>
-              <a:rPr sz="1500" b="1" i="0">
+              <a:rPr sz="1400" b="1" i="0">
                 <a:solidFill>
                   <a:srgbClr val="0F172A"/>
                 </a:solidFill>
-                <a:latin typeface="Arial"/>
+                <a:latin typeface="Calibri"/>
               </a:rPr>
               <a:t>Interface web</a:t>
             </a:r>
@@ -5776,18 +5750,18 @@
         </p:nvSpPr>
         <p:spPr>
           <a:xfrm>
-            <a:off x="640080" y="3694176"/>
-            <a:ext cx="5394960" cy="868680"/>
+            <a:off x="502920" y="3694176"/>
+            <a:ext cx="5528919" cy="987552"/>
           </a:xfrm>
           <a:prstGeom prst="roundRect">
             <a:avLst>
-              <a:gd name="adj" fmla="val 6000"/>
+              <a:gd name="adj" fmla="val 5000"/>
             </a:avLst>
           </a:prstGeom>
           <a:solidFill>
             <a:srgbClr val="F8FAFC"/>
           </a:solidFill>
-          <a:ln w="12700">
+          <a:ln w="9525">
             <a:solidFill>
               <a:srgbClr val="E2E8F0"/>
             </a:solidFill>
@@ -5818,19 +5792,17 @@
       </p:sp>
       <p:sp>
         <p:nvSpPr>
-          <p:cNvPr id="19" name="Rounded Rectangle 18"/>
+          <p:cNvPr id="19" name="Rectangle 18"/>
           <p:cNvSpPr/>
           <p:nvPr/>
         </p:nvSpPr>
         <p:spPr>
           <a:xfrm>
-            <a:off x="640080" y="3694176"/>
-            <a:ext cx="64008" cy="868680"/>
-          </a:xfrm>
-          <a:prstGeom prst="roundRect">
-            <a:avLst>
-              <a:gd name="adj" fmla="val 50000"/>
-            </a:avLst>
+            <a:off x="502920" y="3730752"/>
+            <a:ext cx="64008" cy="914400"/>
+          </a:xfrm>
+          <a:prstGeom prst="rect">
+            <a:avLst/>
           </a:prstGeom>
           <a:solidFill>
             <a:srgbClr val="4F46E5"/>
@@ -5870,8 +5842,8 @@
         </p:nvSpPr>
         <p:spPr>
           <a:xfrm>
-            <a:off x="960119" y="3694176"/>
-            <a:ext cx="4937760" cy="868680"/>
+            <a:off x="694944" y="3694176"/>
+            <a:ext cx="5263743" cy="987552"/>
           </a:xfrm>
           <a:prstGeom prst="rect">
             <a:avLst/>
@@ -5879,26 +5851,26 @@
           <a:noFill/>
         </p:spPr>
         <p:txBody>
-          <a:bodyPr wrap="square" anchor="ctr" lIns="0" rIns="0" tIns="0" bIns="0">
+          <a:bodyPr wrap="square" anchor="ctr" lIns="76200" rIns="76200" tIns="50800" bIns="50800">
             <a:spAutoFit/>
           </a:bodyPr>
           <a:lstStyle/>
           <a:p>
             <a:r>
-              <a:rPr sz="1600" b="1" i="0">
+              <a:rPr sz="1500" b="1" i="0">
                 <a:solidFill>
                   <a:srgbClr val="4F46E5"/>
                 </a:solidFill>
-                <a:latin typeface="Arial"/>
+                <a:latin typeface="Calibri"/>
               </a:rPr>
               <a:t>5.  </a:t>
             </a:r>
             <a:r>
-              <a:rPr sz="1500" b="1" i="0">
+              <a:rPr sz="1400" b="1" i="0">
                 <a:solidFill>
                   <a:srgbClr val="0F172A"/>
                 </a:solidFill>
-                <a:latin typeface="Arial"/>
+                <a:latin typeface="Calibri"/>
               </a:rPr>
               <a:t>Pipeline technique d'inférence</a:t>
             </a:r>
@@ -5913,18 +5885,18 @@
         </p:nvSpPr>
         <p:spPr>
           <a:xfrm>
-            <a:off x="6153912" y="3694176"/>
-            <a:ext cx="5394960" cy="868680"/>
+            <a:off x="6159855" y="3694176"/>
+            <a:ext cx="5528919" cy="987552"/>
           </a:xfrm>
           <a:prstGeom prst="roundRect">
             <a:avLst>
-              <a:gd name="adj" fmla="val 6000"/>
+              <a:gd name="adj" fmla="val 5000"/>
             </a:avLst>
           </a:prstGeom>
           <a:solidFill>
             <a:srgbClr val="F8FAFC"/>
           </a:solidFill>
-          <a:ln w="12700">
+          <a:ln w="9525">
             <a:solidFill>
               <a:srgbClr val="E2E8F0"/>
             </a:solidFill>
@@ -5955,19 +5927,17 @@
       </p:sp>
       <p:sp>
         <p:nvSpPr>
-          <p:cNvPr id="22" name="Rounded Rectangle 21"/>
+          <p:cNvPr id="22" name="Rectangle 21"/>
           <p:cNvSpPr/>
           <p:nvPr/>
         </p:nvSpPr>
         <p:spPr>
           <a:xfrm>
-            <a:off x="6153912" y="3694176"/>
-            <a:ext cx="64008" cy="868680"/>
-          </a:xfrm>
-          <a:prstGeom prst="roundRect">
-            <a:avLst>
-              <a:gd name="adj" fmla="val 50000"/>
-            </a:avLst>
+            <a:off x="6159855" y="3730752"/>
+            <a:ext cx="64008" cy="914400"/>
+          </a:xfrm>
+          <a:prstGeom prst="rect">
+            <a:avLst/>
           </a:prstGeom>
           <a:solidFill>
             <a:srgbClr val="4F46E5"/>
@@ -6007,8 +5977,8 @@
         </p:nvSpPr>
         <p:spPr>
           <a:xfrm>
-            <a:off x="6473952" y="3694176"/>
-            <a:ext cx="4937760" cy="868680"/>
+            <a:off x="6351879" y="3694176"/>
+            <a:ext cx="5263743" cy="987552"/>
           </a:xfrm>
           <a:prstGeom prst="rect">
             <a:avLst/>
@@ -6016,26 +5986,26 @@
           <a:noFill/>
         </p:spPr>
         <p:txBody>
-          <a:bodyPr wrap="square" anchor="ctr" lIns="0" rIns="0" tIns="0" bIns="0">
+          <a:bodyPr wrap="square" anchor="ctr" lIns="76200" rIns="76200" tIns="50800" bIns="50800">
             <a:spAutoFit/>
           </a:bodyPr>
           <a:lstStyle/>
           <a:p>
             <a:r>
-              <a:rPr sz="1600" b="1" i="0">
+              <a:rPr sz="1500" b="1" i="0">
                 <a:solidFill>
                   <a:srgbClr val="4F46E5"/>
                 </a:solidFill>
-                <a:latin typeface="Arial"/>
+                <a:latin typeface="Calibri"/>
               </a:rPr>
               <a:t>6.  </a:t>
             </a:r>
             <a:r>
-              <a:rPr sz="1500" b="1" i="0">
+              <a:rPr sz="1400" b="1" i="0">
                 <a:solidFill>
                   <a:srgbClr val="0F172A"/>
                 </a:solidFill>
-                <a:latin typeface="Arial"/>
+                <a:latin typeface="Calibri"/>
               </a:rPr>
               <a:t>Déploiement sur Google Colab</a:t>
             </a:r>
@@ -6050,18 +6020,18 @@
         </p:nvSpPr>
         <p:spPr>
           <a:xfrm>
-            <a:off x="640080" y="4764024"/>
-            <a:ext cx="5394960" cy="868680"/>
+            <a:off x="502920" y="4837176"/>
+            <a:ext cx="5528919" cy="987552"/>
           </a:xfrm>
           <a:prstGeom prst="roundRect">
             <a:avLst>
-              <a:gd name="adj" fmla="val 6000"/>
+              <a:gd name="adj" fmla="val 5000"/>
             </a:avLst>
           </a:prstGeom>
           <a:solidFill>
             <a:srgbClr val="F8FAFC"/>
           </a:solidFill>
-          <a:ln w="12700">
+          <a:ln w="9525">
             <a:solidFill>
               <a:srgbClr val="E2E8F0"/>
             </a:solidFill>
@@ -6092,19 +6062,17 @@
       </p:sp>
       <p:sp>
         <p:nvSpPr>
-          <p:cNvPr id="25" name="Rounded Rectangle 24"/>
+          <p:cNvPr id="25" name="Rectangle 24"/>
           <p:cNvSpPr/>
           <p:nvPr/>
         </p:nvSpPr>
         <p:spPr>
           <a:xfrm>
-            <a:off x="640080" y="4764024"/>
-            <a:ext cx="64008" cy="868680"/>
-          </a:xfrm>
-          <a:prstGeom prst="roundRect">
-            <a:avLst>
-              <a:gd name="adj" fmla="val 50000"/>
-            </a:avLst>
+            <a:off x="502920" y="4873752"/>
+            <a:ext cx="64008" cy="914400"/>
+          </a:xfrm>
+          <a:prstGeom prst="rect">
+            <a:avLst/>
           </a:prstGeom>
           <a:solidFill>
             <a:srgbClr val="4F46E5"/>
@@ -6144,8 +6112,8 @@
         </p:nvSpPr>
         <p:spPr>
           <a:xfrm>
-            <a:off x="960119" y="4764024"/>
-            <a:ext cx="4937760" cy="868680"/>
+            <a:off x="694944" y="4837176"/>
+            <a:ext cx="5263743" cy="987552"/>
           </a:xfrm>
           <a:prstGeom prst="rect">
             <a:avLst/>
@@ -6153,26 +6121,26 @@
           <a:noFill/>
         </p:spPr>
         <p:txBody>
-          <a:bodyPr wrap="square" anchor="ctr" lIns="0" rIns="0" tIns="0" bIns="0">
+          <a:bodyPr wrap="square" anchor="ctr" lIns="76200" rIns="76200" tIns="50800" bIns="50800">
             <a:spAutoFit/>
           </a:bodyPr>
           <a:lstStyle/>
           <a:p>
             <a:r>
-              <a:rPr sz="1600" b="1" i="0">
+              <a:rPr sz="1500" b="1" i="0">
                 <a:solidFill>
                   <a:srgbClr val="4F46E5"/>
                 </a:solidFill>
-                <a:latin typeface="Arial"/>
+                <a:latin typeface="Calibri"/>
               </a:rPr>
               <a:t>7.  </a:t>
             </a:r>
             <a:r>
-              <a:rPr sz="1500" b="1" i="0">
+              <a:rPr sz="1400" b="1" i="0">
                 <a:solidFill>
                   <a:srgbClr val="0F172A"/>
                 </a:solidFill>
-                <a:latin typeface="Arial"/>
+                <a:latin typeface="Calibri"/>
               </a:rPr>
               <a:t>Difficultés &amp; solutions</a:t>
             </a:r>
@@ -6187,18 +6155,18 @@
         </p:nvSpPr>
         <p:spPr>
           <a:xfrm>
-            <a:off x="6153912" y="4764024"/>
-            <a:ext cx="5394960" cy="868680"/>
+            <a:off x="6159855" y="4837176"/>
+            <a:ext cx="5528919" cy="987552"/>
           </a:xfrm>
           <a:prstGeom prst="roundRect">
             <a:avLst>
-              <a:gd name="adj" fmla="val 6000"/>
+              <a:gd name="adj" fmla="val 5000"/>
             </a:avLst>
           </a:prstGeom>
           <a:solidFill>
             <a:srgbClr val="F8FAFC"/>
           </a:solidFill>
-          <a:ln w="12700">
+          <a:ln w="9525">
             <a:solidFill>
               <a:srgbClr val="E2E8F0"/>
             </a:solidFill>
@@ -6229,19 +6197,17 @@
       </p:sp>
       <p:sp>
         <p:nvSpPr>
-          <p:cNvPr id="28" name="Rounded Rectangle 27"/>
+          <p:cNvPr id="28" name="Rectangle 27"/>
           <p:cNvSpPr/>
           <p:nvPr/>
         </p:nvSpPr>
         <p:spPr>
           <a:xfrm>
-            <a:off x="6153912" y="4764024"/>
-            <a:ext cx="64008" cy="868680"/>
-          </a:xfrm>
-          <a:prstGeom prst="roundRect">
-            <a:avLst>
-              <a:gd name="adj" fmla="val 50000"/>
-            </a:avLst>
+            <a:off x="6159855" y="4873752"/>
+            <a:ext cx="64008" cy="914400"/>
+          </a:xfrm>
+          <a:prstGeom prst="rect">
+            <a:avLst/>
           </a:prstGeom>
           <a:solidFill>
             <a:srgbClr val="4F46E5"/>
@@ -6281,8 +6247,8 @@
         </p:nvSpPr>
         <p:spPr>
           <a:xfrm>
-            <a:off x="6473952" y="4764024"/>
-            <a:ext cx="4937760" cy="868680"/>
+            <a:off x="6351879" y="4837176"/>
+            <a:ext cx="5263743" cy="987552"/>
           </a:xfrm>
           <a:prstGeom prst="rect">
             <a:avLst/>
@@ -6290,26 +6256,26 @@
           <a:noFill/>
         </p:spPr>
         <p:txBody>
-          <a:bodyPr wrap="square" anchor="ctr" lIns="0" rIns="0" tIns="0" bIns="0">
+          <a:bodyPr wrap="square" anchor="ctr" lIns="76200" rIns="76200" tIns="50800" bIns="50800">
             <a:spAutoFit/>
           </a:bodyPr>
           <a:lstStyle/>
           <a:p>
             <a:r>
-              <a:rPr sz="1600" b="1" i="0">
+              <a:rPr sz="1500" b="1" i="0">
                 <a:solidFill>
                   <a:srgbClr val="4F46E5"/>
                 </a:solidFill>
-                <a:latin typeface="Arial"/>
+                <a:latin typeface="Calibri"/>
               </a:rPr>
               <a:t>8.  </a:t>
             </a:r>
             <a:r>
-              <a:rPr sz="1500" b="1" i="0">
+              <a:rPr sz="1400" b="1" i="0">
                 <a:solidFill>
                   <a:srgbClr val="0F172A"/>
                 </a:solidFill>
-                <a:latin typeface="Arial"/>
+                <a:latin typeface="Calibri"/>
               </a:rPr>
               <a:t>Pistes d'amélioration</a:t>
             </a:r>
@@ -6386,8 +6352,8 @@
         </p:nvSpPr>
         <p:spPr>
           <a:xfrm>
-            <a:off x="640080" y="411480"/>
-            <a:ext cx="9601200" cy="731520"/>
+            <a:off x="502920" y="329184"/>
+            <a:ext cx="9722815" cy="713232"/>
           </a:xfrm>
           <a:prstGeom prst="rect">
             <a:avLst/>
@@ -6395,17 +6361,17 @@
           <a:noFill/>
         </p:spPr>
         <p:txBody>
-          <a:bodyPr wrap="square" anchor="t" lIns="0" rIns="0" tIns="0" bIns="0">
+          <a:bodyPr wrap="square" anchor="ctr" lIns="0" rIns="0" tIns="0" bIns="0">
             <a:spAutoFit/>
           </a:bodyPr>
           <a:lstStyle/>
           <a:p>
             <a:r>
-              <a:rPr sz="2800" b="1" i="0">
+              <a:rPr sz="2600" b="1" i="0">
                 <a:solidFill>
                   <a:srgbClr val="4338CA"/>
                 </a:solidFill>
-                <a:latin typeface="Arial"/>
+                <a:latin typeface="Calibri"/>
               </a:rPr>
               <a:t>Contexte &amp; objectifs</a:t>
             </a:r>
@@ -6420,8 +6386,8 @@
         </p:nvSpPr>
         <p:spPr>
           <a:xfrm>
-            <a:off x="10424160" y="502920"/>
-            <a:ext cx="1188720" cy="457200"/>
+            <a:off x="10408615" y="329184"/>
+            <a:ext cx="1280160" cy="713232"/>
           </a:xfrm>
           <a:prstGeom prst="rect">
             <a:avLst/>
@@ -6429,14 +6395,14 @@
           <a:noFill/>
         </p:spPr>
         <p:txBody>
-          <a:bodyPr wrap="square" anchor="t" lIns="0" rIns="0" tIns="0" bIns="0">
+          <a:bodyPr wrap="square" anchor="ctr" lIns="0" rIns="0" tIns="0" bIns="0">
             <a:spAutoFit/>
           </a:bodyPr>
           <a:lstStyle/>
           <a:p>
             <a:pPr algn="r"/>
             <a:r>
-              <a:rPr sz="1200" b="0" i="0">
+              <a:rPr sz="1100" b="0" i="0">
                 <a:solidFill>
                   <a:srgbClr val="94A3B8"/>
                 </a:solidFill>
@@ -6455,8 +6421,8 @@
         </p:nvSpPr>
         <p:spPr>
           <a:xfrm>
-            <a:off x="640080" y="1207008"/>
-            <a:ext cx="10908792" cy="31750"/>
+            <a:off x="502920" y="1143000"/>
+            <a:ext cx="11185855" cy="31750"/>
           </a:xfrm>
           <a:prstGeom prst="rect">
             <a:avLst/>
@@ -6499,8 +6465,8 @@
         </p:nvSpPr>
         <p:spPr>
           <a:xfrm>
-            <a:off x="640080" y="1554480"/>
-            <a:ext cx="5394960" cy="4572000"/>
+            <a:off x="502920" y="1353312"/>
+            <a:ext cx="5369210" cy="5340096"/>
           </a:xfrm>
           <a:prstGeom prst="rect">
             <a:avLst/>
@@ -6508,22 +6474,22 @@
           <a:noFill/>
         </p:spPr>
         <p:txBody>
-          <a:bodyPr wrap="square" anchor="t" lIns="0" rIns="0" tIns="0" bIns="0">
+          <a:bodyPr wrap="square" anchor="t" lIns="25400" rIns="25400" tIns="25400" bIns="25400">
             <a:spAutoFit/>
           </a:bodyPr>
           <a:lstStyle/>
           <a:p>
             <a:pPr>
               <a:spcAft>
-                <a:spcPts val="800"/>
+                <a:spcPts val="1000"/>
               </a:spcAft>
             </a:pPr>
             <a:r>
-              <a:rPr sz="1600" b="1" i="0">
+              <a:rPr sz="1500" b="1" i="0">
                 <a:solidFill>
                   <a:srgbClr val="4338CA"/>
                 </a:solidFill>
-                <a:latin typeface="Arial"/>
+                <a:latin typeface="Calibri"/>
               </a:rPr>
               <a:t>Pourquoi la compréhension audio ?</a:t>
             </a:r>
@@ -6539,16 +6505,16 @@
                 <a:solidFill>
                   <a:srgbClr val="4F46E5"/>
                 </a:solidFill>
-                <a:latin typeface="Arial"/>
-              </a:rPr>
-              <a:t>•  </a:t>
+                <a:latin typeface="Calibri"/>
+              </a:rPr>
+              <a:t>·  </a:t>
             </a:r>
             <a:r>
               <a:rPr sz="1300" b="0" i="0">
                 <a:solidFill>
                   <a:srgbClr val="334155"/>
                 </a:solidFill>
-                <a:latin typeface="Arial"/>
+                <a:latin typeface="Calibri"/>
               </a:rPr>
               <a:t>Les interfaces vocales sont omniprésentes</a:t>
             </a:r>
@@ -6564,16 +6530,16 @@
                 <a:solidFill>
                   <a:srgbClr val="4F46E5"/>
                 </a:solidFill>
-                <a:latin typeface="Arial"/>
-              </a:rPr>
-              <a:t>•  </a:t>
+                <a:latin typeface="Calibri"/>
+              </a:rPr>
+              <a:t>·  </a:t>
             </a:r>
             <a:r>
               <a:rPr sz="1300" b="0" i="0">
                 <a:solidFill>
                   <a:srgbClr val="334155"/>
                 </a:solidFill>
-                <a:latin typeface="Arial"/>
+                <a:latin typeface="Calibri"/>
               </a:rPr>
               <a:t>Au-delà de la transcription : comprendre le sens</a:t>
             </a:r>
@@ -6589,16 +6555,16 @@
                 <a:solidFill>
                   <a:srgbClr val="4F46E5"/>
                 </a:solidFill>
-                <a:latin typeface="Arial"/>
-              </a:rPr>
-              <a:t>•  </a:t>
+                <a:latin typeface="Calibri"/>
+              </a:rPr>
+              <a:t>·  </a:t>
             </a:r>
             <a:r>
               <a:rPr sz="1300" b="0" i="0">
                 <a:solidFill>
                   <a:srgbClr val="334155"/>
                 </a:solidFill>
-                <a:latin typeface="Arial"/>
+                <a:latin typeface="Calibri"/>
               </a:rPr>
               <a:t>Analyse de réunions, podcasts, cours enregistrés</a:t>
             </a:r>
@@ -6614,16 +6580,16 @@
                 <a:solidFill>
                   <a:srgbClr val="4F46E5"/>
                 </a:solidFill>
-                <a:latin typeface="Arial"/>
-              </a:rPr>
-              <a:t>•  </a:t>
+                <a:latin typeface="Calibri"/>
+              </a:rPr>
+              <a:t>·  </a:t>
             </a:r>
             <a:r>
               <a:rPr sz="1300" b="0" i="0">
                 <a:solidFill>
                   <a:srgbClr val="334155"/>
                 </a:solidFill>
-                <a:latin typeface="Arial"/>
+                <a:latin typeface="Calibri"/>
               </a:rPr>
               <a:t>Accessibilité pour les personnes malentendantes</a:t>
             </a:r>
@@ -6639,18 +6605,18 @@
                 <a:solidFill>
                   <a:srgbClr val="4F46E5"/>
                 </a:solidFill>
-                <a:latin typeface="Arial"/>
-              </a:rPr>
-              <a:t>•  </a:t>
+                <a:latin typeface="Calibri"/>
+              </a:rPr>
+              <a:t>·  </a:t>
             </a:r>
             <a:r>
               <a:rPr sz="1300" b="0" i="0">
                 <a:solidFill>
                   <a:srgbClr val="334155"/>
                 </a:solidFill>
-                <a:latin typeface="Arial"/>
-              </a:rPr>
-              <a:t>Marchés en forte croissance (assistants, centres d'appels, éducation)</a:t>
+                <a:latin typeface="Calibri"/>
+              </a:rPr>
+              <a:t>Marchés en forte croissance</a:t>
             </a:r>
           </a:p>
         </p:txBody>
@@ -6663,8 +6629,8 @@
         </p:nvSpPr>
         <p:spPr>
           <a:xfrm>
-            <a:off x="6355080" y="1554480"/>
-            <a:ext cx="5212080" cy="457200"/>
+            <a:off x="6000146" y="1353312"/>
+            <a:ext cx="5688628" cy="347472"/>
           </a:xfrm>
           <a:prstGeom prst="rect">
             <a:avLst/>
@@ -6678,11 +6644,11 @@
           <a:lstStyle/>
           <a:p>
             <a:r>
-              <a:rPr sz="1600" b="1" i="0">
+              <a:rPr sz="1500" b="1" i="0">
                 <a:solidFill>
                   <a:srgbClr val="4338CA"/>
                 </a:solidFill>
-                <a:latin typeface="Arial"/>
+                <a:latin typeface="Calibri"/>
               </a:rPr>
               <a:t>Objectifs du projet</a:t>
             </a:r>
@@ -6697,18 +6663,18 @@
         </p:nvSpPr>
         <p:spPr>
           <a:xfrm>
-            <a:off x="6355080" y="2057400"/>
-            <a:ext cx="5166360" cy="1234440"/>
+            <a:off x="6000146" y="1773936"/>
+            <a:ext cx="5688628" cy="1335024"/>
           </a:xfrm>
           <a:prstGeom prst="roundRect">
             <a:avLst>
-              <a:gd name="adj" fmla="val 6000"/>
+              <a:gd name="adj" fmla="val 5000"/>
             </a:avLst>
           </a:prstGeom>
           <a:solidFill>
             <a:srgbClr val="F8FAFC"/>
           </a:solidFill>
-          <a:ln w="12700">
+          <a:ln w="9525">
             <a:solidFill>
               <a:srgbClr val="E2E8F0"/>
             </a:solidFill>
@@ -6739,19 +6705,17 @@
       </p:sp>
       <p:sp>
         <p:nvSpPr>
-          <p:cNvPr id="9" name="Rounded Rectangle 8"/>
+          <p:cNvPr id="9" name="Rectangle 8"/>
           <p:cNvSpPr/>
           <p:nvPr/>
         </p:nvSpPr>
         <p:spPr>
           <a:xfrm>
-            <a:off x="6355080" y="2057400"/>
-            <a:ext cx="64008" cy="1234440"/>
-          </a:xfrm>
-          <a:prstGeom prst="roundRect">
-            <a:avLst>
-              <a:gd name="adj" fmla="val 50000"/>
-            </a:avLst>
+            <a:off x="6000146" y="1810512"/>
+            <a:ext cx="64008" cy="1261872"/>
+          </a:xfrm>
+          <a:prstGeom prst="rect">
+            <a:avLst/>
           </a:prstGeom>
           <a:solidFill>
             <a:srgbClr val="059669"/>
@@ -6791,8 +6755,8 @@
         </p:nvSpPr>
         <p:spPr>
           <a:xfrm>
-            <a:off x="6611112" y="2240280"/>
-            <a:ext cx="4754880" cy="914400"/>
+            <a:off x="6192170" y="1773936"/>
+            <a:ext cx="5423452" cy="1335024"/>
           </a:xfrm>
           <a:prstGeom prst="rect">
             <a:avLst/>
@@ -6800,22 +6764,22 @@
           <a:noFill/>
         </p:spPr>
         <p:txBody>
-          <a:bodyPr wrap="square" anchor="t" lIns="0" rIns="0" tIns="0" bIns="0">
+          <a:bodyPr wrap="square" anchor="ctr" lIns="50800" rIns="50800" tIns="76200" bIns="76200">
             <a:spAutoFit/>
           </a:bodyPr>
           <a:lstStyle/>
           <a:p>
             <a:pPr>
               <a:spcAft>
-                <a:spcPts val="600"/>
+                <a:spcPts val="500"/>
               </a:spcAft>
             </a:pPr>
             <a:r>
-              <a:rPr sz="1500" b="1" i="0">
+              <a:rPr sz="1400" b="1" i="0">
                 <a:solidFill>
                   <a:srgbClr val="0F172A"/>
                 </a:solidFill>
-                <a:latin typeface="Arial"/>
+                <a:latin typeface="Calibri"/>
               </a:rPr>
               <a:t>API opérationnelle</a:t>
             </a:r>
@@ -6823,17 +6787,17 @@
           <a:p>
             <a:pPr>
               <a:spcAft>
-                <a:spcPts val="300"/>
+                <a:spcPts val="200"/>
               </a:spcAft>
             </a:pPr>
             <a:r>
-              <a:rPr sz="1200" b="0" i="0">
+              <a:rPr sz="1100" b="0" i="0">
                 <a:solidFill>
                   <a:srgbClr val="334155"/>
                 </a:solidFill>
-                <a:latin typeface="Arial"/>
-              </a:rPr>
-              <a:t>Points de terminaison POST fonctionnels avec le modèle</a:t>
+                <a:latin typeface="Calibri"/>
+              </a:rPr>
+              <a:t>· 3 endpoints POST opérationnels avec le modèle Qwen2-Audio</a:t>
             </a:r>
           </a:p>
         </p:txBody>
@@ -6846,18 +6810,18 @@
         </p:nvSpPr>
         <p:spPr>
           <a:xfrm>
-            <a:off x="6355080" y="3429000"/>
-            <a:ext cx="5166360" cy="1234440"/>
+            <a:off x="6000146" y="3236976"/>
+            <a:ext cx="5688628" cy="1335024"/>
           </a:xfrm>
           <a:prstGeom prst="roundRect">
             <a:avLst>
-              <a:gd name="adj" fmla="val 6000"/>
+              <a:gd name="adj" fmla="val 5000"/>
             </a:avLst>
           </a:prstGeom>
           <a:solidFill>
             <a:srgbClr val="F8FAFC"/>
           </a:solidFill>
-          <a:ln w="12700">
+          <a:ln w="9525">
             <a:solidFill>
               <a:srgbClr val="E2E8F0"/>
             </a:solidFill>
@@ -6888,19 +6852,17 @@
       </p:sp>
       <p:sp>
         <p:nvSpPr>
-          <p:cNvPr id="12" name="Rounded Rectangle 11"/>
+          <p:cNvPr id="12" name="Rectangle 11"/>
           <p:cNvSpPr/>
           <p:nvPr/>
         </p:nvSpPr>
         <p:spPr>
           <a:xfrm>
-            <a:off x="6355080" y="3429000"/>
-            <a:ext cx="64008" cy="1234440"/>
-          </a:xfrm>
-          <a:prstGeom prst="roundRect">
-            <a:avLst>
-              <a:gd name="adj" fmla="val 50000"/>
-            </a:avLst>
+            <a:off x="6000146" y="3273552"/>
+            <a:ext cx="64008" cy="1261872"/>
+          </a:xfrm>
+          <a:prstGeom prst="rect">
+            <a:avLst/>
           </a:prstGeom>
           <a:solidFill>
             <a:srgbClr val="059669"/>
@@ -6940,8 +6902,8 @@
         </p:nvSpPr>
         <p:spPr>
           <a:xfrm>
-            <a:off x="6611112" y="3611880"/>
-            <a:ext cx="4754880" cy="914400"/>
+            <a:off x="6192170" y="3236976"/>
+            <a:ext cx="5423452" cy="1335024"/>
           </a:xfrm>
           <a:prstGeom prst="rect">
             <a:avLst/>
@@ -6949,22 +6911,22 @@
           <a:noFill/>
         </p:spPr>
         <p:txBody>
-          <a:bodyPr wrap="square" anchor="t" lIns="0" rIns="0" tIns="0" bIns="0">
+          <a:bodyPr wrap="square" anchor="ctr" lIns="50800" rIns="50800" tIns="76200" bIns="76200">
             <a:spAutoFit/>
           </a:bodyPr>
           <a:lstStyle/>
           <a:p>
             <a:pPr>
               <a:spcAft>
-                <a:spcPts val="600"/>
+                <a:spcPts val="500"/>
               </a:spcAft>
             </a:pPr>
             <a:r>
-              <a:rPr sz="1500" b="1" i="0">
+              <a:rPr sz="1400" b="1" i="0">
                 <a:solidFill>
                   <a:srgbClr val="0F172A"/>
                 </a:solidFill>
-                <a:latin typeface="Arial"/>
+                <a:latin typeface="Calibri"/>
               </a:rPr>
               <a:t>Mise en application</a:t>
             </a:r>
@@ -6972,17 +6934,17 @@
           <a:p>
             <a:pPr>
               <a:spcAft>
-                <a:spcPts val="300"/>
+                <a:spcPts val="200"/>
               </a:spcAft>
             </a:pPr>
             <a:r>
-              <a:rPr sz="1200" b="0" i="0">
+              <a:rPr sz="1100" b="0" i="0">
                 <a:solidFill>
                   <a:srgbClr val="334155"/>
                 </a:solidFill>
-                <a:latin typeface="Arial"/>
-              </a:rPr>
-              <a:t>Plateforme web complète d'Audio Understanding</a:t>
+                <a:latin typeface="Calibri"/>
+              </a:rPr>
+              <a:t>· Plateforme web complète d'Audio Understanding</a:t>
             </a:r>
           </a:p>
         </p:txBody>
@@ -6995,18 +6957,18 @@
         </p:nvSpPr>
         <p:spPr>
           <a:xfrm>
-            <a:off x="6355080" y="4800600"/>
-            <a:ext cx="5166360" cy="1234440"/>
+            <a:off x="6000146" y="4700016"/>
+            <a:ext cx="5688628" cy="1335024"/>
           </a:xfrm>
           <a:prstGeom prst="roundRect">
             <a:avLst>
-              <a:gd name="adj" fmla="val 6000"/>
+              <a:gd name="adj" fmla="val 5000"/>
             </a:avLst>
           </a:prstGeom>
           <a:solidFill>
             <a:srgbClr val="F8FAFC"/>
           </a:solidFill>
-          <a:ln w="12700">
+          <a:ln w="9525">
             <a:solidFill>
               <a:srgbClr val="E2E8F0"/>
             </a:solidFill>
@@ -7037,19 +6999,17 @@
       </p:sp>
       <p:sp>
         <p:nvSpPr>
-          <p:cNvPr id="15" name="Rounded Rectangle 14"/>
+          <p:cNvPr id="15" name="Rectangle 14"/>
           <p:cNvSpPr/>
           <p:nvPr/>
         </p:nvSpPr>
         <p:spPr>
           <a:xfrm>
-            <a:off x="6355080" y="4800600"/>
-            <a:ext cx="64008" cy="1234440"/>
-          </a:xfrm>
-          <a:prstGeom prst="roundRect">
-            <a:avLst>
-              <a:gd name="adj" fmla="val 50000"/>
-            </a:avLst>
+            <a:off x="6000146" y="4736592"/>
+            <a:ext cx="64008" cy="1261872"/>
+          </a:xfrm>
+          <a:prstGeom prst="rect">
+            <a:avLst/>
           </a:prstGeom>
           <a:solidFill>
             <a:srgbClr val="059669"/>
@@ -7089,8 +7049,8 @@
         </p:nvSpPr>
         <p:spPr>
           <a:xfrm>
-            <a:off x="6611112" y="4983480"/>
-            <a:ext cx="4754880" cy="914400"/>
+            <a:off x="6192170" y="4700016"/>
+            <a:ext cx="5423452" cy="1335024"/>
           </a:xfrm>
           <a:prstGeom prst="rect">
             <a:avLst/>
@@ -7098,22 +7058,22 @@
           <a:noFill/>
         </p:spPr>
         <p:txBody>
-          <a:bodyPr wrap="square" anchor="t" lIns="0" rIns="0" tIns="0" bIns="0">
+          <a:bodyPr wrap="square" anchor="ctr" lIns="50800" rIns="50800" tIns="76200" bIns="76200">
             <a:spAutoFit/>
           </a:bodyPr>
           <a:lstStyle/>
           <a:p>
             <a:pPr>
               <a:spcAft>
-                <a:spcPts val="600"/>
+                <a:spcPts val="500"/>
               </a:spcAft>
             </a:pPr>
             <a:r>
-              <a:rPr sz="1500" b="1" i="0">
+              <a:rPr sz="1400" b="1" i="0">
                 <a:solidFill>
                   <a:srgbClr val="0F172A"/>
                 </a:solidFill>
-                <a:latin typeface="Arial"/>
+                <a:latin typeface="Calibri"/>
               </a:rPr>
               <a:t>Rapport &amp; présentation</a:t>
             </a:r>
@@ -7121,17 +7081,17 @@
           <a:p>
             <a:pPr>
               <a:spcAft>
-                <a:spcPts val="300"/>
+                <a:spcPts val="200"/>
               </a:spcAft>
             </a:pPr>
             <a:r>
-              <a:rPr sz="1200" b="0" i="0">
+              <a:rPr sz="1100" b="0" i="0">
                 <a:solidFill>
                   <a:srgbClr val="334155"/>
                 </a:solidFill>
-                <a:latin typeface="Arial"/>
-              </a:rPr>
-              <a:t>Documentation académique du travail réalisé</a:t>
+                <a:latin typeface="Calibri"/>
+              </a:rPr>
+              <a:t>· Documentation académique du travail réalisé</a:t>
             </a:r>
           </a:p>
         </p:txBody>
@@ -7206,8 +7166,8 @@
         </p:nvSpPr>
         <p:spPr>
           <a:xfrm>
-            <a:off x="640080" y="411480"/>
-            <a:ext cx="9601200" cy="731520"/>
+            <a:off x="502920" y="329184"/>
+            <a:ext cx="9722815" cy="713232"/>
           </a:xfrm>
           <a:prstGeom prst="rect">
             <a:avLst/>
@@ -7215,26 +7175,26 @@
           <a:noFill/>
         </p:spPr>
         <p:txBody>
-          <a:bodyPr wrap="square" anchor="t" lIns="0" rIns="0" tIns="0" bIns="0">
+          <a:bodyPr wrap="square" anchor="ctr" lIns="0" rIns="0" tIns="0" bIns="0">
             <a:spAutoFit/>
           </a:bodyPr>
           <a:lstStyle/>
           <a:p>
             <a:r>
-              <a:rPr sz="2800" b="1" i="0">
+              <a:rPr sz="2600" b="1" i="0">
                 <a:solidFill>
                   <a:srgbClr val="4338CA"/>
                 </a:solidFill>
-                <a:latin typeface="Arial"/>
+                <a:latin typeface="Calibri"/>
               </a:rPr>
               <a:t>Le modèle : </a:t>
             </a:r>
             <a:r>
-              <a:rPr sz="2800" b="1" i="0">
+              <a:rPr sz="2600" b="1" i="0">
                 <a:solidFill>
                   <a:srgbClr val="4F46E5"/>
                 </a:solidFill>
-                <a:latin typeface="Arial"/>
+                <a:latin typeface="Calibri"/>
               </a:rPr>
               <a:t>Qwen2-Audio-7B-Instruct</a:t>
             </a:r>
@@ -7249,8 +7209,8 @@
         </p:nvSpPr>
         <p:spPr>
           <a:xfrm>
-            <a:off x="10424160" y="502920"/>
-            <a:ext cx="1188720" cy="457200"/>
+            <a:off x="10408615" y="329184"/>
+            <a:ext cx="1280160" cy="713232"/>
           </a:xfrm>
           <a:prstGeom prst="rect">
             <a:avLst/>
@@ -7258,14 +7218,14 @@
           <a:noFill/>
         </p:spPr>
         <p:txBody>
-          <a:bodyPr wrap="square" anchor="t" lIns="0" rIns="0" tIns="0" bIns="0">
+          <a:bodyPr wrap="square" anchor="ctr" lIns="0" rIns="0" tIns="0" bIns="0">
             <a:spAutoFit/>
           </a:bodyPr>
           <a:lstStyle/>
           <a:p>
             <a:pPr algn="r"/>
             <a:r>
-              <a:rPr sz="1200" b="0" i="0">
+              <a:rPr sz="1100" b="0" i="0">
                 <a:solidFill>
                   <a:srgbClr val="94A3B8"/>
                 </a:solidFill>
@@ -7284,8 +7244,8 @@
         </p:nvSpPr>
         <p:spPr>
           <a:xfrm>
-            <a:off x="640080" y="1207008"/>
-            <a:ext cx="10908792" cy="31750"/>
+            <a:off x="502920" y="1143000"/>
+            <a:ext cx="11185855" cy="31750"/>
           </a:xfrm>
           <a:prstGeom prst="rect">
             <a:avLst/>
@@ -7328,8 +7288,8 @@
         </p:nvSpPr>
         <p:spPr>
           <a:xfrm>
-            <a:off x="640080" y="1463040"/>
-            <a:ext cx="5394960" cy="365760"/>
+            <a:off x="502920" y="1353312"/>
+            <a:ext cx="5257351" cy="347472"/>
           </a:xfrm>
           <a:prstGeom prst="rect">
             <a:avLst/>
@@ -7343,11 +7303,11 @@
           <a:lstStyle/>
           <a:p>
             <a:r>
-              <a:rPr sz="1600" b="1" i="0">
+              <a:rPr sz="1500" b="1" i="0">
                 <a:solidFill>
                   <a:srgbClr val="4338CA"/>
                 </a:solidFill>
-                <a:latin typeface="Arial"/>
+                <a:latin typeface="Calibri"/>
               </a:rPr>
               <a:t>Architecture</a:t>
             </a:r>
@@ -7362,18 +7322,18 @@
         </p:nvSpPr>
         <p:spPr>
           <a:xfrm>
-            <a:off x="640080" y="1920240"/>
-            <a:ext cx="5394960" cy="4206240"/>
+            <a:off x="502920" y="1737360"/>
+            <a:ext cx="5257351" cy="4956048"/>
           </a:xfrm>
           <a:prstGeom prst="roundRect">
             <a:avLst>
-              <a:gd name="adj" fmla="val 6000"/>
+              <a:gd name="adj" fmla="val 5000"/>
             </a:avLst>
           </a:prstGeom>
           <a:solidFill>
             <a:srgbClr val="F8FAFC"/>
           </a:solidFill>
-          <a:ln w="12700">
+          <a:ln w="9525">
             <a:solidFill>
               <a:srgbClr val="E2E8F0"/>
             </a:solidFill>
@@ -7404,19 +7364,17 @@
       </p:sp>
       <p:sp>
         <p:nvSpPr>
-          <p:cNvPr id="8" name="Rounded Rectangle 7"/>
+          <p:cNvPr id="8" name="Rectangle 7"/>
           <p:cNvSpPr/>
           <p:nvPr/>
         </p:nvSpPr>
         <p:spPr>
           <a:xfrm>
-            <a:off x="640080" y="1920240"/>
-            <a:ext cx="64008" cy="4206240"/>
-          </a:xfrm>
-          <a:prstGeom prst="roundRect">
-            <a:avLst>
-              <a:gd name="adj" fmla="val 50000"/>
-            </a:avLst>
+            <a:off x="502920" y="1773936"/>
+            <a:ext cx="64008" cy="4882896"/>
+          </a:xfrm>
+          <a:prstGeom prst="rect">
+            <a:avLst/>
           </a:prstGeom>
           <a:solidFill>
             <a:srgbClr val="4F46E5"/>
@@ -7456,8 +7414,8 @@
         </p:nvSpPr>
         <p:spPr>
           <a:xfrm>
-            <a:off x="914400" y="2121408"/>
-            <a:ext cx="4937760" cy="3840479"/>
+            <a:off x="694944" y="1737360"/>
+            <a:ext cx="4992175" cy="4956048"/>
           </a:xfrm>
           <a:prstGeom prst="rect">
             <a:avLst/>
@@ -7465,18 +7423,18 @@
           <a:noFill/>
         </p:spPr>
         <p:txBody>
-          <a:bodyPr wrap="square" anchor="t" lIns="0" rIns="0" tIns="0" bIns="0">
+          <a:bodyPr wrap="square" anchor="ctr" lIns="50800" rIns="50800" tIns="101600" bIns="101600">
             <a:spAutoFit/>
           </a:bodyPr>
           <a:lstStyle/>
           <a:p>
             <a:pPr>
               <a:spcAft>
-                <a:spcPts val="200"/>
+                <a:spcPts val="100"/>
               </a:spcAft>
             </a:pPr>
             <a:r>
-              <a:rPr sz="1200" b="0" i="0">
+              <a:rPr sz="1100" b="0" i="0">
                 <a:solidFill>
                   <a:srgbClr val="334155"/>
                 </a:solidFill>
@@ -7488,310 +7446,262 @@
           <a:p>
             <a:pPr>
               <a:spcAft>
-                <a:spcPts val="200"/>
+                <a:spcPts val="100"/>
               </a:spcAft>
             </a:pPr>
             <a:r>
-              <a:rPr sz="1200" b="0" i="0">
+              <a:rPr sz="1100" b="0" i="0">
                 <a:solidFill>
                   <a:srgbClr val="334155"/>
                 </a:solidFill>
                 <a:latin typeface="Consolas"/>
               </a:rPr>
-              <a:t>        |</a:t>
+              <a:t>       |</a:t>
             </a:r>
           </a:p>
           <a:p>
             <a:pPr>
               <a:spcAft>
-                <a:spcPts val="200"/>
+                <a:spcPts val="100"/>
               </a:spcAft>
             </a:pPr>
             <a:r>
-              <a:rPr sz="1200" b="0" i="0">
+              <a:rPr sz="1100" b="0" i="0">
                 <a:solidFill>
                   <a:srgbClr val="334155"/>
                 </a:solidFill>
                 <a:latin typeface="Consolas"/>
               </a:rPr>
-              <a:t>        v</a:t>
+              <a:t>       v</a:t>
             </a:r>
           </a:p>
           <a:p>
             <a:pPr>
               <a:spcAft>
-                <a:spcPts val="200"/>
+                <a:spcPts val="100"/>
               </a:spcAft>
             </a:pPr>
             <a:r>
-              <a:rPr sz="1200" b="0" i="0">
+              <a:rPr sz="1100" b="0" i="0">
                 <a:solidFill>
                   <a:srgbClr val="334155"/>
                 </a:solidFill>
                 <a:latin typeface="Consolas"/>
               </a:rPr>
-              <a:t>  Encodeur audio</a:t>
+              <a:t>  Encodeur audio  (Whisper Large V2)</a:t>
             </a:r>
           </a:p>
           <a:p>
             <a:pPr>
               <a:spcAft>
-                <a:spcPts val="200"/>
+                <a:spcPts val="100"/>
               </a:spcAft>
             </a:pPr>
             <a:r>
-              <a:rPr sz="1200" b="0" i="0">
+              <a:rPr sz="1100" b="0" i="0">
                 <a:solidFill>
                   <a:srgbClr val="334155"/>
                 </a:solidFill>
                 <a:latin typeface="Consolas"/>
               </a:rPr>
-              <a:t>  Whisper Large V2</a:t>
+              <a:t>  -&gt; embeddings audio</a:t>
             </a:r>
           </a:p>
           <a:p>
             <a:pPr>
               <a:spcAft>
-                <a:spcPts val="200"/>
+                <a:spcPts val="100"/>
               </a:spcAft>
             </a:pPr>
             <a:r>
-              <a:rPr sz="1200" b="0" i="0">
+              <a:rPr sz="1100" b="0" i="0">
                 <a:solidFill>
                   <a:srgbClr val="334155"/>
                 </a:solidFill>
                 <a:latin typeface="Consolas"/>
               </a:rPr>
-              <a:t>  -&gt; embeddings audio</a:t>
+              <a:t>       |</a:t>
             </a:r>
           </a:p>
           <a:p>
             <a:pPr>
               <a:spcAft>
-                <a:spcPts val="200"/>
+                <a:spcPts val="100"/>
               </a:spcAft>
             </a:pPr>
             <a:r>
-              <a:rPr sz="1200" b="0" i="0">
+              <a:rPr sz="1100" b="0" i="0">
                 <a:solidFill>
                   <a:srgbClr val="334155"/>
                 </a:solidFill>
                 <a:latin typeface="Consolas"/>
               </a:rPr>
-              <a:t>        |</a:t>
+              <a:t>       v  &lt;-- prompt texte</a:t>
             </a:r>
           </a:p>
           <a:p>
             <a:pPr>
               <a:spcAft>
-                <a:spcPts val="200"/>
+                <a:spcPts val="100"/>
               </a:spcAft>
             </a:pPr>
             <a:r>
-              <a:rPr sz="1200" b="0" i="0">
+              <a:rPr sz="1100" b="0" i="0">
                 <a:solidFill>
                   <a:srgbClr val="334155"/>
                 </a:solidFill>
                 <a:latin typeface="Consolas"/>
               </a:rPr>
-              <a:t>        v   &lt;-- prompt texte</a:t>
+              <a:t>  Fusion multimodale</a:t>
             </a:r>
           </a:p>
           <a:p>
             <a:pPr>
               <a:spcAft>
-                <a:spcPts val="200"/>
+                <a:spcPts val="100"/>
               </a:spcAft>
             </a:pPr>
             <a:r>
-              <a:rPr sz="1200" b="0" i="0">
+              <a:rPr sz="1100" b="0" i="0">
                 <a:solidFill>
                   <a:srgbClr val="334155"/>
                 </a:solidFill>
                 <a:latin typeface="Consolas"/>
               </a:rPr>
-              <a:t>  Fusion multimodale</a:t>
+              <a:t>  (concaténation des tokens)</a:t>
             </a:r>
           </a:p>
           <a:p>
             <a:pPr>
               <a:spcAft>
-                <a:spcPts val="200"/>
+                <a:spcPts val="100"/>
               </a:spcAft>
             </a:pPr>
             <a:r>
-              <a:rPr sz="1200" b="0" i="0">
+              <a:rPr sz="1100" b="0" i="0">
                 <a:solidFill>
                   <a:srgbClr val="334155"/>
                 </a:solidFill>
                 <a:latin typeface="Consolas"/>
               </a:rPr>
-              <a:t>  (concaténation des tokens)</a:t>
+              <a:t>       |</a:t>
             </a:r>
           </a:p>
           <a:p>
             <a:pPr>
               <a:spcAft>
-                <a:spcPts val="200"/>
+                <a:spcPts val="100"/>
               </a:spcAft>
             </a:pPr>
             <a:r>
-              <a:rPr sz="1200" b="0" i="0">
+              <a:rPr sz="1100" b="0" i="0">
                 <a:solidFill>
                   <a:srgbClr val="334155"/>
                 </a:solidFill>
                 <a:latin typeface="Consolas"/>
               </a:rPr>
-              <a:t>        |</a:t>
+              <a:t>       v</a:t>
             </a:r>
           </a:p>
           <a:p>
             <a:pPr>
               <a:spcAft>
-                <a:spcPts val="200"/>
+                <a:spcPts val="100"/>
               </a:spcAft>
             </a:pPr>
             <a:r>
-              <a:rPr sz="1200" b="0" i="0">
+              <a:rPr sz="1100" b="0" i="0">
                 <a:solidFill>
                   <a:srgbClr val="334155"/>
                 </a:solidFill>
                 <a:latin typeface="Consolas"/>
               </a:rPr>
-              <a:t>        v</a:t>
+              <a:t>  Décodeur Qwen2-7B  (7 Md params)</a:t>
             </a:r>
           </a:p>
           <a:p>
             <a:pPr>
               <a:spcAft>
-                <a:spcPts val="200"/>
+                <a:spcPts val="100"/>
               </a:spcAft>
             </a:pPr>
             <a:r>
-              <a:rPr sz="1200" b="0" i="0">
+              <a:rPr sz="1100" b="0" i="0">
                 <a:solidFill>
                   <a:srgbClr val="334155"/>
                 </a:solidFill>
                 <a:latin typeface="Consolas"/>
               </a:rPr>
-              <a:t>  Décodeur Qwen2-7B</a:t>
+              <a:t>       |</a:t>
             </a:r>
           </a:p>
           <a:p>
             <a:pPr>
               <a:spcAft>
-                <a:spcPts val="200"/>
+                <a:spcPts val="100"/>
               </a:spcAft>
             </a:pPr>
             <a:r>
-              <a:rPr sz="1200" b="0" i="0">
+              <a:rPr sz="1100" b="0" i="0">
                 <a:solidFill>
                   <a:srgbClr val="334155"/>
                 </a:solidFill>
                 <a:latin typeface="Consolas"/>
               </a:rPr>
-              <a:t>  (7 milliards de paramètres)</a:t>
+              <a:t>       v</a:t>
             </a:r>
           </a:p>
           <a:p>
             <a:pPr>
               <a:spcAft>
-                <a:spcPts val="200"/>
+                <a:spcPts val="100"/>
               </a:spcAft>
             </a:pPr>
             <a:r>
-              <a:rPr sz="1200" b="0" i="0">
+              <a:rPr sz="1100" b="0" i="0">
                 <a:solidFill>
                   <a:srgbClr val="334155"/>
                 </a:solidFill>
                 <a:latin typeface="Consolas"/>
               </a:rPr>
-              <a:t>  génération autorégressive</a:t>
-            </a:r>
-          </a:p>
+              <a:t>  Réponse textuelle</a:t>
+            </a:r>
+          </a:p>
+        </p:txBody>
+      </p:sp>
+      <p:sp>
+        <p:nvSpPr>
+          <p:cNvPr id="10" name="TextBox 9"/>
+          <p:cNvSpPr txBox="1"/>
+          <p:nvPr/>
+        </p:nvSpPr>
+        <p:spPr>
+          <a:xfrm>
+            <a:off x="5888287" y="1353312"/>
+            <a:ext cx="5800487" cy="3840480"/>
+          </a:xfrm>
+          <a:prstGeom prst="rect">
+            <a:avLst/>
+          </a:prstGeom>
+          <a:noFill/>
+        </p:spPr>
+        <p:txBody>
+          <a:bodyPr wrap="square" anchor="t" lIns="25400" rIns="25400" tIns="25400" bIns="25400">
+            <a:spAutoFit/>
+          </a:bodyPr>
+          <a:lstStyle/>
           <a:p>
             <a:pPr>
               <a:spcAft>
-                <a:spcPts val="200"/>
+                <a:spcPts val="1000"/>
               </a:spcAft>
             </a:pPr>
             <a:r>
-              <a:rPr sz="1200" b="0" i="0">
-                <a:solidFill>
-                  <a:srgbClr val="334155"/>
-                </a:solidFill>
-                <a:latin typeface="Consolas"/>
-              </a:rPr>
-              <a:t>        |</a:t>
-            </a:r>
-          </a:p>
-          <a:p>
-            <a:pPr>
-              <a:spcAft>
-                <a:spcPts val="200"/>
-              </a:spcAft>
-            </a:pPr>
-            <a:r>
-              <a:rPr sz="1200" b="0" i="0">
-                <a:solidFill>
-                  <a:srgbClr val="334155"/>
-                </a:solidFill>
-                <a:latin typeface="Consolas"/>
-              </a:rPr>
-              <a:t>        v</a:t>
-            </a:r>
-          </a:p>
-          <a:p>
-            <a:pPr>
-              <a:spcAft>
-                <a:spcPts val="200"/>
-              </a:spcAft>
-            </a:pPr>
-            <a:r>
-              <a:rPr sz="1200" b="0" i="0">
-                <a:solidFill>
-                  <a:srgbClr val="334155"/>
-                </a:solidFill>
-                <a:latin typeface="Consolas"/>
-              </a:rPr>
-              <a:t>  Réponse textuelle</a:t>
-            </a:r>
-          </a:p>
-        </p:txBody>
-      </p:sp>
-      <p:sp>
-        <p:nvSpPr>
-          <p:cNvPr id="10" name="TextBox 9"/>
-          <p:cNvSpPr txBox="1"/>
-          <p:nvPr/>
-        </p:nvSpPr>
-        <p:spPr>
-          <a:xfrm>
-            <a:off x="6355080" y="1463040"/>
-            <a:ext cx="5212080" cy="3657600"/>
-          </a:xfrm>
-          <a:prstGeom prst="rect">
-            <a:avLst/>
-          </a:prstGeom>
-          <a:noFill/>
-        </p:spPr>
-        <p:txBody>
-          <a:bodyPr wrap="square" anchor="t" lIns="0" rIns="0" tIns="0" bIns="0">
-            <a:spAutoFit/>
-          </a:bodyPr>
-          <a:lstStyle/>
-          <a:p>
-            <a:pPr>
-              <a:spcAft>
-                <a:spcPts val="800"/>
-              </a:spcAft>
-            </a:pPr>
-            <a:r>
-              <a:rPr sz="1600" b="1" i="0">
+              <a:rPr sz="1500" b="1" i="0">
                 <a:solidFill>
                   <a:srgbClr val="4338CA"/>
                 </a:solidFill>
-                <a:latin typeface="Arial"/>
+                <a:latin typeface="Calibri"/>
               </a:rPr>
               <a:t>Pourquoi ce modèle ?</a:t>
             </a:r>
@@ -7807,16 +7717,16 @@
                 <a:solidFill>
                   <a:srgbClr val="4F46E5"/>
                 </a:solidFill>
-                <a:latin typeface="Arial"/>
-              </a:rPr>
-              <a:t>•  </a:t>
+                <a:latin typeface="Calibri"/>
+              </a:rPr>
+              <a:t>·  </a:t>
             </a:r>
             <a:r>
               <a:rPr sz="1300" b="0" i="0">
                 <a:solidFill>
                   <a:srgbClr val="334155"/>
                 </a:solidFill>
-                <a:latin typeface="Arial"/>
+                <a:latin typeface="Calibri"/>
               </a:rPr>
               <a:t>Open source (Apache 2.0) — aucune API payante</a:t>
             </a:r>
@@ -7832,16 +7742,16 @@
                 <a:solidFill>
                   <a:srgbClr val="4F46E5"/>
                 </a:solidFill>
-                <a:latin typeface="Arial"/>
-              </a:rPr>
-              <a:t>•  </a:t>
+                <a:latin typeface="Calibri"/>
+              </a:rPr>
+              <a:t>·  </a:t>
             </a:r>
             <a:r>
               <a:rPr sz="1300" b="0" i="0">
                 <a:solidFill>
                   <a:srgbClr val="334155"/>
                 </a:solidFill>
-                <a:latin typeface="Arial"/>
+                <a:latin typeface="Calibri"/>
               </a:rPr>
               <a:t>Multilingue : français, anglais, arabe…</a:t>
             </a:r>
@@ -7857,16 +7767,16 @@
                 <a:solidFill>
                   <a:srgbClr val="4F46E5"/>
                 </a:solidFill>
-                <a:latin typeface="Arial"/>
-              </a:rPr>
-              <a:t>•  </a:t>
+                <a:latin typeface="Calibri"/>
+              </a:rPr>
+              <a:t>·  </a:t>
             </a:r>
             <a:r>
               <a:rPr sz="1300" b="0" i="0">
                 <a:solidFill>
                   <a:srgbClr val="334155"/>
                 </a:solidFill>
-                <a:latin typeface="Arial"/>
+                <a:latin typeface="Calibri"/>
               </a:rPr>
               <a:t>Traitement natif de la forme d'onde audio</a:t>
             </a:r>
@@ -7882,16 +7792,16 @@
                 <a:solidFill>
                   <a:srgbClr val="4F46E5"/>
                 </a:solidFill>
-                <a:latin typeface="Arial"/>
-              </a:rPr>
-              <a:t>•  </a:t>
+                <a:latin typeface="Calibri"/>
+              </a:rPr>
+              <a:t>·  </a:t>
             </a:r>
             <a:r>
               <a:rPr sz="1300" b="0" i="0">
                 <a:solidFill>
                   <a:srgbClr val="334155"/>
                 </a:solidFill>
-                <a:latin typeface="Arial"/>
+                <a:latin typeface="Calibri"/>
               </a:rPr>
               <a:t>Questions-réponses libres sur le contenu</a:t>
             </a:r>
@@ -7907,16 +7817,16 @@
                 <a:solidFill>
                   <a:srgbClr val="4F46E5"/>
                 </a:solidFill>
-                <a:latin typeface="Arial"/>
-              </a:rPr>
-              <a:t>•  </a:t>
+                <a:latin typeface="Calibri"/>
+              </a:rPr>
+              <a:t>·  </a:t>
             </a:r>
             <a:r>
               <a:rPr sz="1300" b="0" i="0">
                 <a:solidFill>
                   <a:srgbClr val="334155"/>
                 </a:solidFill>
-                <a:latin typeface="Arial"/>
+                <a:latin typeface="Calibri"/>
               </a:rPr>
               <a:t>Analyse émotionnelle et tonale</a:t>
             </a:r>
@@ -7931,12 +7841,12 @@
         </p:nvSpPr>
         <p:spPr>
           <a:xfrm>
-            <a:off x="6355080" y="5212080"/>
-            <a:ext cx="2148840" cy="310896"/>
+            <a:off x="5888287" y="5303520"/>
+            <a:ext cx="2194560" cy="310896"/>
           </a:xfrm>
           <a:prstGeom prst="roundRect">
             <a:avLst>
-              <a:gd name="adj" fmla="val 6000"/>
+              <a:gd name="adj" fmla="val 5000"/>
             </a:avLst>
           </a:prstGeom>
           <a:solidFill>
@@ -7962,7 +7872,7 @@
           </a:fontRef>
         </p:style>
         <p:txBody>
-          <a:bodyPr rtlCol="0" anchor="ctr" wrap="none"/>
+          <a:bodyPr rtlCol="0" anchor="ctr" wrap="none" lIns="76200" rIns="76200" tIns="0" bIns="0"/>
           <a:lstStyle/>
           <a:p>
             <a:pPr algn="ctr"/>
@@ -7971,7 +7881,7 @@
                 <a:solidFill>
                   <a:srgbClr val="4338CA"/>
                 </a:solidFill>
-                <a:latin typeface="Arial"/>
+                <a:latin typeface="Calibri"/>
               </a:rPr>
               <a:t>7 Md paramètres</a:t>
             </a:r>
@@ -7986,12 +7896,12 @@
         </p:nvSpPr>
         <p:spPr>
           <a:xfrm>
-            <a:off x="8613648" y="5212080"/>
-            <a:ext cx="2267712" cy="310896"/>
+            <a:off x="8192575" y="5303520"/>
+            <a:ext cx="2313432" cy="310896"/>
           </a:xfrm>
           <a:prstGeom prst="roundRect">
             <a:avLst>
-              <a:gd name="adj" fmla="val 6000"/>
+              <a:gd name="adj" fmla="val 5000"/>
             </a:avLst>
           </a:prstGeom>
           <a:solidFill>
@@ -8017,7 +7927,7 @@
           </a:fontRef>
         </p:style>
         <p:txBody>
-          <a:bodyPr rtlCol="0" anchor="ctr" wrap="none"/>
+          <a:bodyPr rtlCol="0" anchor="ctr" wrap="none" lIns="76200" rIns="76200" tIns="0" bIns="0"/>
           <a:lstStyle/>
           <a:p>
             <a:pPr algn="ctr"/>
@@ -8026,7 +7936,7 @@
                 <a:solidFill>
                   <a:srgbClr val="4338CA"/>
                 </a:solidFill>
-                <a:latin typeface="Arial"/>
+                <a:latin typeface="Calibri"/>
               </a:rPr>
               <a:t>Encodeur Whisper</a:t>
             </a:r>
@@ -8041,12 +7951,12 @@
         </p:nvSpPr>
         <p:spPr>
           <a:xfrm>
-            <a:off x="10991088" y="5212080"/>
-            <a:ext cx="2386584" cy="310896"/>
+            <a:off x="10615735" y="5303520"/>
+            <a:ext cx="2432304" cy="310896"/>
           </a:xfrm>
           <a:prstGeom prst="roundRect">
             <a:avLst>
-              <a:gd name="adj" fmla="val 6000"/>
+              <a:gd name="adj" fmla="val 5000"/>
             </a:avLst>
           </a:prstGeom>
           <a:solidFill>
@@ -8072,7 +7982,7 @@
           </a:fontRef>
         </p:style>
         <p:txBody>
-          <a:bodyPr rtlCol="0" anchor="ctr" wrap="none"/>
+          <a:bodyPr rtlCol="0" anchor="ctr" wrap="none" lIns="76200" rIns="76200" tIns="0" bIns="0"/>
           <a:lstStyle/>
           <a:p>
             <a:pPr algn="ctr"/>
@@ -8081,7 +7991,7 @@
                 <a:solidFill>
                   <a:srgbClr val="4338CA"/>
                 </a:solidFill>
-                <a:latin typeface="Arial"/>
+                <a:latin typeface="Calibri"/>
               </a:rPr>
               <a:t>Instruction-tuned</a:t>
             </a:r>
@@ -8096,12 +8006,12 @@
         </p:nvSpPr>
         <p:spPr>
           <a:xfrm>
-            <a:off x="13487400" y="5212080"/>
-            <a:ext cx="1673352" cy="310896"/>
+            <a:off x="13157767" y="5303520"/>
+            <a:ext cx="1719072" cy="310896"/>
           </a:xfrm>
           <a:prstGeom prst="roundRect">
             <a:avLst>
-              <a:gd name="adj" fmla="val 6000"/>
+              <a:gd name="adj" fmla="val 5000"/>
             </a:avLst>
           </a:prstGeom>
           <a:solidFill>
@@ -8127,7 +8037,7 @@
           </a:fontRef>
         </p:style>
         <p:txBody>
-          <a:bodyPr rtlCol="0" anchor="ctr" wrap="none"/>
+          <a:bodyPr rtlCol="0" anchor="ctr" wrap="none" lIns="76200" rIns="76200" tIns="0" bIns="0"/>
           <a:lstStyle/>
           <a:p>
             <a:pPr algn="ctr"/>
@@ -8136,7 +8046,7 @@
                 <a:solidFill>
                   <a:srgbClr val="4338CA"/>
                 </a:solidFill>
-                <a:latin typeface="Arial"/>
+                <a:latin typeface="Calibri"/>
               </a:rPr>
               <a:t>HuggingFace</a:t>
             </a:r>
@@ -8213,8 +8123,8 @@
         </p:nvSpPr>
         <p:spPr>
           <a:xfrm>
-            <a:off x="640080" y="411480"/>
-            <a:ext cx="9601200" cy="731520"/>
+            <a:off x="502920" y="329184"/>
+            <a:ext cx="9722815" cy="713232"/>
           </a:xfrm>
           <a:prstGeom prst="rect">
             <a:avLst/>
@@ -8222,26 +8132,26 @@
           <a:noFill/>
         </p:spPr>
         <p:txBody>
-          <a:bodyPr wrap="square" anchor="t" lIns="0" rIns="0" tIns="0" bIns="0">
+          <a:bodyPr wrap="square" anchor="ctr" lIns="0" rIns="0" tIns="0" bIns="0">
             <a:spAutoFit/>
           </a:bodyPr>
           <a:lstStyle/>
           <a:p>
             <a:r>
-              <a:rPr sz="2800" b="1" i="0">
+              <a:rPr sz="2600" b="1" i="0">
                 <a:solidFill>
                   <a:srgbClr val="4338CA"/>
                 </a:solidFill>
-                <a:latin typeface="Arial"/>
+                <a:latin typeface="Calibri"/>
               </a:rPr>
               <a:t>API opérationnelle — </a:t>
             </a:r>
             <a:r>
-              <a:rPr sz="2800" b="1" i="0">
+              <a:rPr sz="2600" b="1" i="0">
                 <a:solidFill>
                   <a:srgbClr val="4F46E5"/>
                 </a:solidFill>
-                <a:latin typeface="Arial"/>
+                <a:latin typeface="Calibri"/>
               </a:rPr>
               <a:t>FastAPI</a:t>
             </a:r>
@@ -8256,8 +8166,8 @@
         </p:nvSpPr>
         <p:spPr>
           <a:xfrm>
-            <a:off x="10424160" y="502920"/>
-            <a:ext cx="1188720" cy="457200"/>
+            <a:off x="10408615" y="329184"/>
+            <a:ext cx="1280160" cy="713232"/>
           </a:xfrm>
           <a:prstGeom prst="rect">
             <a:avLst/>
@@ -8265,14 +8175,14 @@
           <a:noFill/>
         </p:spPr>
         <p:txBody>
-          <a:bodyPr wrap="square" anchor="t" lIns="0" rIns="0" tIns="0" bIns="0">
+          <a:bodyPr wrap="square" anchor="ctr" lIns="0" rIns="0" tIns="0" bIns="0">
             <a:spAutoFit/>
           </a:bodyPr>
           <a:lstStyle/>
           <a:p>
             <a:pPr algn="r"/>
             <a:r>
-              <a:rPr sz="1200" b="0" i="0">
+              <a:rPr sz="1100" b="0" i="0">
                 <a:solidFill>
                   <a:srgbClr val="94A3B8"/>
                 </a:solidFill>
@@ -8291,8 +8201,8 @@
         </p:nvSpPr>
         <p:spPr>
           <a:xfrm>
-            <a:off x="640080" y="1207008"/>
-            <a:ext cx="10908792" cy="31750"/>
+            <a:off x="502920" y="1143000"/>
+            <a:ext cx="11185855" cy="31750"/>
           </a:xfrm>
           <a:prstGeom prst="rect">
             <a:avLst/>
@@ -8335,18 +8245,18 @@
         </p:nvSpPr>
         <p:spPr>
           <a:xfrm>
-            <a:off x="640080" y="1554480"/>
-            <a:ext cx="10908792" cy="713232"/>
+            <a:off x="502920" y="1353312"/>
+            <a:ext cx="11185855" cy="731520"/>
           </a:xfrm>
           <a:prstGeom prst="roundRect">
             <a:avLst>
-              <a:gd name="adj" fmla="val 6000"/>
+              <a:gd name="adj" fmla="val 5000"/>
             </a:avLst>
           </a:prstGeom>
           <a:solidFill>
             <a:srgbClr val="F8FAFC"/>
           </a:solidFill>
-          <a:ln w="12700">
+          <a:ln w="9525">
             <a:solidFill>
               <a:srgbClr val="E2E8F0"/>
             </a:solidFill>
@@ -8377,19 +8287,17 @@
       </p:sp>
       <p:sp>
         <p:nvSpPr>
-          <p:cNvPr id="7" name="Rounded Rectangle 6"/>
+          <p:cNvPr id="7" name="Rectangle 6"/>
           <p:cNvSpPr/>
           <p:nvPr/>
         </p:nvSpPr>
         <p:spPr>
           <a:xfrm>
-            <a:off x="640080" y="1554480"/>
-            <a:ext cx="64008" cy="713232"/>
-          </a:xfrm>
-          <a:prstGeom prst="roundRect">
-            <a:avLst>
-              <a:gd name="adj" fmla="val 50000"/>
-            </a:avLst>
+            <a:off x="502920" y="1389888"/>
+            <a:ext cx="64008" cy="658368"/>
+          </a:xfrm>
+          <a:prstGeom prst="rect">
+            <a:avLst/>
           </a:prstGeom>
           <a:solidFill>
             <a:srgbClr val="4F46E5"/>
@@ -8429,12 +8337,12 @@
         </p:nvSpPr>
         <p:spPr>
           <a:xfrm>
-            <a:off x="914400" y="1737360"/>
-            <a:ext cx="868680" cy="347472"/>
+            <a:off x="649224" y="1554480"/>
+            <a:ext cx="731520" cy="329184"/>
           </a:xfrm>
           <a:prstGeom prst="roundRect">
             <a:avLst>
-              <a:gd name="adj" fmla="val 6000"/>
+              <a:gd name="adj" fmla="val 30000"/>
             </a:avLst>
           </a:prstGeom>
           <a:solidFill>
@@ -8460,7 +8368,7 @@
           </a:fontRef>
         </p:style>
         <p:txBody>
-          <a:bodyPr rtlCol="0" anchor="ctr"/>
+          <a:bodyPr rtlCol="0" anchor="ctr" lIns="50800" rIns="50800" tIns="0" bIns="0"/>
           <a:lstStyle/>
           <a:p>
             <a:pPr algn="ctr"/>
@@ -8484,8 +8392,8 @@
         </p:nvSpPr>
         <p:spPr>
           <a:xfrm>
-            <a:off x="1965960" y="1554480"/>
-            <a:ext cx="3931920" cy="713232"/>
+            <a:off x="1508760" y="1353312"/>
+            <a:ext cx="4114800" cy="731520"/>
           </a:xfrm>
           <a:prstGeom prst="rect">
             <a:avLst/>
@@ -8499,7 +8407,7 @@
           <a:lstStyle/>
           <a:p>
             <a:r>
-              <a:rPr sz="1300" b="1" i="0">
+              <a:rPr sz="1200" b="1" i="0">
                 <a:solidFill>
                   <a:srgbClr val="4338CA"/>
                 </a:solidFill>
@@ -8518,8 +8426,8 @@
         </p:nvSpPr>
         <p:spPr>
           <a:xfrm>
-            <a:off x="6035040" y="1554480"/>
-            <a:ext cx="5303520" cy="713232"/>
+            <a:off x="5788152" y="1353312"/>
+            <a:ext cx="5900623" cy="731520"/>
           </a:xfrm>
           <a:prstGeom prst="rect">
             <a:avLst/>
@@ -8527,7 +8435,7 @@
           <a:noFill/>
         </p:spPr>
         <p:txBody>
-          <a:bodyPr wrap="square" anchor="ctr" lIns="0" rIns="0" tIns="0" bIns="0">
+          <a:bodyPr wrap="square" anchor="ctr" lIns="0" rIns="76200" tIns="0" bIns="0">
             <a:spAutoFit/>
           </a:bodyPr>
           <a:lstStyle/>
@@ -8537,7 +8445,7 @@
                 <a:solidFill>
                   <a:srgbClr val="334155"/>
                 </a:solidFill>
-                <a:latin typeface="Arial"/>
+                <a:latin typeface="Calibri"/>
               </a:rPr>
               <a:t>Audio → transcription complète</a:t>
             </a:r>
@@ -8552,18 +8460,18 @@
         </p:nvSpPr>
         <p:spPr>
           <a:xfrm>
-            <a:off x="640080" y="2395728"/>
-            <a:ext cx="10908792" cy="713232"/>
+            <a:off x="502920" y="2167128"/>
+            <a:ext cx="11185855" cy="731520"/>
           </a:xfrm>
           <a:prstGeom prst="roundRect">
             <a:avLst>
-              <a:gd name="adj" fmla="val 6000"/>
+              <a:gd name="adj" fmla="val 5000"/>
             </a:avLst>
           </a:prstGeom>
           <a:solidFill>
             <a:srgbClr val="F8FAFC"/>
           </a:solidFill>
-          <a:ln w="12700">
+          <a:ln w="9525">
             <a:solidFill>
               <a:srgbClr val="E2E8F0"/>
             </a:solidFill>
@@ -8594,19 +8502,17 @@
       </p:sp>
       <p:sp>
         <p:nvSpPr>
-          <p:cNvPr id="12" name="Rounded Rectangle 11"/>
+          <p:cNvPr id="12" name="Rectangle 11"/>
           <p:cNvSpPr/>
           <p:nvPr/>
         </p:nvSpPr>
         <p:spPr>
           <a:xfrm>
-            <a:off x="640080" y="2395728"/>
-            <a:ext cx="64008" cy="713232"/>
-          </a:xfrm>
-          <a:prstGeom prst="roundRect">
-            <a:avLst>
-              <a:gd name="adj" fmla="val 50000"/>
-            </a:avLst>
+            <a:off x="502920" y="2203704"/>
+            <a:ext cx="64008" cy="658368"/>
+          </a:xfrm>
+          <a:prstGeom prst="rect">
+            <a:avLst/>
           </a:prstGeom>
           <a:solidFill>
             <a:srgbClr val="4F46E5"/>
@@ -8646,12 +8552,12 @@
         </p:nvSpPr>
         <p:spPr>
           <a:xfrm>
-            <a:off x="914400" y="2578608"/>
-            <a:ext cx="868680" cy="347472"/>
+            <a:off x="649224" y="2368296"/>
+            <a:ext cx="731520" cy="329184"/>
           </a:xfrm>
           <a:prstGeom prst="roundRect">
             <a:avLst>
-              <a:gd name="adj" fmla="val 6000"/>
+              <a:gd name="adj" fmla="val 30000"/>
             </a:avLst>
           </a:prstGeom>
           <a:solidFill>
@@ -8677,7 +8583,7 @@
           </a:fontRef>
         </p:style>
         <p:txBody>
-          <a:bodyPr rtlCol="0" anchor="ctr"/>
+          <a:bodyPr rtlCol="0" anchor="ctr" lIns="50800" rIns="50800" tIns="0" bIns="0"/>
           <a:lstStyle/>
           <a:p>
             <a:pPr algn="ctr"/>
@@ -8701,8 +8607,8 @@
         </p:nvSpPr>
         <p:spPr>
           <a:xfrm>
-            <a:off x="1965960" y="2395728"/>
-            <a:ext cx="3931920" cy="713232"/>
+            <a:off x="1508760" y="2167128"/>
+            <a:ext cx="4114800" cy="731520"/>
           </a:xfrm>
           <a:prstGeom prst="rect">
             <a:avLst/>
@@ -8716,7 +8622,7 @@
           <a:lstStyle/>
           <a:p>
             <a:r>
-              <a:rPr sz="1300" b="1" i="0">
+              <a:rPr sz="1200" b="1" i="0">
                 <a:solidFill>
                   <a:srgbClr val="4338CA"/>
                 </a:solidFill>
@@ -8735,8 +8641,8 @@
         </p:nvSpPr>
         <p:spPr>
           <a:xfrm>
-            <a:off x="6035040" y="2395728"/>
-            <a:ext cx="5303520" cy="713232"/>
+            <a:off x="5788152" y="2167128"/>
+            <a:ext cx="5900623" cy="731520"/>
           </a:xfrm>
           <a:prstGeom prst="rect">
             <a:avLst/>
@@ -8744,7 +8650,7 @@
           <a:noFill/>
         </p:spPr>
         <p:txBody>
-          <a:bodyPr wrap="square" anchor="ctr" lIns="0" rIns="0" tIns="0" bIns="0">
+          <a:bodyPr wrap="square" anchor="ctr" lIns="0" rIns="76200" tIns="0" bIns="0">
             <a:spAutoFit/>
           </a:bodyPr>
           <a:lstStyle/>
@@ -8754,7 +8660,7 @@
                 <a:solidFill>
                   <a:srgbClr val="334155"/>
                 </a:solidFill>
-                <a:latin typeface="Arial"/>
+                <a:latin typeface="Calibri"/>
               </a:rPr>
               <a:t>Audio + question → réponse en langage naturel</a:t>
             </a:r>
@@ -8769,18 +8675,18 @@
         </p:nvSpPr>
         <p:spPr>
           <a:xfrm>
-            <a:off x="640080" y="3236976"/>
-            <a:ext cx="10908792" cy="713232"/>
+            <a:off x="502920" y="2980944"/>
+            <a:ext cx="11185855" cy="731520"/>
           </a:xfrm>
           <a:prstGeom prst="roundRect">
             <a:avLst>
-              <a:gd name="adj" fmla="val 6000"/>
+              <a:gd name="adj" fmla="val 5000"/>
             </a:avLst>
           </a:prstGeom>
           <a:solidFill>
             <a:srgbClr val="F8FAFC"/>
           </a:solidFill>
-          <a:ln w="12700">
+          <a:ln w="9525">
             <a:solidFill>
               <a:srgbClr val="E2E8F0"/>
             </a:solidFill>
@@ -8811,19 +8717,17 @@
       </p:sp>
       <p:sp>
         <p:nvSpPr>
-          <p:cNvPr id="17" name="Rounded Rectangle 16"/>
+          <p:cNvPr id="17" name="Rectangle 16"/>
           <p:cNvSpPr/>
           <p:nvPr/>
         </p:nvSpPr>
         <p:spPr>
           <a:xfrm>
-            <a:off x="640080" y="3236976"/>
-            <a:ext cx="64008" cy="713232"/>
-          </a:xfrm>
-          <a:prstGeom prst="roundRect">
-            <a:avLst>
-              <a:gd name="adj" fmla="val 50000"/>
-            </a:avLst>
+            <a:off x="502920" y="3017520"/>
+            <a:ext cx="64008" cy="658368"/>
+          </a:xfrm>
+          <a:prstGeom prst="rect">
+            <a:avLst/>
           </a:prstGeom>
           <a:solidFill>
             <a:srgbClr val="4F46E5"/>
@@ -8863,12 +8767,12 @@
         </p:nvSpPr>
         <p:spPr>
           <a:xfrm>
-            <a:off x="914400" y="3419856"/>
-            <a:ext cx="868680" cy="347472"/>
+            <a:off x="649224" y="3182112"/>
+            <a:ext cx="731520" cy="329184"/>
           </a:xfrm>
           <a:prstGeom prst="roundRect">
             <a:avLst>
-              <a:gd name="adj" fmla="val 6000"/>
+              <a:gd name="adj" fmla="val 30000"/>
             </a:avLst>
           </a:prstGeom>
           <a:solidFill>
@@ -8894,7 +8798,7 @@
           </a:fontRef>
         </p:style>
         <p:txBody>
-          <a:bodyPr rtlCol="0" anchor="ctr"/>
+          <a:bodyPr rtlCol="0" anchor="ctr" lIns="50800" rIns="50800" tIns="0" bIns="0"/>
           <a:lstStyle/>
           <a:p>
             <a:pPr algn="ctr"/>
@@ -8918,8 +8822,8 @@
         </p:nvSpPr>
         <p:spPr>
           <a:xfrm>
-            <a:off x="1965960" y="3236976"/>
-            <a:ext cx="3931920" cy="713232"/>
+            <a:off x="1508760" y="2980944"/>
+            <a:ext cx="4114800" cy="731520"/>
           </a:xfrm>
           <a:prstGeom prst="rect">
             <a:avLst/>
@@ -8933,7 +8837,7 @@
           <a:lstStyle/>
           <a:p>
             <a:r>
-              <a:rPr sz="1300" b="1" i="0">
+              <a:rPr sz="1200" b="1" i="0">
                 <a:solidFill>
                   <a:srgbClr val="4338CA"/>
                 </a:solidFill>
@@ -8952,8 +8856,8 @@
         </p:nvSpPr>
         <p:spPr>
           <a:xfrm>
-            <a:off x="6035040" y="3236976"/>
-            <a:ext cx="5303520" cy="713232"/>
+            <a:off x="5788152" y="2980944"/>
+            <a:ext cx="5900623" cy="731520"/>
           </a:xfrm>
           <a:prstGeom prst="rect">
             <a:avLst/>
@@ -8961,7 +8865,7 @@
           <a:noFill/>
         </p:spPr>
         <p:txBody>
-          <a:bodyPr wrap="square" anchor="ctr" lIns="0" rIns="0" tIns="0" bIns="0">
+          <a:bodyPr wrap="square" anchor="ctr" lIns="0" rIns="76200" tIns="0" bIns="0">
             <a:spAutoFit/>
           </a:bodyPr>
           <a:lstStyle/>
@@ -8971,7 +8875,7 @@
                 <a:solidFill>
                   <a:srgbClr val="334155"/>
                 </a:solidFill>
-                <a:latin typeface="Arial"/>
+                <a:latin typeface="Calibri"/>
               </a:rPr>
               <a:t>Audio → transcription + résumé + sentiment</a:t>
             </a:r>
@@ -8986,18 +8890,18 @@
         </p:nvSpPr>
         <p:spPr>
           <a:xfrm>
-            <a:off x="640080" y="4078224"/>
-            <a:ext cx="10908792" cy="713232"/>
+            <a:off x="502920" y="3794760"/>
+            <a:ext cx="11185855" cy="731520"/>
           </a:xfrm>
           <a:prstGeom prst="roundRect">
             <a:avLst>
-              <a:gd name="adj" fmla="val 6000"/>
+              <a:gd name="adj" fmla="val 5000"/>
             </a:avLst>
           </a:prstGeom>
           <a:solidFill>
             <a:srgbClr val="F8FAFC"/>
           </a:solidFill>
-          <a:ln w="12700">
+          <a:ln w="9525">
             <a:solidFill>
               <a:srgbClr val="E2E8F0"/>
             </a:solidFill>
@@ -9028,19 +8932,17 @@
       </p:sp>
       <p:sp>
         <p:nvSpPr>
-          <p:cNvPr id="22" name="Rounded Rectangle 21"/>
+          <p:cNvPr id="22" name="Rectangle 21"/>
           <p:cNvSpPr/>
           <p:nvPr/>
         </p:nvSpPr>
         <p:spPr>
           <a:xfrm>
-            <a:off x="640080" y="4078224"/>
-            <a:ext cx="64008" cy="713232"/>
-          </a:xfrm>
-          <a:prstGeom prst="roundRect">
-            <a:avLst>
-              <a:gd name="adj" fmla="val 50000"/>
-            </a:avLst>
+            <a:off x="502920" y="3831336"/>
+            <a:ext cx="64008" cy="658368"/>
+          </a:xfrm>
+          <a:prstGeom prst="rect">
+            <a:avLst/>
           </a:prstGeom>
           <a:solidFill>
             <a:srgbClr val="059669"/>
@@ -9080,12 +8982,12 @@
         </p:nvSpPr>
         <p:spPr>
           <a:xfrm>
-            <a:off x="914400" y="4261104"/>
-            <a:ext cx="868680" cy="347472"/>
+            <a:off x="649224" y="3995928"/>
+            <a:ext cx="731520" cy="329184"/>
           </a:xfrm>
           <a:prstGeom prst="roundRect">
             <a:avLst>
-              <a:gd name="adj" fmla="val 6000"/>
+              <a:gd name="adj" fmla="val 30000"/>
             </a:avLst>
           </a:prstGeom>
           <a:solidFill>
@@ -9111,7 +9013,7 @@
           </a:fontRef>
         </p:style>
         <p:txBody>
-          <a:bodyPr rtlCol="0" anchor="ctr"/>
+          <a:bodyPr rtlCol="0" anchor="ctr" lIns="50800" rIns="50800" tIns="0" bIns="0"/>
           <a:lstStyle/>
           <a:p>
             <a:pPr algn="ctr"/>
@@ -9135,8 +9037,8 @@
         </p:nvSpPr>
         <p:spPr>
           <a:xfrm>
-            <a:off x="1965960" y="4078224"/>
-            <a:ext cx="3931920" cy="713232"/>
+            <a:off x="1508760" y="3794760"/>
+            <a:ext cx="4114800" cy="731520"/>
           </a:xfrm>
           <a:prstGeom prst="rect">
             <a:avLst/>
@@ -9150,7 +9052,7 @@
           <a:lstStyle/>
           <a:p>
             <a:r>
-              <a:rPr sz="1300" b="1" i="0">
+              <a:rPr sz="1200" b="1" i="0">
                 <a:solidFill>
                   <a:srgbClr val="4338CA"/>
                 </a:solidFill>
@@ -9169,8 +9071,8 @@
         </p:nvSpPr>
         <p:spPr>
           <a:xfrm>
-            <a:off x="6035040" y="4078224"/>
-            <a:ext cx="5303520" cy="713232"/>
+            <a:off x="5788152" y="3794760"/>
+            <a:ext cx="5900623" cy="731520"/>
           </a:xfrm>
           <a:prstGeom prst="rect">
             <a:avLst/>
@@ -9178,7 +9080,7 @@
           <a:noFill/>
         </p:spPr>
         <p:txBody>
-          <a:bodyPr wrap="square" anchor="ctr" lIns="0" rIns="0" tIns="0" bIns="0">
+          <a:bodyPr wrap="square" anchor="ctr" lIns="0" rIns="76200" tIns="0" bIns="0">
             <a:spAutoFit/>
           </a:bodyPr>
           <a:lstStyle/>
@@ -9188,7 +9090,7 @@
                 <a:solidFill>
                   <a:srgbClr val="334155"/>
                 </a:solidFill>
-                <a:latin typeface="Arial"/>
+                <a:latin typeface="Calibri"/>
               </a:rPr>
               <a:t>État du serveur et du modèle chargé</a:t>
             </a:r>
@@ -9203,8 +9105,8 @@
         </p:nvSpPr>
         <p:spPr>
           <a:xfrm>
-            <a:off x="640080" y="5010912"/>
-            <a:ext cx="4572000" cy="320040"/>
+            <a:off x="502920" y="4736592"/>
+            <a:ext cx="5528919" cy="292608"/>
           </a:xfrm>
           <a:prstGeom prst="rect">
             <a:avLst/>
@@ -9222,7 +9124,7 @@
                 <a:solidFill>
                   <a:srgbClr val="4338CA"/>
                 </a:solidFill>
-                <a:latin typeface="Arial"/>
+                <a:latin typeface="Calibri"/>
               </a:rPr>
               <a:t>Exemple — /understand</a:t>
             </a:r>
@@ -9237,18 +9139,18 @@
         </p:nvSpPr>
         <p:spPr>
           <a:xfrm>
-            <a:off x="640080" y="5376672"/>
-            <a:ext cx="5394960" cy="1097280"/>
+            <a:off x="502920" y="5047488"/>
+            <a:ext cx="5528919" cy="1645920"/>
           </a:xfrm>
           <a:prstGeom prst="roundRect">
             <a:avLst>
-              <a:gd name="adj" fmla="val 6000"/>
+              <a:gd name="adj" fmla="val 5000"/>
             </a:avLst>
           </a:prstGeom>
           <a:solidFill>
             <a:srgbClr val="F8FAFC"/>
           </a:solidFill>
-          <a:ln w="12700">
+          <a:ln w="9525">
             <a:solidFill>
               <a:srgbClr val="E2E8F0"/>
             </a:solidFill>
@@ -9279,19 +9181,17 @@
       </p:sp>
       <p:sp>
         <p:nvSpPr>
-          <p:cNvPr id="28" name="Rounded Rectangle 27"/>
+          <p:cNvPr id="28" name="Rectangle 27"/>
           <p:cNvSpPr/>
           <p:nvPr/>
         </p:nvSpPr>
         <p:spPr>
           <a:xfrm>
-            <a:off x="640080" y="5376672"/>
-            <a:ext cx="64008" cy="1097280"/>
-          </a:xfrm>
-          <a:prstGeom prst="roundRect">
-            <a:avLst>
-              <a:gd name="adj" fmla="val 50000"/>
-            </a:avLst>
+            <a:off x="502920" y="5084064"/>
+            <a:ext cx="64008" cy="1572768"/>
+          </a:xfrm>
+          <a:prstGeom prst="rect">
+            <a:avLst/>
           </a:prstGeom>
           <a:solidFill>
             <a:srgbClr val="4F46E5"/>
@@ -9331,8 +9231,79 @@
         </p:nvSpPr>
         <p:spPr>
           <a:xfrm>
-            <a:off x="914400" y="5577840"/>
-            <a:ext cx="4937760" cy="731519"/>
+            <a:off x="694944" y="5047488"/>
+            <a:ext cx="5263743" cy="1645920"/>
+          </a:xfrm>
+          <a:prstGeom prst="rect">
+            <a:avLst/>
+          </a:prstGeom>
+          <a:noFill/>
+        </p:spPr>
+        <p:txBody>
+          <a:bodyPr wrap="square" anchor="ctr" lIns="50800" rIns="50800" tIns="101600" bIns="101600">
+            <a:spAutoFit/>
+          </a:bodyPr>
+          <a:lstStyle/>
+          <a:p>
+            <a:pPr>
+              <a:spcAft>
+                <a:spcPts val="100"/>
+              </a:spcAft>
+            </a:pPr>
+            <a:r>
+              <a:rPr sz="1000" b="0" i="0">
+                <a:solidFill>
+                  <a:srgbClr val="334155"/>
+                </a:solidFill>
+                <a:latin typeface="Consolas"/>
+              </a:rPr>
+              <a:t>curl -X POST .../audio/understand \</a:t>
+            </a:r>
+          </a:p>
+          <a:p>
+            <a:pPr>
+              <a:spcAft>
+                <a:spcPts val="100"/>
+              </a:spcAft>
+            </a:pPr>
+            <a:r>
+              <a:rPr sz="1000" b="0" i="0">
+                <a:solidFill>
+                  <a:srgbClr val="334155"/>
+                </a:solidFill>
+                <a:latin typeface="Consolas"/>
+              </a:rPr>
+              <a:t>  -F "audio=@reunion.wav" \</a:t>
+            </a:r>
+          </a:p>
+          <a:p>
+            <a:pPr>
+              <a:spcAft>
+                <a:spcPts val="100"/>
+              </a:spcAft>
+            </a:pPr>
+            <a:r>
+              <a:rPr sz="1000" b="0" i="0">
+                <a:solidFill>
+                  <a:srgbClr val="334155"/>
+                </a:solidFill>
+                <a:latin typeface="Consolas"/>
+              </a:rPr>
+              <a:t>  -F "question=Quelle langue ?"</a:t>
+            </a:r>
+          </a:p>
+        </p:txBody>
+      </p:sp>
+      <p:sp>
+        <p:nvSpPr>
+          <p:cNvPr id="30" name="TextBox 29"/>
+          <p:cNvSpPr txBox="1"/>
+          <p:nvPr/>
+        </p:nvSpPr>
+        <p:spPr>
+          <a:xfrm>
+            <a:off x="6159855" y="4736592"/>
+            <a:ext cx="5528919" cy="292608"/>
           </a:xfrm>
           <a:prstGeom prst="rect">
             <a:avLst/>
@@ -9345,83 +9316,12 @@
           </a:bodyPr>
           <a:lstStyle/>
           <a:p>
-            <a:pPr>
-              <a:spcAft>
-                <a:spcPts val="200"/>
-              </a:spcAft>
-            </a:pPr>
-            <a:r>
-              <a:rPr sz="1000" b="0" i="0">
-                <a:solidFill>
-                  <a:srgbClr val="334155"/>
-                </a:solidFill>
-                <a:latin typeface="Consolas"/>
-              </a:rPr>
-              <a:t>curl -X POST .../audio/understand \</a:t>
-            </a:r>
-          </a:p>
-          <a:p>
-            <a:pPr>
-              <a:spcAft>
-                <a:spcPts val="200"/>
-              </a:spcAft>
-            </a:pPr>
-            <a:r>
-              <a:rPr sz="1000" b="0" i="0">
-                <a:solidFill>
-                  <a:srgbClr val="334155"/>
-                </a:solidFill>
-                <a:latin typeface="Consolas"/>
-              </a:rPr>
-              <a:t>  -F "audio=@reunion.wav" \</a:t>
-            </a:r>
-          </a:p>
-          <a:p>
-            <a:pPr>
-              <a:spcAft>
-                <a:spcPts val="200"/>
-              </a:spcAft>
-            </a:pPr>
-            <a:r>
-              <a:rPr sz="1000" b="0" i="0">
-                <a:solidFill>
-                  <a:srgbClr val="334155"/>
-                </a:solidFill>
-                <a:latin typeface="Consolas"/>
-              </a:rPr>
-              <a:t>  -F "question=Quelle langue ?"</a:t>
-            </a:r>
-          </a:p>
-        </p:txBody>
-      </p:sp>
-      <p:sp>
-        <p:nvSpPr>
-          <p:cNvPr id="30" name="TextBox 29"/>
-          <p:cNvSpPr txBox="1"/>
-          <p:nvPr/>
-        </p:nvSpPr>
-        <p:spPr>
-          <a:xfrm>
-            <a:off x="6355080" y="5010912"/>
-            <a:ext cx="4572000" cy="320040"/>
-          </a:xfrm>
-          <a:prstGeom prst="rect">
-            <a:avLst/>
-          </a:prstGeom>
-          <a:noFill/>
-        </p:spPr>
-        <p:txBody>
-          <a:bodyPr wrap="square" anchor="t" lIns="0" rIns="0" tIns="0" bIns="0">
-            <a:spAutoFit/>
-          </a:bodyPr>
-          <a:lstStyle/>
-          <a:p>
             <a:r>
               <a:rPr sz="1300" b="1" i="0">
                 <a:solidFill>
                   <a:srgbClr val="4338CA"/>
                 </a:solidFill>
-                <a:latin typeface="Arial"/>
+                <a:latin typeface="Calibri"/>
               </a:rPr>
               <a:t>Réponse JSON</a:t>
             </a:r>
@@ -9436,18 +9336,18 @@
         </p:nvSpPr>
         <p:spPr>
           <a:xfrm>
-            <a:off x="6355080" y="5376672"/>
-            <a:ext cx="5212080" cy="1097280"/>
+            <a:off x="6159855" y="5047488"/>
+            <a:ext cx="5528919" cy="1645920"/>
           </a:xfrm>
           <a:prstGeom prst="roundRect">
             <a:avLst>
-              <a:gd name="adj" fmla="val 6000"/>
+              <a:gd name="adj" fmla="val 5000"/>
             </a:avLst>
           </a:prstGeom>
           <a:solidFill>
             <a:srgbClr val="F8FAFC"/>
           </a:solidFill>
-          <a:ln w="12700">
+          <a:ln w="9525">
             <a:solidFill>
               <a:srgbClr val="E2E8F0"/>
             </a:solidFill>
@@ -9478,19 +9378,17 @@
       </p:sp>
       <p:sp>
         <p:nvSpPr>
-          <p:cNvPr id="32" name="Rounded Rectangle 31"/>
+          <p:cNvPr id="32" name="Rectangle 31"/>
           <p:cNvSpPr/>
           <p:nvPr/>
         </p:nvSpPr>
         <p:spPr>
           <a:xfrm>
-            <a:off x="6355080" y="5376672"/>
-            <a:ext cx="64008" cy="1097280"/>
-          </a:xfrm>
-          <a:prstGeom prst="roundRect">
-            <a:avLst>
-              <a:gd name="adj" fmla="val 50000"/>
-            </a:avLst>
+            <a:off x="6159855" y="5084064"/>
+            <a:ext cx="64008" cy="1572768"/>
+          </a:xfrm>
+          <a:prstGeom prst="rect">
+            <a:avLst/>
           </a:prstGeom>
           <a:solidFill>
             <a:srgbClr val="4F46E5"/>
@@ -9530,8 +9428,8 @@
         </p:nvSpPr>
         <p:spPr>
           <a:xfrm>
-            <a:off x="6629400" y="5577840"/>
-            <a:ext cx="4754880" cy="731519"/>
+            <a:off x="6351879" y="5047488"/>
+            <a:ext cx="5263743" cy="1645920"/>
           </a:xfrm>
           <a:prstGeom prst="rect">
             <a:avLst/>
@@ -9539,14 +9437,14 @@
           <a:noFill/>
         </p:spPr>
         <p:txBody>
-          <a:bodyPr wrap="square" anchor="t" lIns="0" rIns="0" tIns="0" bIns="0">
+          <a:bodyPr wrap="square" anchor="ctr" lIns="50800" rIns="50800" tIns="101600" bIns="101600">
             <a:spAutoFit/>
           </a:bodyPr>
           <a:lstStyle/>
           <a:p>
             <a:pPr>
               <a:spcAft>
-                <a:spcPts val="200"/>
+                <a:spcPts val="100"/>
               </a:spcAft>
             </a:pPr>
             <a:r>
@@ -9562,7 +9460,7 @@
           <a:p>
             <a:pPr>
               <a:spcAft>
-                <a:spcPts val="200"/>
+                <a:spcPts val="100"/>
               </a:spcAft>
             </a:pPr>
             <a:r>
@@ -9578,7 +9476,7 @@
           <a:p>
             <a:pPr>
               <a:spcAft>
-                <a:spcPts val="200"/>
+                <a:spcPts val="100"/>
               </a:spcAft>
             </a:pPr>
             <a:r>
@@ -9594,7 +9492,7 @@
           <a:p>
             <a:pPr>
               <a:spcAft>
-                <a:spcPts val="200"/>
+                <a:spcPts val="100"/>
               </a:spcAft>
             </a:pPr>
             <a:r>
@@ -9679,8 +9577,8 @@
         </p:nvSpPr>
         <p:spPr>
           <a:xfrm>
-            <a:off x="640080" y="411480"/>
-            <a:ext cx="9601200" cy="731520"/>
+            <a:off x="502920" y="329184"/>
+            <a:ext cx="9722815" cy="713232"/>
           </a:xfrm>
           <a:prstGeom prst="rect">
             <a:avLst/>
@@ -9688,26 +9586,26 @@
           <a:noFill/>
         </p:spPr>
         <p:txBody>
-          <a:bodyPr wrap="square" anchor="t" lIns="0" rIns="0" tIns="0" bIns="0">
+          <a:bodyPr wrap="square" anchor="ctr" lIns="0" rIns="0" tIns="0" bIns="0">
             <a:spAutoFit/>
           </a:bodyPr>
           <a:lstStyle/>
           <a:p>
             <a:r>
-              <a:rPr sz="2800" b="1" i="0">
+              <a:rPr sz="2600" b="1" i="0">
                 <a:solidFill>
                   <a:srgbClr val="4338CA"/>
                 </a:solidFill>
-                <a:latin typeface="Arial"/>
+                <a:latin typeface="Calibri"/>
               </a:rPr>
               <a:t>Interface web — </a:t>
             </a:r>
             <a:r>
-              <a:rPr sz="2800" b="1" i="0">
+              <a:rPr sz="2600" b="1" i="0">
                 <a:solidFill>
                   <a:srgbClr val="4F46E5"/>
                 </a:solidFill>
-                <a:latin typeface="Arial"/>
+                <a:latin typeface="Calibri"/>
               </a:rPr>
               <a:t>3 fonctionnalités</a:t>
             </a:r>
@@ -9722,8 +9620,8 @@
         </p:nvSpPr>
         <p:spPr>
           <a:xfrm>
-            <a:off x="10424160" y="502920"/>
-            <a:ext cx="1188720" cy="457200"/>
+            <a:off x="10408615" y="329184"/>
+            <a:ext cx="1280160" cy="713232"/>
           </a:xfrm>
           <a:prstGeom prst="rect">
             <a:avLst/>
@@ -9731,14 +9629,14 @@
           <a:noFill/>
         </p:spPr>
         <p:txBody>
-          <a:bodyPr wrap="square" anchor="t" lIns="0" rIns="0" tIns="0" bIns="0">
+          <a:bodyPr wrap="square" anchor="ctr" lIns="0" rIns="0" tIns="0" bIns="0">
             <a:spAutoFit/>
           </a:bodyPr>
           <a:lstStyle/>
           <a:p>
             <a:pPr algn="r"/>
             <a:r>
-              <a:rPr sz="1200" b="0" i="0">
+              <a:rPr sz="1100" b="0" i="0">
                 <a:solidFill>
                   <a:srgbClr val="94A3B8"/>
                 </a:solidFill>
@@ -9757,8 +9655,8 @@
         </p:nvSpPr>
         <p:spPr>
           <a:xfrm>
-            <a:off x="640080" y="1207008"/>
-            <a:ext cx="10908792" cy="31750"/>
+            <a:off x="502920" y="1143000"/>
+            <a:ext cx="11185855" cy="31750"/>
           </a:xfrm>
           <a:prstGeom prst="rect">
             <a:avLst/>
@@ -9801,18 +9699,18 @@
         </p:nvSpPr>
         <p:spPr>
           <a:xfrm>
-            <a:off x="640080" y="1645920"/>
-            <a:ext cx="3493008" cy="2743200"/>
+            <a:off x="502920" y="1353312"/>
+            <a:ext cx="3643274" cy="2907792"/>
           </a:xfrm>
           <a:prstGeom prst="roundRect">
             <a:avLst>
-              <a:gd name="adj" fmla="val 6000"/>
+              <a:gd name="adj" fmla="val 5000"/>
             </a:avLst>
           </a:prstGeom>
           <a:solidFill>
             <a:srgbClr val="F8FAFC"/>
           </a:solidFill>
-          <a:ln w="12700">
+          <a:ln w="9525">
             <a:solidFill>
               <a:srgbClr val="E2E8F0"/>
             </a:solidFill>
@@ -9843,19 +9741,17 @@
       </p:sp>
       <p:sp>
         <p:nvSpPr>
-          <p:cNvPr id="7" name="Rounded Rectangle 6"/>
+          <p:cNvPr id="7" name="Rectangle 6"/>
           <p:cNvSpPr/>
           <p:nvPr/>
         </p:nvSpPr>
         <p:spPr>
           <a:xfrm>
-            <a:off x="640080" y="1645920"/>
-            <a:ext cx="64008" cy="2743200"/>
-          </a:xfrm>
-          <a:prstGeom prst="roundRect">
-            <a:avLst>
-              <a:gd name="adj" fmla="val 50000"/>
-            </a:avLst>
+            <a:off x="502920" y="1389888"/>
+            <a:ext cx="64008" cy="2834640"/>
+          </a:xfrm>
+          <a:prstGeom prst="rect">
+            <a:avLst/>
           </a:prstGeom>
           <a:solidFill>
             <a:srgbClr val="4F46E5"/>
@@ -9895,8 +9791,8 @@
         </p:nvSpPr>
         <p:spPr>
           <a:xfrm>
-            <a:off x="896112" y="1828800"/>
-            <a:ext cx="3081527" cy="2423160"/>
+            <a:off x="694944" y="1353312"/>
+            <a:ext cx="3378098" cy="2907792"/>
           </a:xfrm>
           <a:prstGeom prst="rect">
             <a:avLst/>
@@ -9904,22 +9800,22 @@
           <a:noFill/>
         </p:spPr>
         <p:txBody>
-          <a:bodyPr wrap="square" anchor="t" lIns="0" rIns="0" tIns="0" bIns="0">
+          <a:bodyPr wrap="square" anchor="ctr" lIns="50800" rIns="50800" tIns="76200" bIns="76200">
             <a:spAutoFit/>
           </a:bodyPr>
           <a:lstStyle/>
           <a:p>
             <a:pPr>
               <a:spcAft>
-                <a:spcPts val="600"/>
+                <a:spcPts val="500"/>
               </a:spcAft>
             </a:pPr>
             <a:r>
-              <a:rPr sz="1500" b="1" i="0">
+              <a:rPr sz="1400" b="1" i="0">
                 <a:solidFill>
                   <a:srgbClr val="0F172A"/>
                 </a:solidFill>
-                <a:latin typeface="Arial"/>
+                <a:latin typeface="Calibri"/>
               </a:rPr>
               <a:t>Transcrire</a:t>
             </a:r>
@@ -9927,65 +9823,65 @@
           <a:p>
             <a:pPr>
               <a:spcAft>
-                <a:spcPts val="300"/>
+                <a:spcPts val="200"/>
               </a:spcAft>
             </a:pPr>
             <a:r>
-              <a:rPr sz="1200" b="0" i="0">
+              <a:rPr sz="1100" b="0" i="0">
                 <a:solidFill>
                   <a:srgbClr val="334155"/>
                 </a:solidFill>
-                <a:latin typeface="Arial"/>
-              </a:rPr>
-              <a:t>Import de fichier audio</a:t>
+                <a:latin typeface="Calibri"/>
+              </a:rPr>
+              <a:t>· Import de fichier audio</a:t>
             </a:r>
           </a:p>
           <a:p>
             <a:pPr>
               <a:spcAft>
-                <a:spcPts val="300"/>
+                <a:spcPts val="200"/>
               </a:spcAft>
             </a:pPr>
             <a:r>
-              <a:rPr sz="1200" b="0" i="0">
+              <a:rPr sz="1100" b="0" i="0">
                 <a:solidFill>
                   <a:srgbClr val="334155"/>
                 </a:solidFill>
-                <a:latin typeface="Arial"/>
-              </a:rPr>
-              <a:t>Enregistrement micro</a:t>
+                <a:latin typeface="Calibri"/>
+              </a:rPr>
+              <a:t>· Enregistrement microphone</a:t>
             </a:r>
           </a:p>
           <a:p>
             <a:pPr>
               <a:spcAft>
-                <a:spcPts val="300"/>
+                <a:spcPts val="200"/>
               </a:spcAft>
             </a:pPr>
             <a:r>
-              <a:rPr sz="1200" b="0" i="0">
+              <a:rPr sz="1100" b="0" i="0">
                 <a:solidFill>
                   <a:srgbClr val="334155"/>
                 </a:solidFill>
-                <a:latin typeface="Arial"/>
-              </a:rPr>
-              <a:t>Transcription complète</a:t>
+                <a:latin typeface="Calibri"/>
+              </a:rPr>
+              <a:t>· Transcription complète</a:t>
             </a:r>
           </a:p>
           <a:p>
             <a:pPr>
               <a:spcAft>
-                <a:spcPts val="300"/>
+                <a:spcPts val="200"/>
               </a:spcAft>
             </a:pPr>
             <a:r>
-              <a:rPr sz="1200" b="0" i="0">
+              <a:rPr sz="1100" b="0" i="0">
                 <a:solidFill>
                   <a:srgbClr val="334155"/>
                 </a:solidFill>
-                <a:latin typeface="Arial"/>
-              </a:rPr>
-              <a:t>Copie en un clic</a:t>
+                <a:latin typeface="Calibri"/>
+              </a:rPr>
+              <a:t>· Copie en un clic</a:t>
             </a:r>
           </a:p>
         </p:txBody>
@@ -9998,18 +9894,18 @@
         </p:nvSpPr>
         <p:spPr>
           <a:xfrm>
-            <a:off x="4343400" y="1645920"/>
-            <a:ext cx="3493008" cy="2743200"/>
+            <a:off x="4274210" y="1353312"/>
+            <a:ext cx="3643274" cy="2907792"/>
           </a:xfrm>
           <a:prstGeom prst="roundRect">
             <a:avLst>
-              <a:gd name="adj" fmla="val 6000"/>
+              <a:gd name="adj" fmla="val 5000"/>
             </a:avLst>
           </a:prstGeom>
           <a:solidFill>
             <a:srgbClr val="F8FAFC"/>
           </a:solidFill>
-          <a:ln w="12700">
+          <a:ln w="9525">
             <a:solidFill>
               <a:srgbClr val="E2E8F0"/>
             </a:solidFill>
@@ -10040,19 +9936,17 @@
       </p:sp>
       <p:sp>
         <p:nvSpPr>
-          <p:cNvPr id="10" name="Rounded Rectangle 9"/>
+          <p:cNvPr id="10" name="Rectangle 9"/>
           <p:cNvSpPr/>
           <p:nvPr/>
         </p:nvSpPr>
         <p:spPr>
           <a:xfrm>
-            <a:off x="4343400" y="1645920"/>
-            <a:ext cx="64008" cy="2743200"/>
-          </a:xfrm>
-          <a:prstGeom prst="roundRect">
-            <a:avLst>
-              <a:gd name="adj" fmla="val 50000"/>
-            </a:avLst>
+            <a:off x="4274210" y="1389888"/>
+            <a:ext cx="64008" cy="2834640"/>
+          </a:xfrm>
+          <a:prstGeom prst="rect">
+            <a:avLst/>
           </a:prstGeom>
           <a:solidFill>
             <a:srgbClr val="4F46E5"/>
@@ -10092,8 +9986,8 @@
         </p:nvSpPr>
         <p:spPr>
           <a:xfrm>
-            <a:off x="4599432" y="1828800"/>
-            <a:ext cx="3081527" cy="2423160"/>
+            <a:off x="4466234" y="1353312"/>
+            <a:ext cx="3378098" cy="2907792"/>
           </a:xfrm>
           <a:prstGeom prst="rect">
             <a:avLst/>
@@ -10101,22 +9995,22 @@
           <a:noFill/>
         </p:spPr>
         <p:txBody>
-          <a:bodyPr wrap="square" anchor="t" lIns="0" rIns="0" tIns="0" bIns="0">
+          <a:bodyPr wrap="square" anchor="ctr" lIns="50800" rIns="50800" tIns="76200" bIns="76200">
             <a:spAutoFit/>
           </a:bodyPr>
           <a:lstStyle/>
           <a:p>
             <a:pPr>
               <a:spcAft>
-                <a:spcPts val="600"/>
+                <a:spcPts val="500"/>
               </a:spcAft>
             </a:pPr>
             <a:r>
-              <a:rPr sz="1500" b="1" i="0">
+              <a:rPr sz="1400" b="1" i="0">
                 <a:solidFill>
                   <a:srgbClr val="0F172A"/>
                 </a:solidFill>
-                <a:latin typeface="Arial"/>
+                <a:latin typeface="Calibri"/>
               </a:rPr>
               <a:t>Comprendre</a:t>
             </a:r>
@@ -10124,65 +10018,65 @@
           <a:p>
             <a:pPr>
               <a:spcAft>
-                <a:spcPts val="300"/>
+                <a:spcPts val="200"/>
               </a:spcAft>
             </a:pPr>
             <a:r>
-              <a:rPr sz="1200" b="0" i="0">
+              <a:rPr sz="1100" b="0" i="0">
                 <a:solidFill>
                   <a:srgbClr val="334155"/>
                 </a:solidFill>
-                <a:latin typeface="Arial"/>
-              </a:rPr>
-              <a:t>Audio + question libre</a:t>
+                <a:latin typeface="Calibri"/>
+              </a:rPr>
+              <a:t>· Audio + question libre</a:t>
             </a:r>
           </a:p>
           <a:p>
             <a:pPr>
               <a:spcAft>
-                <a:spcPts val="300"/>
+                <a:spcPts val="200"/>
               </a:spcAft>
             </a:pPr>
             <a:r>
-              <a:rPr sz="1200" b="0" i="0">
+              <a:rPr sz="1100" b="0" i="0">
                 <a:solidFill>
                   <a:srgbClr val="334155"/>
                 </a:solidFill>
-                <a:latin typeface="Arial"/>
-              </a:rPr>
-              <a:t>Réponse contextuelle</a:t>
+                <a:latin typeface="Calibri"/>
+              </a:rPr>
+              <a:t>· Réponse contextuelle</a:t>
             </a:r>
           </a:p>
           <a:p>
             <a:pPr>
               <a:spcAft>
-                <a:spcPts val="300"/>
+                <a:spcPts val="200"/>
               </a:spcAft>
             </a:pPr>
             <a:r>
-              <a:rPr sz="1200" b="0" i="0">
+              <a:rPr sz="1100" b="0" i="0">
                 <a:solidFill>
                   <a:srgbClr val="334155"/>
                 </a:solidFill>
-                <a:latin typeface="Arial"/>
-              </a:rPr>
-              <a:t>Tout en langage naturel</a:t>
+                <a:latin typeface="Calibri"/>
+              </a:rPr>
+              <a:t>· Langage naturel</a:t>
             </a:r>
           </a:p>
           <a:p>
             <a:pPr>
               <a:spcAft>
-                <a:spcPts val="300"/>
+                <a:spcPts val="200"/>
               </a:spcAft>
             </a:pPr>
             <a:r>
-              <a:rPr sz="1200" b="0" i="0">
+              <a:rPr sz="1100" b="0" i="0">
                 <a:solidFill>
                   <a:srgbClr val="334155"/>
                 </a:solidFill>
-                <a:latin typeface="Arial"/>
-              </a:rPr>
-              <a:t>Questions-réponses ouvertes</a:t>
+                <a:latin typeface="Calibri"/>
+              </a:rPr>
+              <a:t>· Questions-réponses ouvertes</a:t>
             </a:r>
           </a:p>
         </p:txBody>
@@ -10195,18 +10089,18 @@
         </p:nvSpPr>
         <p:spPr>
           <a:xfrm>
-            <a:off x="8046719" y="1645920"/>
-            <a:ext cx="3493008" cy="2743200"/>
+            <a:off x="8045500" y="1353312"/>
+            <a:ext cx="3643274" cy="2907792"/>
           </a:xfrm>
           <a:prstGeom prst="roundRect">
             <a:avLst>
-              <a:gd name="adj" fmla="val 6000"/>
+              <a:gd name="adj" fmla="val 5000"/>
             </a:avLst>
           </a:prstGeom>
           <a:solidFill>
             <a:srgbClr val="F8FAFC"/>
           </a:solidFill>
-          <a:ln w="12700">
+          <a:ln w="9525">
             <a:solidFill>
               <a:srgbClr val="E2E8F0"/>
             </a:solidFill>
@@ -10237,19 +10131,17 @@
       </p:sp>
       <p:sp>
         <p:nvSpPr>
-          <p:cNvPr id="13" name="Rounded Rectangle 12"/>
+          <p:cNvPr id="13" name="Rectangle 12"/>
           <p:cNvSpPr/>
           <p:nvPr/>
         </p:nvSpPr>
         <p:spPr>
           <a:xfrm>
-            <a:off x="8046719" y="1645920"/>
-            <a:ext cx="64008" cy="2743200"/>
-          </a:xfrm>
-          <a:prstGeom prst="roundRect">
-            <a:avLst>
-              <a:gd name="adj" fmla="val 50000"/>
-            </a:avLst>
+            <a:off x="8045500" y="1389888"/>
+            <a:ext cx="64008" cy="2834640"/>
+          </a:xfrm>
+          <a:prstGeom prst="rect">
+            <a:avLst/>
           </a:prstGeom>
           <a:solidFill>
             <a:srgbClr val="4F46E5"/>
@@ -10289,8 +10181,8 @@
         </p:nvSpPr>
         <p:spPr>
           <a:xfrm>
-            <a:off x="8302751" y="1828800"/>
-            <a:ext cx="3081527" cy="2423160"/>
+            <a:off x="8237524" y="1353312"/>
+            <a:ext cx="3378098" cy="2907792"/>
           </a:xfrm>
           <a:prstGeom prst="rect">
             <a:avLst/>
@@ -10298,22 +10190,22 @@
           <a:noFill/>
         </p:spPr>
         <p:txBody>
-          <a:bodyPr wrap="square" anchor="t" lIns="0" rIns="0" tIns="0" bIns="0">
+          <a:bodyPr wrap="square" anchor="ctr" lIns="50800" rIns="50800" tIns="76200" bIns="76200">
             <a:spAutoFit/>
           </a:bodyPr>
           <a:lstStyle/>
           <a:p>
             <a:pPr>
               <a:spcAft>
-                <a:spcPts val="600"/>
+                <a:spcPts val="500"/>
               </a:spcAft>
             </a:pPr>
             <a:r>
-              <a:rPr sz="1500" b="1" i="0">
+              <a:rPr sz="1400" b="1" i="0">
                 <a:solidFill>
                   <a:srgbClr val="0F172A"/>
                 </a:solidFill>
-                <a:latin typeface="Arial"/>
+                <a:latin typeface="Calibri"/>
               </a:rPr>
               <a:t>Analyser</a:t>
             </a:r>
@@ -10321,65 +10213,65 @@
           <a:p>
             <a:pPr>
               <a:spcAft>
-                <a:spcPts val="300"/>
+                <a:spcPts val="200"/>
               </a:spcAft>
             </a:pPr>
             <a:r>
-              <a:rPr sz="1200" b="0" i="0">
+              <a:rPr sz="1100" b="0" i="0">
                 <a:solidFill>
                   <a:srgbClr val="334155"/>
                 </a:solidFill>
-                <a:latin typeface="Arial"/>
-              </a:rPr>
-              <a:t>Transcription intégrale</a:t>
+                <a:latin typeface="Calibri"/>
+              </a:rPr>
+              <a:t>· Transcription intégrale</a:t>
             </a:r>
           </a:p>
           <a:p>
             <a:pPr>
               <a:spcAft>
-                <a:spcPts val="300"/>
+                <a:spcPts val="200"/>
               </a:spcAft>
             </a:pPr>
             <a:r>
-              <a:rPr sz="1200" b="0" i="0">
+              <a:rPr sz="1100" b="0" i="0">
                 <a:solidFill>
                   <a:srgbClr val="334155"/>
                 </a:solidFill>
-                <a:latin typeface="Arial"/>
-              </a:rPr>
-              <a:t>Résumé automatique</a:t>
+                <a:latin typeface="Calibri"/>
+              </a:rPr>
+              <a:t>· Résumé automatique</a:t>
             </a:r>
           </a:p>
           <a:p>
             <a:pPr>
               <a:spcAft>
-                <a:spcPts val="300"/>
+                <a:spcPts val="200"/>
               </a:spcAft>
             </a:pPr>
             <a:r>
-              <a:rPr sz="1200" b="0" i="0">
+              <a:rPr sz="1100" b="0" i="0">
                 <a:solidFill>
                   <a:srgbClr val="334155"/>
                 </a:solidFill>
-                <a:latin typeface="Arial"/>
-              </a:rPr>
-              <a:t>Détection du sentiment</a:t>
+                <a:latin typeface="Calibri"/>
+              </a:rPr>
+              <a:t>· Détection du sentiment</a:t>
             </a:r>
           </a:p>
           <a:p>
             <a:pPr>
               <a:spcAft>
-                <a:spcPts val="300"/>
+                <a:spcPts val="200"/>
               </a:spcAft>
             </a:pPr>
             <a:r>
-              <a:rPr sz="1200" b="0" i="0">
+              <a:rPr sz="1100" b="0" i="0">
                 <a:solidFill>
                   <a:srgbClr val="334155"/>
                 </a:solidFill>
-                <a:latin typeface="Arial"/>
-              </a:rPr>
-              <a:t>Rapport complet</a:t>
+                <a:latin typeface="Calibri"/>
+              </a:rPr>
+              <a:t>· Rapport complet</a:t>
             </a:r>
           </a:p>
         </p:txBody>
@@ -10392,18 +10284,18 @@
         </p:nvSpPr>
         <p:spPr>
           <a:xfrm>
-            <a:off x="640080" y="4663440"/>
-            <a:ext cx="10908792" cy="1371600"/>
+            <a:off x="502920" y="4389120"/>
+            <a:ext cx="11185855" cy="2304288"/>
           </a:xfrm>
           <a:prstGeom prst="roundRect">
             <a:avLst>
-              <a:gd name="adj" fmla="val 6000"/>
+              <a:gd name="adj" fmla="val 5000"/>
             </a:avLst>
           </a:prstGeom>
           <a:solidFill>
             <a:srgbClr val="F8FAFC"/>
           </a:solidFill>
-          <a:ln w="12700">
+          <a:ln w="9525">
             <a:solidFill>
               <a:srgbClr val="E2E8F0"/>
             </a:solidFill>
@@ -10434,19 +10326,17 @@
       </p:sp>
       <p:sp>
         <p:nvSpPr>
-          <p:cNvPr id="16" name="Rounded Rectangle 15"/>
+          <p:cNvPr id="16" name="Rectangle 15"/>
           <p:cNvSpPr/>
           <p:nvPr/>
         </p:nvSpPr>
         <p:spPr>
           <a:xfrm>
-            <a:off x="640080" y="4663440"/>
-            <a:ext cx="64008" cy="1371600"/>
-          </a:xfrm>
-          <a:prstGeom prst="roundRect">
-            <a:avLst>
-              <a:gd name="adj" fmla="val 50000"/>
-            </a:avLst>
+            <a:off x="502920" y="4425696"/>
+            <a:ext cx="64008" cy="2231136"/>
+          </a:xfrm>
+          <a:prstGeom prst="rect">
+            <a:avLst/>
           </a:prstGeom>
           <a:solidFill>
             <a:srgbClr val="4F46E5"/>
@@ -10486,8 +10376,8 @@
         </p:nvSpPr>
         <p:spPr>
           <a:xfrm>
-            <a:off x="914400" y="4846320"/>
-            <a:ext cx="10424160" cy="1005840"/>
+            <a:off x="694944" y="4389120"/>
+            <a:ext cx="10920679" cy="2304288"/>
           </a:xfrm>
           <a:prstGeom prst="rect">
             <a:avLst/>
@@ -10495,35 +10385,35 @@
           <a:noFill/>
         </p:spPr>
         <p:txBody>
-          <a:bodyPr wrap="square" anchor="t" lIns="0" rIns="0" tIns="0" bIns="0">
+          <a:bodyPr wrap="square" anchor="ctr" lIns="76200" rIns="76200" tIns="76200" bIns="76200">
             <a:spAutoFit/>
           </a:bodyPr>
           <a:lstStyle/>
           <a:p>
+            <a:pPr>
+              <a:spcAft>
+                <a:spcPts val="400"/>
+              </a:spcAft>
+            </a:pPr>
             <a:r>
               <a:rPr sz="1400" b="1" i="0">
                 <a:solidFill>
                   <a:srgbClr val="0F172A"/>
                 </a:solidFill>
-                <a:latin typeface="Arial"/>
+                <a:latin typeface="Calibri"/>
               </a:rPr>
               <a:t>Technologies front-end</a:t>
             </a:r>
           </a:p>
           <a:p>
-            <a:pPr>
-              <a:spcBef>
-                <a:spcPts val="400"/>
-              </a:spcBef>
-            </a:pPr>
             <a:r>
               <a:rPr sz="1200" b="0" i="0">
                 <a:solidFill>
                   <a:srgbClr val="334155"/>
                 </a:solidFill>
-                <a:latin typeface="Arial"/>
-              </a:rPr>
-              <a:t>Application monopage (SPA) en HTML5 / CSS3 / JavaScript vanilla — API MediaRecorder, Fetch, glisser-déposer. Interface claire et épurée, servie directement par le backend.</a:t>
+                <a:latin typeface="Calibri"/>
+              </a:rPr>
+              <a:t>HTML5 / CSS3 / JavaScript vanilla — MediaRecorder API, Fetch API, glisser-déposer. Interface en français servie directement par le backend FastAPI (même origine).</a:t>
             </a:r>
           </a:p>
         </p:txBody>
@@ -10598,8 +10488,8 @@
         </p:nvSpPr>
         <p:spPr>
           <a:xfrm>
-            <a:off x="640080" y="411480"/>
-            <a:ext cx="9601200" cy="731520"/>
+            <a:off x="502920" y="329184"/>
+            <a:ext cx="9722815" cy="713232"/>
           </a:xfrm>
           <a:prstGeom prst="rect">
             <a:avLst/>
@@ -10607,17 +10497,17 @@
           <a:noFill/>
         </p:spPr>
         <p:txBody>
-          <a:bodyPr wrap="square" anchor="t" lIns="0" rIns="0" tIns="0" bIns="0">
+          <a:bodyPr wrap="square" anchor="ctr" lIns="0" rIns="0" tIns="0" bIns="0">
             <a:spAutoFit/>
           </a:bodyPr>
           <a:lstStyle/>
           <a:p>
             <a:r>
-              <a:rPr sz="2800" b="1" i="0">
+              <a:rPr sz="2600" b="1" i="0">
                 <a:solidFill>
                   <a:srgbClr val="4338CA"/>
                 </a:solidFill>
-                <a:latin typeface="Arial"/>
+                <a:latin typeface="Calibri"/>
               </a:rPr>
               <a:t>Pipeline technique d'inférence</a:t>
             </a:r>
@@ -10632,8 +10522,8 @@
         </p:nvSpPr>
         <p:spPr>
           <a:xfrm>
-            <a:off x="10424160" y="502920"/>
-            <a:ext cx="1188720" cy="457200"/>
+            <a:off x="10408615" y="329184"/>
+            <a:ext cx="1280160" cy="713232"/>
           </a:xfrm>
           <a:prstGeom prst="rect">
             <a:avLst/>
@@ -10641,14 +10531,14 @@
           <a:noFill/>
         </p:spPr>
         <p:txBody>
-          <a:bodyPr wrap="square" anchor="t" lIns="0" rIns="0" tIns="0" bIns="0">
+          <a:bodyPr wrap="square" anchor="ctr" lIns="0" rIns="0" tIns="0" bIns="0">
             <a:spAutoFit/>
           </a:bodyPr>
           <a:lstStyle/>
           <a:p>
             <a:pPr algn="r"/>
             <a:r>
-              <a:rPr sz="1200" b="0" i="0">
+              <a:rPr sz="1100" b="0" i="0">
                 <a:solidFill>
                   <a:srgbClr val="94A3B8"/>
                 </a:solidFill>
@@ -10667,8 +10557,8 @@
         </p:nvSpPr>
         <p:spPr>
           <a:xfrm>
-            <a:off x="640080" y="1207008"/>
-            <a:ext cx="10908792" cy="31750"/>
+            <a:off x="502920" y="1143000"/>
+            <a:ext cx="11185855" cy="31750"/>
           </a:xfrm>
           <a:prstGeom prst="rect">
             <a:avLst/>
@@ -10711,18 +10601,18 @@
         </p:nvSpPr>
         <p:spPr>
           <a:xfrm>
-            <a:off x="640080" y="1508760"/>
-            <a:ext cx="10908792" cy="621792"/>
+            <a:off x="502920" y="1353312"/>
+            <a:ext cx="11185855" cy="653142"/>
           </a:xfrm>
           <a:prstGeom prst="roundRect">
             <a:avLst>
-              <a:gd name="adj" fmla="val 6000"/>
+              <a:gd name="adj" fmla="val 5000"/>
             </a:avLst>
           </a:prstGeom>
           <a:solidFill>
             <a:srgbClr val="F8FAFC"/>
           </a:solidFill>
-          <a:ln w="12700">
+          <a:ln w="9525">
             <a:solidFill>
               <a:srgbClr val="E2E8F0"/>
             </a:solidFill>
@@ -10753,19 +10643,17 @@
       </p:sp>
       <p:sp>
         <p:nvSpPr>
-          <p:cNvPr id="7" name="Rounded Rectangle 6"/>
+          <p:cNvPr id="7" name="Rectangle 6"/>
           <p:cNvSpPr/>
           <p:nvPr/>
         </p:nvSpPr>
         <p:spPr>
           <a:xfrm>
-            <a:off x="640080" y="1508760"/>
-            <a:ext cx="64008" cy="621792"/>
-          </a:xfrm>
-          <a:prstGeom prst="roundRect">
-            <a:avLst>
-              <a:gd name="adj" fmla="val 50000"/>
-            </a:avLst>
+            <a:off x="502920" y="1389888"/>
+            <a:ext cx="64008" cy="579990"/>
+          </a:xfrm>
+          <a:prstGeom prst="rect">
+            <a:avLst/>
           </a:prstGeom>
           <a:solidFill>
             <a:srgbClr val="4F46E5"/>
@@ -10805,8 +10693,8 @@
         </p:nvSpPr>
         <p:spPr>
           <a:xfrm>
-            <a:off x="914400" y="1508760"/>
-            <a:ext cx="2377440" cy="621792"/>
+            <a:off x="694944" y="1353312"/>
+            <a:ext cx="2286000" cy="653142"/>
           </a:xfrm>
           <a:prstGeom prst="rect">
             <a:avLst/>
@@ -10814,7 +10702,7 @@
           <a:noFill/>
         </p:spPr>
         <p:txBody>
-          <a:bodyPr wrap="square" anchor="ctr" lIns="0" rIns="0" tIns="0" bIns="0">
+          <a:bodyPr wrap="square" anchor="ctr" lIns="0" rIns="50800" tIns="0" bIns="0">
             <a:spAutoFit/>
           </a:bodyPr>
           <a:lstStyle/>
@@ -10824,7 +10712,7 @@
                 <a:solidFill>
                   <a:srgbClr val="4338CA"/>
                 </a:solidFill>
-                <a:latin typeface="Arial"/>
+                <a:latin typeface="Calibri"/>
               </a:rPr>
               <a:t>1. Réception</a:t>
             </a:r>
@@ -10833,14 +10721,58 @@
       </p:sp>
       <p:sp>
         <p:nvSpPr>
-          <p:cNvPr id="9" name="TextBox 8"/>
+          <p:cNvPr id="9" name="Rectangle 8"/>
+          <p:cNvSpPr/>
+          <p:nvPr/>
+        </p:nvSpPr>
+        <p:spPr>
+          <a:xfrm>
+            <a:off x="3072384" y="1451283"/>
+            <a:ext cx="12700" cy="457200"/>
+          </a:xfrm>
+          <a:prstGeom prst="rect">
+            <a:avLst/>
+          </a:prstGeom>
+          <a:solidFill>
+            <a:srgbClr val="E2E8F0"/>
+          </a:solidFill>
+          <a:ln>
+            <a:noFill/>
+          </a:ln>
+          <a:effectLst/>
+        </p:spPr>
+        <p:style>
+          <a:lnRef idx="1">
+            <a:schemeClr val="accent1"/>
+          </a:lnRef>
+          <a:fillRef idx="3">
+            <a:schemeClr val="accent1"/>
+          </a:fillRef>
+          <a:effectRef idx="2">
+            <a:schemeClr val="accent1"/>
+          </a:effectRef>
+          <a:fontRef idx="minor">
+            <a:schemeClr val="lt1"/>
+          </a:fontRef>
+        </p:style>
+        <p:txBody>
+          <a:bodyPr rtlCol="0" anchor="ctr"/>
+          <a:lstStyle/>
+          <a:p>
+            <a:pPr algn="ctr"/>
+          </a:p>
+        </p:txBody>
+      </p:sp>
+      <p:sp>
+        <p:nvSpPr>
+          <p:cNvPr id="10" name="TextBox 9"/>
           <p:cNvSpPr txBox="1"/>
           <p:nvPr/>
         </p:nvSpPr>
         <p:spPr>
           <a:xfrm>
-            <a:off x="3383280" y="1508760"/>
-            <a:ext cx="7955279" cy="621792"/>
+            <a:off x="3218688" y="1353312"/>
+            <a:ext cx="8470087" cy="653142"/>
           </a:xfrm>
           <a:prstGeom prst="rect">
             <a:avLst/>
@@ -10848,7 +10780,7 @@
           <a:noFill/>
         </p:spPr>
         <p:txBody>
-          <a:bodyPr wrap="square" anchor="ctr" lIns="0" rIns="0" tIns="0" bIns="0">
+          <a:bodyPr wrap="square" anchor="ctr" lIns="76200" rIns="76200" tIns="0" bIns="0">
             <a:spAutoFit/>
           </a:bodyPr>
           <a:lstStyle/>
@@ -10858,33 +10790,33 @@
                 <a:solidFill>
                   <a:srgbClr val="334155"/>
                 </a:solidFill>
-                <a:latin typeface="Arial"/>
-              </a:rPr>
-              <a:t>Requête HTTP POST (multipart/form-data) — validation : format, taille ≤ 50 Mo, contenu non vide</a:t>
-            </a:r>
-          </a:p>
-        </p:txBody>
-      </p:sp>
-      <p:sp>
-        <p:nvSpPr>
-          <p:cNvPr id="10" name="Rounded Rectangle 9"/>
+                <a:latin typeface="Calibri"/>
+              </a:rPr>
+              <a:t>Requête HTTP POST multipart/form-data — validation : format, taille ≤ 50 Mo, contenu non vide</a:t>
+            </a:r>
+          </a:p>
+        </p:txBody>
+      </p:sp>
+      <p:sp>
+        <p:nvSpPr>
+          <p:cNvPr id="11" name="Rounded Rectangle 10"/>
           <p:cNvSpPr/>
           <p:nvPr/>
         </p:nvSpPr>
         <p:spPr>
           <a:xfrm>
-            <a:off x="640080" y="2221991"/>
-            <a:ext cx="10908792" cy="621792"/>
+            <a:off x="502920" y="2134470"/>
+            <a:ext cx="11185855" cy="653142"/>
           </a:xfrm>
           <a:prstGeom prst="roundRect">
             <a:avLst>
-              <a:gd name="adj" fmla="val 6000"/>
+              <a:gd name="adj" fmla="val 5000"/>
             </a:avLst>
           </a:prstGeom>
           <a:solidFill>
             <a:srgbClr val="F8FAFC"/>
           </a:solidFill>
-          <a:ln w="12700">
+          <a:ln w="9525">
             <a:solidFill>
               <a:srgbClr val="E2E8F0"/>
             </a:solidFill>
@@ -10915,19 +10847,17 @@
       </p:sp>
       <p:sp>
         <p:nvSpPr>
-          <p:cNvPr id="11" name="Rounded Rectangle 10"/>
+          <p:cNvPr id="12" name="Rectangle 11"/>
           <p:cNvSpPr/>
           <p:nvPr/>
         </p:nvSpPr>
         <p:spPr>
           <a:xfrm>
-            <a:off x="640080" y="2221991"/>
-            <a:ext cx="64008" cy="621792"/>
-          </a:xfrm>
-          <a:prstGeom prst="roundRect">
-            <a:avLst>
-              <a:gd name="adj" fmla="val 50000"/>
-            </a:avLst>
+            <a:off x="502920" y="2171046"/>
+            <a:ext cx="64008" cy="579990"/>
+          </a:xfrm>
+          <a:prstGeom prst="rect">
+            <a:avLst/>
           </a:prstGeom>
           <a:solidFill>
             <a:srgbClr val="4F46E5"/>
@@ -10961,14 +10891,14 @@
       </p:sp>
       <p:sp>
         <p:nvSpPr>
-          <p:cNvPr id="12" name="TextBox 11"/>
+          <p:cNvPr id="13" name="TextBox 12"/>
           <p:cNvSpPr txBox="1"/>
           <p:nvPr/>
         </p:nvSpPr>
         <p:spPr>
           <a:xfrm>
-            <a:off x="914400" y="2221991"/>
-            <a:ext cx="2377440" cy="621792"/>
+            <a:off x="694944" y="2134470"/>
+            <a:ext cx="2286000" cy="653142"/>
           </a:xfrm>
           <a:prstGeom prst="rect">
             <a:avLst/>
@@ -10976,7 +10906,7 @@
           <a:noFill/>
         </p:spPr>
         <p:txBody>
-          <a:bodyPr wrap="square" anchor="ctr" lIns="0" rIns="0" tIns="0" bIns="0">
+          <a:bodyPr wrap="square" anchor="ctr" lIns="0" rIns="50800" tIns="0" bIns="0">
             <a:spAutoFit/>
           </a:bodyPr>
           <a:lstStyle/>
@@ -10986,7 +10916,7 @@
                 <a:solidFill>
                   <a:srgbClr val="4338CA"/>
                 </a:solidFill>
-                <a:latin typeface="Arial"/>
+                <a:latin typeface="Calibri"/>
               </a:rPr>
               <a:t>2. Décodage audio</a:t>
             </a:r>
@@ -10995,14 +10925,58 @@
       </p:sp>
       <p:sp>
         <p:nvSpPr>
-          <p:cNvPr id="13" name="TextBox 12"/>
+          <p:cNvPr id="14" name="Rectangle 13"/>
+          <p:cNvSpPr/>
+          <p:nvPr/>
+        </p:nvSpPr>
+        <p:spPr>
+          <a:xfrm>
+            <a:off x="3072384" y="2232442"/>
+            <a:ext cx="12700" cy="457200"/>
+          </a:xfrm>
+          <a:prstGeom prst="rect">
+            <a:avLst/>
+          </a:prstGeom>
+          <a:solidFill>
+            <a:srgbClr val="E2E8F0"/>
+          </a:solidFill>
+          <a:ln>
+            <a:noFill/>
+          </a:ln>
+          <a:effectLst/>
+        </p:spPr>
+        <p:style>
+          <a:lnRef idx="1">
+            <a:schemeClr val="accent1"/>
+          </a:lnRef>
+          <a:fillRef idx="3">
+            <a:schemeClr val="accent1"/>
+          </a:fillRef>
+          <a:effectRef idx="2">
+            <a:schemeClr val="accent1"/>
+          </a:effectRef>
+          <a:fontRef idx="minor">
+            <a:schemeClr val="lt1"/>
+          </a:fontRef>
+        </p:style>
+        <p:txBody>
+          <a:bodyPr rtlCol="0" anchor="ctr"/>
+          <a:lstStyle/>
+          <a:p>
+            <a:pPr algn="ctr"/>
+          </a:p>
+        </p:txBody>
+      </p:sp>
+      <p:sp>
+        <p:nvSpPr>
+          <p:cNvPr id="15" name="TextBox 14"/>
           <p:cNvSpPr txBox="1"/>
           <p:nvPr/>
         </p:nvSpPr>
         <p:spPr>
           <a:xfrm>
-            <a:off x="3383280" y="2221991"/>
-            <a:ext cx="7955279" cy="621792"/>
+            <a:off x="3218688" y="2134470"/>
+            <a:ext cx="8470087" cy="653142"/>
           </a:xfrm>
           <a:prstGeom prst="rect">
             <a:avLst/>
@@ -11010,7 +10984,7 @@
           <a:noFill/>
         </p:spPr>
         <p:txBody>
-          <a:bodyPr wrap="square" anchor="ctr" lIns="0" rIns="0" tIns="0" bIns="0">
+          <a:bodyPr wrap="square" anchor="ctr" lIns="76200" rIns="76200" tIns="0" bIns="0">
             <a:spAutoFit/>
           </a:bodyPr>
           <a:lstStyle/>
@@ -11020,7 +10994,7 @@
                 <a:solidFill>
                   <a:srgbClr val="334155"/>
                 </a:solidFill>
-                <a:latin typeface="Arial"/>
+                <a:latin typeface="Calibri"/>
               </a:rPr>
               <a:t>soundfile → WAV/FLAC/OGG ; librosa + ffmpeg → MP3/M4A/WebM-Opus</a:t>
             </a:r>
@@ -11029,24 +11003,24 @@
       </p:sp>
       <p:sp>
         <p:nvSpPr>
-          <p:cNvPr id="14" name="Rounded Rectangle 13"/>
+          <p:cNvPr id="16" name="Rounded Rectangle 15"/>
           <p:cNvSpPr/>
           <p:nvPr/>
         </p:nvSpPr>
         <p:spPr>
           <a:xfrm>
-            <a:off x="640080" y="2935224"/>
-            <a:ext cx="10908792" cy="621792"/>
+            <a:off x="502920" y="2915629"/>
+            <a:ext cx="11185855" cy="653142"/>
           </a:xfrm>
           <a:prstGeom prst="roundRect">
             <a:avLst>
-              <a:gd name="adj" fmla="val 6000"/>
+              <a:gd name="adj" fmla="val 5000"/>
             </a:avLst>
           </a:prstGeom>
           <a:solidFill>
             <a:srgbClr val="F8FAFC"/>
           </a:solidFill>
-          <a:ln w="12700">
+          <a:ln w="9525">
             <a:solidFill>
               <a:srgbClr val="E2E8F0"/>
             </a:solidFill>
@@ -11077,19 +11051,17 @@
       </p:sp>
       <p:sp>
         <p:nvSpPr>
-          <p:cNvPr id="15" name="Rounded Rectangle 14"/>
+          <p:cNvPr id="17" name="Rectangle 16"/>
           <p:cNvSpPr/>
           <p:nvPr/>
         </p:nvSpPr>
         <p:spPr>
           <a:xfrm>
-            <a:off x="640080" y="2935224"/>
-            <a:ext cx="64008" cy="621792"/>
-          </a:xfrm>
-          <a:prstGeom prst="roundRect">
-            <a:avLst>
-              <a:gd name="adj" fmla="val 50000"/>
-            </a:avLst>
+            <a:off x="502920" y="2952205"/>
+            <a:ext cx="64008" cy="579990"/>
+          </a:xfrm>
+          <a:prstGeom prst="rect">
+            <a:avLst/>
           </a:prstGeom>
           <a:solidFill>
             <a:srgbClr val="4F46E5"/>
@@ -11123,14 +11095,14 @@
       </p:sp>
       <p:sp>
         <p:nvSpPr>
-          <p:cNvPr id="16" name="TextBox 15"/>
+          <p:cNvPr id="18" name="TextBox 17"/>
           <p:cNvSpPr txBox="1"/>
           <p:nvPr/>
         </p:nvSpPr>
         <p:spPr>
           <a:xfrm>
-            <a:off x="914400" y="2935224"/>
-            <a:ext cx="2377440" cy="621792"/>
+            <a:off x="694944" y="2915629"/>
+            <a:ext cx="2286000" cy="653142"/>
           </a:xfrm>
           <a:prstGeom prst="rect">
             <a:avLst/>
@@ -11138,7 +11110,7 @@
           <a:noFill/>
         </p:spPr>
         <p:txBody>
-          <a:bodyPr wrap="square" anchor="ctr" lIns="0" rIns="0" tIns="0" bIns="0">
+          <a:bodyPr wrap="square" anchor="ctr" lIns="0" rIns="50800" tIns="0" bIns="0">
             <a:spAutoFit/>
           </a:bodyPr>
           <a:lstStyle/>
@@ -11148,7 +11120,7 @@
                 <a:solidFill>
                   <a:srgbClr val="4338CA"/>
                 </a:solidFill>
-                <a:latin typeface="Arial"/>
+                <a:latin typeface="Calibri"/>
               </a:rPr>
               <a:t>3. Rééchantillonnage</a:t>
             </a:r>
@@ -11157,14 +11129,58 @@
       </p:sp>
       <p:sp>
         <p:nvSpPr>
-          <p:cNvPr id="17" name="TextBox 16"/>
+          <p:cNvPr id="19" name="Rectangle 18"/>
+          <p:cNvSpPr/>
+          <p:nvPr/>
+        </p:nvSpPr>
+        <p:spPr>
+          <a:xfrm>
+            <a:off x="3072384" y="3013601"/>
+            <a:ext cx="12700" cy="457200"/>
+          </a:xfrm>
+          <a:prstGeom prst="rect">
+            <a:avLst/>
+          </a:prstGeom>
+          <a:solidFill>
+            <a:srgbClr val="E2E8F0"/>
+          </a:solidFill>
+          <a:ln>
+            <a:noFill/>
+          </a:ln>
+          <a:effectLst/>
+        </p:spPr>
+        <p:style>
+          <a:lnRef idx="1">
+            <a:schemeClr val="accent1"/>
+          </a:lnRef>
+          <a:fillRef idx="3">
+            <a:schemeClr val="accent1"/>
+          </a:fillRef>
+          <a:effectRef idx="2">
+            <a:schemeClr val="accent1"/>
+          </a:effectRef>
+          <a:fontRef idx="minor">
+            <a:schemeClr val="lt1"/>
+          </a:fontRef>
+        </p:style>
+        <p:txBody>
+          <a:bodyPr rtlCol="0" anchor="ctr"/>
+          <a:lstStyle/>
+          <a:p>
+            <a:pPr algn="ctr"/>
+          </a:p>
+        </p:txBody>
+      </p:sp>
+      <p:sp>
+        <p:nvSpPr>
+          <p:cNvPr id="20" name="TextBox 19"/>
           <p:cNvSpPr txBox="1"/>
           <p:nvPr/>
         </p:nvSpPr>
         <p:spPr>
           <a:xfrm>
-            <a:off x="3383280" y="2935224"/>
-            <a:ext cx="7955279" cy="621792"/>
+            <a:off x="3218688" y="2915629"/>
+            <a:ext cx="8470087" cy="653142"/>
           </a:xfrm>
           <a:prstGeom prst="rect">
             <a:avLst/>
@@ -11172,7 +11188,7 @@
           <a:noFill/>
         </p:spPr>
         <p:txBody>
-          <a:bodyPr wrap="square" anchor="ctr" lIns="0" rIns="0" tIns="0" bIns="0">
+          <a:bodyPr wrap="square" anchor="ctr" lIns="76200" rIns="76200" tIns="0" bIns="0">
             <a:spAutoFit/>
           </a:bodyPr>
           <a:lstStyle/>
@@ -11182,7 +11198,7 @@
                 <a:solidFill>
                   <a:srgbClr val="334155"/>
                 </a:solidFill>
-                <a:latin typeface="Arial"/>
+                <a:latin typeface="Calibri"/>
               </a:rPr>
               <a:t>Conversion en 16 000 Hz, mono, float32 (fréquence attendue par l'encodeur)</a:t>
             </a:r>
@@ -11191,24 +11207,24 @@
       </p:sp>
       <p:sp>
         <p:nvSpPr>
-          <p:cNvPr id="18" name="Rounded Rectangle 17"/>
+          <p:cNvPr id="21" name="Rounded Rectangle 20"/>
           <p:cNvSpPr/>
           <p:nvPr/>
         </p:nvSpPr>
         <p:spPr>
           <a:xfrm>
-            <a:off x="640080" y="3648456"/>
-            <a:ext cx="10908792" cy="621792"/>
+            <a:off x="502920" y="3696788"/>
+            <a:ext cx="11185855" cy="653142"/>
           </a:xfrm>
           <a:prstGeom prst="roundRect">
             <a:avLst>
-              <a:gd name="adj" fmla="val 6000"/>
+              <a:gd name="adj" fmla="val 5000"/>
             </a:avLst>
           </a:prstGeom>
           <a:solidFill>
             <a:srgbClr val="F8FAFC"/>
           </a:solidFill>
-          <a:ln w="12700">
+          <a:ln w="9525">
             <a:solidFill>
               <a:srgbClr val="E2E8F0"/>
             </a:solidFill>
@@ -11239,19 +11255,17 @@
       </p:sp>
       <p:sp>
         <p:nvSpPr>
-          <p:cNvPr id="19" name="Rounded Rectangle 18"/>
+          <p:cNvPr id="22" name="Rectangle 21"/>
           <p:cNvSpPr/>
           <p:nvPr/>
         </p:nvSpPr>
         <p:spPr>
           <a:xfrm>
-            <a:off x="640080" y="3648456"/>
-            <a:ext cx="64008" cy="621792"/>
-          </a:xfrm>
-          <a:prstGeom prst="roundRect">
-            <a:avLst>
-              <a:gd name="adj" fmla="val 50000"/>
-            </a:avLst>
+            <a:off x="502920" y="3733364"/>
+            <a:ext cx="64008" cy="579990"/>
+          </a:xfrm>
+          <a:prstGeom prst="rect">
+            <a:avLst/>
           </a:prstGeom>
           <a:solidFill>
             <a:srgbClr val="4F46E5"/>
@@ -11285,14 +11299,14 @@
       </p:sp>
       <p:sp>
         <p:nvSpPr>
-          <p:cNvPr id="20" name="TextBox 19"/>
+          <p:cNvPr id="23" name="TextBox 22"/>
           <p:cNvSpPr txBox="1"/>
           <p:nvPr/>
         </p:nvSpPr>
         <p:spPr>
           <a:xfrm>
-            <a:off x="914400" y="3648456"/>
-            <a:ext cx="2377440" cy="621792"/>
+            <a:off x="694944" y="3696788"/>
+            <a:ext cx="2286000" cy="653142"/>
           </a:xfrm>
           <a:prstGeom prst="rect">
             <a:avLst/>
@@ -11300,7 +11314,7 @@
           <a:noFill/>
         </p:spPr>
         <p:txBody>
-          <a:bodyPr wrap="square" anchor="ctr" lIns="0" rIns="0" tIns="0" bIns="0">
+          <a:bodyPr wrap="square" anchor="ctr" lIns="0" rIns="50800" tIns="0" bIns="0">
             <a:spAutoFit/>
           </a:bodyPr>
           <a:lstStyle/>
@@ -11310,7 +11324,7 @@
                 <a:solidFill>
                   <a:srgbClr val="4338CA"/>
                 </a:solidFill>
-                <a:latin typeface="Arial"/>
+                <a:latin typeface="Calibri"/>
               </a:rPr>
               <a:t>4. Chat template</a:t>
             </a:r>
@@ -11319,14 +11333,58 @@
       </p:sp>
       <p:sp>
         <p:nvSpPr>
-          <p:cNvPr id="21" name="TextBox 20"/>
+          <p:cNvPr id="24" name="Rectangle 23"/>
+          <p:cNvSpPr/>
+          <p:nvPr/>
+        </p:nvSpPr>
+        <p:spPr>
+          <a:xfrm>
+            <a:off x="3072384" y="3794759"/>
+            <a:ext cx="12700" cy="457200"/>
+          </a:xfrm>
+          <a:prstGeom prst="rect">
+            <a:avLst/>
+          </a:prstGeom>
+          <a:solidFill>
+            <a:srgbClr val="E2E8F0"/>
+          </a:solidFill>
+          <a:ln>
+            <a:noFill/>
+          </a:ln>
+          <a:effectLst/>
+        </p:spPr>
+        <p:style>
+          <a:lnRef idx="1">
+            <a:schemeClr val="accent1"/>
+          </a:lnRef>
+          <a:fillRef idx="3">
+            <a:schemeClr val="accent1"/>
+          </a:fillRef>
+          <a:effectRef idx="2">
+            <a:schemeClr val="accent1"/>
+          </a:effectRef>
+          <a:fontRef idx="minor">
+            <a:schemeClr val="lt1"/>
+          </a:fontRef>
+        </p:style>
+        <p:txBody>
+          <a:bodyPr rtlCol="0" anchor="ctr"/>
+          <a:lstStyle/>
+          <a:p>
+            <a:pPr algn="ctr"/>
+          </a:p>
+        </p:txBody>
+      </p:sp>
+      <p:sp>
+        <p:nvSpPr>
+          <p:cNvPr id="25" name="TextBox 24"/>
           <p:cNvSpPr txBox="1"/>
           <p:nvPr/>
         </p:nvSpPr>
         <p:spPr>
           <a:xfrm>
-            <a:off x="3383280" y="3648456"/>
-            <a:ext cx="7955279" cy="621792"/>
+            <a:off x="3218688" y="3696788"/>
+            <a:ext cx="8470087" cy="653142"/>
           </a:xfrm>
           <a:prstGeom prst="rect">
             <a:avLst/>
@@ -11334,7 +11392,7 @@
           <a:noFill/>
         </p:spPr>
         <p:txBody>
-          <a:bodyPr wrap="square" anchor="ctr" lIns="0" rIns="0" tIns="0" bIns="0">
+          <a:bodyPr wrap="square" anchor="ctr" lIns="76200" rIns="76200" tIns="0" bIns="0">
             <a:spAutoFit/>
           </a:bodyPr>
           <a:lstStyle/>
@@ -11344,7 +11402,7 @@
                 <a:solidFill>
                   <a:srgbClr val="334155"/>
                 </a:solidFill>
-                <a:latin typeface="Arial"/>
+                <a:latin typeface="Calibri"/>
               </a:rPr>
               <a:t>Construction de la conversation Qwen2-Audio (tokens audio + tokens texte)</a:t>
             </a:r>
@@ -11353,24 +11411,24 @@
       </p:sp>
       <p:sp>
         <p:nvSpPr>
-          <p:cNvPr id="22" name="Rounded Rectangle 21"/>
+          <p:cNvPr id="26" name="Rounded Rectangle 25"/>
           <p:cNvSpPr/>
           <p:nvPr/>
         </p:nvSpPr>
         <p:spPr>
           <a:xfrm>
-            <a:off x="640080" y="4361688"/>
-            <a:ext cx="10908792" cy="621792"/>
+            <a:off x="502920" y="4477947"/>
+            <a:ext cx="11185855" cy="653142"/>
           </a:xfrm>
           <a:prstGeom prst="roundRect">
             <a:avLst>
-              <a:gd name="adj" fmla="val 6000"/>
+              <a:gd name="adj" fmla="val 5000"/>
             </a:avLst>
           </a:prstGeom>
           <a:solidFill>
             <a:srgbClr val="F8FAFC"/>
           </a:solidFill>
-          <a:ln w="12700">
+          <a:ln w="9525">
             <a:solidFill>
               <a:srgbClr val="E2E8F0"/>
             </a:solidFill>
@@ -11401,19 +11459,17 @@
       </p:sp>
       <p:sp>
         <p:nvSpPr>
-          <p:cNvPr id="23" name="Rounded Rectangle 22"/>
+          <p:cNvPr id="27" name="Rectangle 26"/>
           <p:cNvSpPr/>
           <p:nvPr/>
         </p:nvSpPr>
         <p:spPr>
           <a:xfrm>
-            <a:off x="640080" y="4361688"/>
-            <a:ext cx="64008" cy="621792"/>
-          </a:xfrm>
-          <a:prstGeom prst="roundRect">
-            <a:avLst>
-              <a:gd name="adj" fmla="val 50000"/>
-            </a:avLst>
+            <a:off x="502920" y="4514523"/>
+            <a:ext cx="64008" cy="579990"/>
+          </a:xfrm>
+          <a:prstGeom prst="rect">
+            <a:avLst/>
           </a:prstGeom>
           <a:solidFill>
             <a:srgbClr val="4F46E5"/>
@@ -11447,14 +11503,14 @@
       </p:sp>
       <p:sp>
         <p:nvSpPr>
-          <p:cNvPr id="24" name="TextBox 23"/>
+          <p:cNvPr id="28" name="TextBox 27"/>
           <p:cNvSpPr txBox="1"/>
           <p:nvPr/>
         </p:nvSpPr>
         <p:spPr>
           <a:xfrm>
-            <a:off x="914400" y="4361688"/>
-            <a:ext cx="2377440" cy="621792"/>
+            <a:off x="694944" y="4477947"/>
+            <a:ext cx="2286000" cy="653142"/>
           </a:xfrm>
           <a:prstGeom prst="rect">
             <a:avLst/>
@@ -11462,7 +11518,7 @@
           <a:noFill/>
         </p:spPr>
         <p:txBody>
-          <a:bodyPr wrap="square" anchor="ctr" lIns="0" rIns="0" tIns="0" bIns="0">
+          <a:bodyPr wrap="square" anchor="ctr" lIns="0" rIns="50800" tIns="0" bIns="0">
             <a:spAutoFit/>
           </a:bodyPr>
           <a:lstStyle/>
@@ -11472,7 +11528,7 @@
                 <a:solidFill>
                   <a:srgbClr val="4338CA"/>
                 </a:solidFill>
-                <a:latin typeface="Arial"/>
+                <a:latin typeface="Calibri"/>
               </a:rPr>
               <a:t>5. AutoProcessor</a:t>
             </a:r>
@@ -11481,14 +11537,58 @@
       </p:sp>
       <p:sp>
         <p:nvSpPr>
-          <p:cNvPr id="25" name="TextBox 24"/>
+          <p:cNvPr id="29" name="Rectangle 28"/>
+          <p:cNvSpPr/>
+          <p:nvPr/>
+        </p:nvSpPr>
+        <p:spPr>
+          <a:xfrm>
+            <a:off x="3072384" y="4575918"/>
+            <a:ext cx="12700" cy="457200"/>
+          </a:xfrm>
+          <a:prstGeom prst="rect">
+            <a:avLst/>
+          </a:prstGeom>
+          <a:solidFill>
+            <a:srgbClr val="E2E8F0"/>
+          </a:solidFill>
+          <a:ln>
+            <a:noFill/>
+          </a:ln>
+          <a:effectLst/>
+        </p:spPr>
+        <p:style>
+          <a:lnRef idx="1">
+            <a:schemeClr val="accent1"/>
+          </a:lnRef>
+          <a:fillRef idx="3">
+            <a:schemeClr val="accent1"/>
+          </a:fillRef>
+          <a:effectRef idx="2">
+            <a:schemeClr val="accent1"/>
+          </a:effectRef>
+          <a:fontRef idx="minor">
+            <a:schemeClr val="lt1"/>
+          </a:fontRef>
+        </p:style>
+        <p:txBody>
+          <a:bodyPr rtlCol="0" anchor="ctr"/>
+          <a:lstStyle/>
+          <a:p>
+            <a:pPr algn="ctr"/>
+          </a:p>
+        </p:txBody>
+      </p:sp>
+      <p:sp>
+        <p:nvSpPr>
+          <p:cNvPr id="30" name="TextBox 29"/>
           <p:cNvSpPr txBox="1"/>
           <p:nvPr/>
         </p:nvSpPr>
         <p:spPr>
           <a:xfrm>
-            <a:off x="3383280" y="4361688"/>
-            <a:ext cx="7955279" cy="621792"/>
+            <a:off x="3218688" y="4477947"/>
+            <a:ext cx="8470087" cy="653142"/>
           </a:xfrm>
           <a:prstGeom prst="rect">
             <a:avLst/>
@@ -11496,7 +11596,7 @@
           <a:noFill/>
         </p:spPr>
         <p:txBody>
-          <a:bodyPr wrap="square" anchor="ctr" lIns="0" rIns="0" tIns="0" bIns="0">
+          <a:bodyPr wrap="square" anchor="ctr" lIns="76200" rIns="76200" tIns="0" bIns="0">
             <a:spAutoFit/>
           </a:bodyPr>
           <a:lstStyle/>
@@ -11506,33 +11606,33 @@
                 <a:solidFill>
                   <a:srgbClr val="334155"/>
                 </a:solidFill>
-                <a:latin typeface="Arial"/>
-              </a:rPr>
-              <a:t>Texte → tokens ; audio → caractéristiques (input_features) → tenseurs PyTorch</a:t>
-            </a:r>
-          </a:p>
-        </p:txBody>
-      </p:sp>
-      <p:sp>
-        <p:nvSpPr>
-          <p:cNvPr id="26" name="Rounded Rectangle 25"/>
+                <a:latin typeface="Calibri"/>
+              </a:rPr>
+              <a:t>Texte → tokens ; audio → input_features → tenseurs PyTorch</a:t>
+            </a:r>
+          </a:p>
+        </p:txBody>
+      </p:sp>
+      <p:sp>
+        <p:nvSpPr>
+          <p:cNvPr id="31" name="Rounded Rectangle 30"/>
           <p:cNvSpPr/>
           <p:nvPr/>
         </p:nvSpPr>
         <p:spPr>
           <a:xfrm>
-            <a:off x="640080" y="5074920"/>
-            <a:ext cx="10908792" cy="621792"/>
+            <a:off x="502920" y="5259106"/>
+            <a:ext cx="11185855" cy="653142"/>
           </a:xfrm>
           <a:prstGeom prst="roundRect">
             <a:avLst>
-              <a:gd name="adj" fmla="val 6000"/>
+              <a:gd name="adj" fmla="val 5000"/>
             </a:avLst>
           </a:prstGeom>
           <a:solidFill>
             <a:srgbClr val="F8FAFC"/>
           </a:solidFill>
-          <a:ln w="12700">
+          <a:ln w="9525">
             <a:solidFill>
               <a:srgbClr val="E2E8F0"/>
             </a:solidFill>
@@ -11563,19 +11663,17 @@
       </p:sp>
       <p:sp>
         <p:nvSpPr>
-          <p:cNvPr id="27" name="Rounded Rectangle 26"/>
+          <p:cNvPr id="32" name="Rectangle 31"/>
           <p:cNvSpPr/>
           <p:nvPr/>
         </p:nvSpPr>
         <p:spPr>
           <a:xfrm>
-            <a:off x="640080" y="5074920"/>
-            <a:ext cx="64008" cy="621792"/>
-          </a:xfrm>
-          <a:prstGeom prst="roundRect">
-            <a:avLst>
-              <a:gd name="adj" fmla="val 50000"/>
-            </a:avLst>
+            <a:off x="502920" y="5295682"/>
+            <a:ext cx="64008" cy="579990"/>
+          </a:xfrm>
+          <a:prstGeom prst="rect">
+            <a:avLst/>
           </a:prstGeom>
           <a:solidFill>
             <a:srgbClr val="4F46E5"/>
@@ -11609,14 +11707,14 @@
       </p:sp>
       <p:sp>
         <p:nvSpPr>
-          <p:cNvPr id="28" name="TextBox 27"/>
+          <p:cNvPr id="33" name="TextBox 32"/>
           <p:cNvSpPr txBox="1"/>
           <p:nvPr/>
         </p:nvSpPr>
         <p:spPr>
           <a:xfrm>
-            <a:off x="914400" y="5074920"/>
-            <a:ext cx="2377440" cy="621792"/>
+            <a:off x="694944" y="5259106"/>
+            <a:ext cx="2286000" cy="653142"/>
           </a:xfrm>
           <a:prstGeom prst="rect">
             <a:avLst/>
@@ -11624,7 +11722,7 @@
           <a:noFill/>
         </p:spPr>
         <p:txBody>
-          <a:bodyPr wrap="square" anchor="ctr" lIns="0" rIns="0" tIns="0" bIns="0">
+          <a:bodyPr wrap="square" anchor="ctr" lIns="0" rIns="50800" tIns="0" bIns="0">
             <a:spAutoFit/>
           </a:bodyPr>
           <a:lstStyle/>
@@ -11634,23 +11732,67 @@
                 <a:solidFill>
                   <a:srgbClr val="4338CA"/>
                 </a:solidFill>
-                <a:latin typeface="Arial"/>
-              </a:rPr>
-              <a:t>6. Inférence</a:t>
-            </a:r>
-          </a:p>
-        </p:txBody>
-      </p:sp>
-      <p:sp>
-        <p:nvSpPr>
-          <p:cNvPr id="29" name="TextBox 28"/>
+                <a:latin typeface="Calibri"/>
+              </a:rPr>
+              <a:t>6. Inférence GPU</a:t>
+            </a:r>
+          </a:p>
+        </p:txBody>
+      </p:sp>
+      <p:sp>
+        <p:nvSpPr>
+          <p:cNvPr id="34" name="Rectangle 33"/>
+          <p:cNvSpPr/>
+          <p:nvPr/>
+        </p:nvSpPr>
+        <p:spPr>
+          <a:xfrm>
+            <a:off x="3072384" y="5357077"/>
+            <a:ext cx="12700" cy="457200"/>
+          </a:xfrm>
+          <a:prstGeom prst="rect">
+            <a:avLst/>
+          </a:prstGeom>
+          <a:solidFill>
+            <a:srgbClr val="E2E8F0"/>
+          </a:solidFill>
+          <a:ln>
+            <a:noFill/>
+          </a:ln>
+          <a:effectLst/>
+        </p:spPr>
+        <p:style>
+          <a:lnRef idx="1">
+            <a:schemeClr val="accent1"/>
+          </a:lnRef>
+          <a:fillRef idx="3">
+            <a:schemeClr val="accent1"/>
+          </a:fillRef>
+          <a:effectRef idx="2">
+            <a:schemeClr val="accent1"/>
+          </a:effectRef>
+          <a:fontRef idx="minor">
+            <a:schemeClr val="lt1"/>
+          </a:fontRef>
+        </p:style>
+        <p:txBody>
+          <a:bodyPr rtlCol="0" anchor="ctr"/>
+          <a:lstStyle/>
+          <a:p>
+            <a:pPr algn="ctr"/>
+          </a:p>
+        </p:txBody>
+      </p:sp>
+      <p:sp>
+        <p:nvSpPr>
+          <p:cNvPr id="35" name="TextBox 34"/>
           <p:cNvSpPr txBox="1"/>
           <p:nvPr/>
         </p:nvSpPr>
         <p:spPr>
           <a:xfrm>
-            <a:off x="3383280" y="5074920"/>
-            <a:ext cx="7955279" cy="621792"/>
+            <a:off x="3218688" y="5259106"/>
+            <a:ext cx="8470087" cy="653142"/>
           </a:xfrm>
           <a:prstGeom prst="rect">
             <a:avLst/>
@@ -11658,7 +11800,7 @@
           <a:noFill/>
         </p:spPr>
         <p:txBody>
-          <a:bodyPr wrap="square" anchor="ctr" lIns="0" rIns="0" tIns="0" bIns="0">
+          <a:bodyPr wrap="square" anchor="ctr" lIns="76200" rIns="76200" tIns="0" bIns="0">
             <a:spAutoFit/>
           </a:bodyPr>
           <a:lstStyle/>
@@ -11668,33 +11810,33 @@
                 <a:solidFill>
                   <a:srgbClr val="334155"/>
                 </a:solidFill>
-                <a:latin typeface="Arial"/>
-              </a:rPr>
-              <a:t>model.generate() → décodage des tokens → réponse textuelle</a:t>
-            </a:r>
-          </a:p>
-        </p:txBody>
-      </p:sp>
-      <p:sp>
-        <p:nvSpPr>
-          <p:cNvPr id="30" name="Rounded Rectangle 29"/>
+                <a:latin typeface="Calibri"/>
+              </a:rPr>
+              <a:t>model.generate() → décodage autorégressif des tokens → réponse textuelle</a:t>
+            </a:r>
+          </a:p>
+        </p:txBody>
+      </p:sp>
+      <p:sp>
+        <p:nvSpPr>
+          <p:cNvPr id="36" name="Rounded Rectangle 35"/>
           <p:cNvSpPr/>
           <p:nvPr/>
         </p:nvSpPr>
         <p:spPr>
           <a:xfrm>
-            <a:off x="640080" y="5788152"/>
-            <a:ext cx="10908792" cy="621792"/>
+            <a:off x="502920" y="6040265"/>
+            <a:ext cx="11185855" cy="653142"/>
           </a:xfrm>
           <a:prstGeom prst="roundRect">
             <a:avLst>
-              <a:gd name="adj" fmla="val 6000"/>
+              <a:gd name="adj" fmla="val 5000"/>
             </a:avLst>
           </a:prstGeom>
           <a:solidFill>
             <a:srgbClr val="F8FAFC"/>
           </a:solidFill>
-          <a:ln w="12700">
+          <a:ln w="9525">
             <a:solidFill>
               <a:srgbClr val="E2E8F0"/>
             </a:solidFill>
@@ -11725,19 +11867,17 @@
       </p:sp>
       <p:sp>
         <p:nvSpPr>
-          <p:cNvPr id="31" name="Rounded Rectangle 30"/>
+          <p:cNvPr id="37" name="Rectangle 36"/>
           <p:cNvSpPr/>
           <p:nvPr/>
         </p:nvSpPr>
         <p:spPr>
           <a:xfrm>
-            <a:off x="640080" y="5788152"/>
-            <a:ext cx="64008" cy="621792"/>
-          </a:xfrm>
-          <a:prstGeom prst="roundRect">
-            <a:avLst>
-              <a:gd name="adj" fmla="val 50000"/>
-            </a:avLst>
+            <a:off x="502920" y="6076841"/>
+            <a:ext cx="64008" cy="579990"/>
+          </a:xfrm>
+          <a:prstGeom prst="rect">
+            <a:avLst/>
           </a:prstGeom>
           <a:solidFill>
             <a:srgbClr val="4F46E5"/>
@@ -11771,14 +11911,14 @@
       </p:sp>
       <p:sp>
         <p:nvSpPr>
-          <p:cNvPr id="32" name="TextBox 31"/>
+          <p:cNvPr id="38" name="TextBox 37"/>
           <p:cNvSpPr txBox="1"/>
           <p:nvPr/>
         </p:nvSpPr>
         <p:spPr>
           <a:xfrm>
-            <a:off x="914400" y="5788152"/>
-            <a:ext cx="2377440" cy="621792"/>
+            <a:off x="694944" y="6040265"/>
+            <a:ext cx="2286000" cy="653142"/>
           </a:xfrm>
           <a:prstGeom prst="rect">
             <a:avLst/>
@@ -11786,7 +11926,7 @@
           <a:noFill/>
         </p:spPr>
         <p:txBody>
-          <a:bodyPr wrap="square" anchor="ctr" lIns="0" rIns="0" tIns="0" bIns="0">
+          <a:bodyPr wrap="square" anchor="ctr" lIns="0" rIns="50800" tIns="0" bIns="0">
             <a:spAutoFit/>
           </a:bodyPr>
           <a:lstStyle/>
@@ -11796,7 +11936,7 @@
                 <a:solidFill>
                   <a:srgbClr val="4338CA"/>
                 </a:solidFill>
-                <a:latin typeface="Arial"/>
+                <a:latin typeface="Calibri"/>
               </a:rPr>
               <a:t>7. Sérialisation</a:t>
             </a:r>
@@ -11805,14 +11945,58 @@
       </p:sp>
       <p:sp>
         <p:nvSpPr>
-          <p:cNvPr id="33" name="TextBox 32"/>
+          <p:cNvPr id="39" name="Rectangle 38"/>
+          <p:cNvSpPr/>
+          <p:nvPr/>
+        </p:nvSpPr>
+        <p:spPr>
+          <a:xfrm>
+            <a:off x="3072384" y="6138236"/>
+            <a:ext cx="12700" cy="457200"/>
+          </a:xfrm>
+          <a:prstGeom prst="rect">
+            <a:avLst/>
+          </a:prstGeom>
+          <a:solidFill>
+            <a:srgbClr val="E2E8F0"/>
+          </a:solidFill>
+          <a:ln>
+            <a:noFill/>
+          </a:ln>
+          <a:effectLst/>
+        </p:spPr>
+        <p:style>
+          <a:lnRef idx="1">
+            <a:schemeClr val="accent1"/>
+          </a:lnRef>
+          <a:fillRef idx="3">
+            <a:schemeClr val="accent1"/>
+          </a:fillRef>
+          <a:effectRef idx="2">
+            <a:schemeClr val="accent1"/>
+          </a:effectRef>
+          <a:fontRef idx="minor">
+            <a:schemeClr val="lt1"/>
+          </a:fontRef>
+        </p:style>
+        <p:txBody>
+          <a:bodyPr rtlCol="0" anchor="ctr"/>
+          <a:lstStyle/>
+          <a:p>
+            <a:pPr algn="ctr"/>
+          </a:p>
+        </p:txBody>
+      </p:sp>
+      <p:sp>
+        <p:nvSpPr>
+          <p:cNvPr id="40" name="TextBox 39"/>
           <p:cNvSpPr txBox="1"/>
           <p:nvPr/>
         </p:nvSpPr>
         <p:spPr>
           <a:xfrm>
-            <a:off x="3383280" y="5788152"/>
-            <a:ext cx="7955279" cy="621792"/>
+            <a:off x="3218688" y="6040265"/>
+            <a:ext cx="8470087" cy="653142"/>
           </a:xfrm>
           <a:prstGeom prst="rect">
             <a:avLst/>
@@ -11820,7 +12004,7 @@
           <a:noFill/>
         </p:spPr>
         <p:txBody>
-          <a:bodyPr wrap="square" anchor="ctr" lIns="0" rIns="0" tIns="0" bIns="0">
+          <a:bodyPr wrap="square" anchor="ctr" lIns="76200" rIns="76200" tIns="0" bIns="0">
             <a:spAutoFit/>
           </a:bodyPr>
           <a:lstStyle/>
@@ -11830,7 +12014,7 @@
                 <a:solidFill>
                   <a:srgbClr val="334155"/>
                 </a:solidFill>
-                <a:latin typeface="Arial"/>
+                <a:latin typeface="Calibri"/>
               </a:rPr>
               <a:t>Réponse JSON → HTTP 200</a:t>
             </a:r>
@@ -11907,8 +12091,8 @@
         </p:nvSpPr>
         <p:spPr>
           <a:xfrm>
-            <a:off x="640080" y="411480"/>
-            <a:ext cx="9601200" cy="731520"/>
+            <a:off x="502920" y="329184"/>
+            <a:ext cx="9722815" cy="713232"/>
           </a:xfrm>
           <a:prstGeom prst="rect">
             <a:avLst/>
@@ -11916,26 +12100,26 @@
           <a:noFill/>
         </p:spPr>
         <p:txBody>
-          <a:bodyPr wrap="square" anchor="t" lIns="0" rIns="0" tIns="0" bIns="0">
+          <a:bodyPr wrap="square" anchor="ctr" lIns="0" rIns="0" tIns="0" bIns="0">
             <a:spAutoFit/>
           </a:bodyPr>
           <a:lstStyle/>
           <a:p>
             <a:r>
-              <a:rPr sz="2800" b="1" i="0">
+              <a:rPr sz="2600" b="1" i="0">
                 <a:solidFill>
                   <a:srgbClr val="4338CA"/>
                 </a:solidFill>
-                <a:latin typeface="Arial"/>
+                <a:latin typeface="Calibri"/>
               </a:rPr>
               <a:t>Déploiement sur </a:t>
             </a:r>
             <a:r>
-              <a:rPr sz="2800" b="1" i="0">
+              <a:rPr sz="2600" b="1" i="0">
                 <a:solidFill>
                   <a:srgbClr val="4F46E5"/>
                 </a:solidFill>
-                <a:latin typeface="Arial"/>
+                <a:latin typeface="Calibri"/>
               </a:rPr>
               <a:t>Google Colab</a:t>
             </a:r>
@@ -11950,8 +12134,8 @@
         </p:nvSpPr>
         <p:spPr>
           <a:xfrm>
-            <a:off x="10424160" y="502920"/>
-            <a:ext cx="1188720" cy="457200"/>
+            <a:off x="10408615" y="329184"/>
+            <a:ext cx="1280160" cy="713232"/>
           </a:xfrm>
           <a:prstGeom prst="rect">
             <a:avLst/>
@@ -11959,14 +12143,14 @@
           <a:noFill/>
         </p:spPr>
         <p:txBody>
-          <a:bodyPr wrap="square" anchor="t" lIns="0" rIns="0" tIns="0" bIns="0">
+          <a:bodyPr wrap="square" anchor="ctr" lIns="0" rIns="0" tIns="0" bIns="0">
             <a:spAutoFit/>
           </a:bodyPr>
           <a:lstStyle/>
           <a:p>
             <a:pPr algn="r"/>
             <a:r>
-              <a:rPr sz="1200" b="0" i="0">
+              <a:rPr sz="1100" b="0" i="0">
                 <a:solidFill>
                   <a:srgbClr val="94A3B8"/>
                 </a:solidFill>
@@ -11985,8 +12169,8 @@
         </p:nvSpPr>
         <p:spPr>
           <a:xfrm>
-            <a:off x="640080" y="1207008"/>
-            <a:ext cx="10908792" cy="31750"/>
+            <a:off x="502920" y="1143000"/>
+            <a:ext cx="11185855" cy="31750"/>
           </a:xfrm>
           <a:prstGeom prst="rect">
             <a:avLst/>
@@ -12029,8 +12213,8 @@
         </p:nvSpPr>
         <p:spPr>
           <a:xfrm>
-            <a:off x="640080" y="1554480"/>
-            <a:ext cx="5486400" cy="4572000"/>
+            <a:off x="502920" y="1353312"/>
+            <a:ext cx="5425139" cy="5340096"/>
           </a:xfrm>
           <a:prstGeom prst="rect">
             <a:avLst/>
@@ -12038,22 +12222,22 @@
           <a:noFill/>
         </p:spPr>
         <p:txBody>
-          <a:bodyPr wrap="square" anchor="t" lIns="0" rIns="0" tIns="0" bIns="0">
+          <a:bodyPr wrap="square" anchor="t" lIns="25400" rIns="25400" tIns="25400" bIns="25400">
             <a:spAutoFit/>
           </a:bodyPr>
           <a:lstStyle/>
           <a:p>
             <a:pPr>
               <a:spcAft>
-                <a:spcPts val="800"/>
+                <a:spcPts val="1000"/>
               </a:spcAft>
             </a:pPr>
             <a:r>
-              <a:rPr sz="1600" b="1" i="0">
+              <a:rPr sz="1500" b="1" i="0">
                 <a:solidFill>
                   <a:srgbClr val="4338CA"/>
                 </a:solidFill>
-                <a:latin typeface="Arial"/>
+                <a:latin typeface="Calibri"/>
               </a:rPr>
               <a:t>Mise en service</a:t>
             </a:r>
@@ -12069,18 +12253,18 @@
                 <a:solidFill>
                   <a:srgbClr val="4F46E5"/>
                 </a:solidFill>
-                <a:latin typeface="Arial"/>
-              </a:rPr>
-              <a:t>•  </a:t>
+                <a:latin typeface="Calibri"/>
+              </a:rPr>
+              <a:t>·  </a:t>
             </a:r>
             <a:r>
               <a:rPr sz="1300" b="0" i="0">
                 <a:solidFill>
                   <a:srgbClr val="334155"/>
                 </a:solidFill>
-                <a:latin typeface="Arial"/>
-              </a:rPr>
-              <a:t>GPU NVIDIA A100 — modèle en float16 complet (~16 Go)</a:t>
+                <a:latin typeface="Calibri"/>
+              </a:rPr>
+              <a:t>GPU NVIDIA A100 — modèle float16 complet (~16 Go)</a:t>
             </a:r>
           </a:p>
           <a:p>
@@ -12094,16 +12278,16 @@
                 <a:solidFill>
                   <a:srgbClr val="4F46E5"/>
                 </a:solidFill>
-                <a:latin typeface="Arial"/>
-              </a:rPr>
-              <a:t>•  </a:t>
+                <a:latin typeface="Calibri"/>
+              </a:rPr>
+              <a:t>·  </a:t>
             </a:r>
             <a:r>
               <a:rPr sz="1300" b="0" i="0">
                 <a:solidFill>
                   <a:srgbClr val="334155"/>
                 </a:solidFill>
-                <a:latin typeface="Arial"/>
+                <a:latin typeface="Calibri"/>
               </a:rPr>
               <a:t>Clonage du dépôt GitHub dans l'environnement Colab</a:t>
             </a:r>
@@ -12119,16 +12303,16 @@
                 <a:solidFill>
                   <a:srgbClr val="4F46E5"/>
                 </a:solidFill>
-                <a:latin typeface="Arial"/>
-              </a:rPr>
-              <a:t>•  </a:t>
+                <a:latin typeface="Calibri"/>
+              </a:rPr>
+              <a:t>·  </a:t>
             </a:r>
             <a:r>
               <a:rPr sz="1300" b="0" i="0">
                 <a:solidFill>
                   <a:srgbClr val="334155"/>
                 </a:solidFill>
-                <a:latin typeface="Arial"/>
+                <a:latin typeface="Calibri"/>
               </a:rPr>
               <a:t>Serveur uvicorn lancé sur le port 8000</a:t>
             </a:r>
@@ -12144,16 +12328,16 @@
                 <a:solidFill>
                   <a:srgbClr val="4F46E5"/>
                 </a:solidFill>
-                <a:latin typeface="Arial"/>
-              </a:rPr>
-              <a:t>•  </a:t>
+                <a:latin typeface="Calibri"/>
+              </a:rPr>
+              <a:t>·  </a:t>
             </a:r>
             <a:r>
               <a:rPr sz="1300" b="0" i="0">
                 <a:solidFill>
                   <a:srgbClr val="334155"/>
                 </a:solidFill>
-                <a:latin typeface="Arial"/>
+                <a:latin typeface="Calibri"/>
               </a:rPr>
               <a:t>Tunnel public cloudflared → URL trycloudflare.com</a:t>
             </a:r>
@@ -12169,16 +12353,16 @@
                 <a:solidFill>
                   <a:srgbClr val="4F46E5"/>
                 </a:solidFill>
-                <a:latin typeface="Arial"/>
-              </a:rPr>
-              <a:t>•  </a:t>
+                <a:latin typeface="Calibri"/>
+              </a:rPr>
+              <a:t>·  </a:t>
             </a:r>
             <a:r>
               <a:rPr sz="1300" b="0" i="0">
                 <a:solidFill>
                   <a:srgbClr val="334155"/>
                 </a:solidFill>
-                <a:latin typeface="Arial"/>
+                <a:latin typeface="Calibri"/>
               </a:rPr>
               <a:t>UI et API servies sur la même origine : une seule URL</a:t>
             </a:r>
@@ -12193,8 +12377,8 @@
         </p:nvSpPr>
         <p:spPr>
           <a:xfrm>
-            <a:off x="6400800" y="1554480"/>
-            <a:ext cx="5120640" cy="365760"/>
+            <a:off x="6056075" y="1353312"/>
+            <a:ext cx="5632699" cy="347472"/>
           </a:xfrm>
           <a:prstGeom prst="rect">
             <a:avLst/>
@@ -12208,11 +12392,11 @@
           <a:lstStyle/>
           <a:p>
             <a:r>
-              <a:rPr sz="1600" b="1" i="0">
+              <a:rPr sz="1500" b="1" i="0">
                 <a:solidFill>
                   <a:srgbClr val="4338CA"/>
                 </a:solidFill>
-                <a:latin typeface="Arial"/>
+                <a:latin typeface="Calibri"/>
               </a:rPr>
               <a:t>Flux de déploiement</a:t>
             </a:r>
@@ -12227,18 +12411,18 @@
         </p:nvSpPr>
         <p:spPr>
           <a:xfrm>
-            <a:off x="6400800" y="2011680"/>
-            <a:ext cx="5120640" cy="2011680"/>
+            <a:off x="6056075" y="1755648"/>
+            <a:ext cx="5632699" cy="2011680"/>
           </a:xfrm>
           <a:prstGeom prst="roundRect">
             <a:avLst>
-              <a:gd name="adj" fmla="val 6000"/>
+              <a:gd name="adj" fmla="val 5000"/>
             </a:avLst>
           </a:prstGeom>
           <a:solidFill>
             <a:srgbClr val="F8FAFC"/>
           </a:solidFill>
-          <a:ln w="12700">
+          <a:ln w="9525">
             <a:solidFill>
               <a:srgbClr val="E2E8F0"/>
             </a:solidFill>
@@ -12269,19 +12453,17 @@
       </p:sp>
       <p:sp>
         <p:nvSpPr>
-          <p:cNvPr id="9" name="Rounded Rectangle 8"/>
+          <p:cNvPr id="9" name="Rectangle 8"/>
           <p:cNvSpPr/>
           <p:nvPr/>
         </p:nvSpPr>
         <p:spPr>
           <a:xfrm>
-            <a:off x="6400800" y="2011680"/>
-            <a:ext cx="64008" cy="2011680"/>
-          </a:xfrm>
-          <a:prstGeom prst="roundRect">
-            <a:avLst>
-              <a:gd name="adj" fmla="val 50000"/>
-            </a:avLst>
+            <a:off x="6056075" y="1792224"/>
+            <a:ext cx="64008" cy="1938528"/>
+          </a:xfrm>
+          <a:prstGeom prst="rect">
+            <a:avLst/>
           </a:prstGeom>
           <a:solidFill>
             <a:srgbClr val="4F46E5"/>
@@ -12321,8 +12503,8 @@
         </p:nvSpPr>
         <p:spPr>
           <a:xfrm>
-            <a:off x="6675120" y="2212848"/>
-            <a:ext cx="4663440" cy="1645920"/>
+            <a:off x="6248099" y="1755648"/>
+            <a:ext cx="5367523" cy="2011680"/>
           </a:xfrm>
           <a:prstGeom prst="rect">
             <a:avLst/>
@@ -12330,10 +12512,253 @@
           <a:noFill/>
         </p:spPr>
         <p:txBody>
-          <a:bodyPr wrap="square" anchor="t" lIns="0" rIns="0" tIns="0" bIns="0">
+          <a:bodyPr wrap="square" anchor="ctr" lIns="50800" rIns="50800" tIns="101600" bIns="101600">
             <a:spAutoFit/>
           </a:bodyPr>
           <a:lstStyle/>
+          <a:p>
+            <a:pPr>
+              <a:spcAft>
+                <a:spcPts val="100"/>
+              </a:spcAft>
+            </a:pPr>
+            <a:r>
+              <a:rPr sz="1200" b="0" i="0">
+                <a:solidFill>
+                  <a:srgbClr val="334155"/>
+                </a:solidFill>
+                <a:latin typeface="Consolas"/>
+              </a:rPr>
+              <a:t>GPU Colab A100</a:t>
+            </a:r>
+          </a:p>
+          <a:p>
+            <a:pPr>
+              <a:spcAft>
+                <a:spcPts val="100"/>
+              </a:spcAft>
+            </a:pPr>
+            <a:r>
+              <a:rPr sz="1200" b="0" i="0">
+                <a:solidFill>
+                  <a:srgbClr val="334155"/>
+                </a:solidFill>
+                <a:latin typeface="Consolas"/>
+              </a:rPr>
+              <a:t>      |</a:t>
+            </a:r>
+          </a:p>
+          <a:p>
+            <a:pPr>
+              <a:spcAft>
+                <a:spcPts val="100"/>
+              </a:spcAft>
+            </a:pPr>
+            <a:r>
+              <a:rPr sz="1200" b="0" i="0">
+                <a:solidFill>
+                  <a:srgbClr val="334155"/>
+                </a:solidFill>
+                <a:latin typeface="Consolas"/>
+              </a:rPr>
+              <a:t>  uvicorn : 8000</a:t>
+            </a:r>
+          </a:p>
+          <a:p>
+            <a:pPr>
+              <a:spcAft>
+                <a:spcPts val="100"/>
+              </a:spcAft>
+            </a:pPr>
+            <a:r>
+              <a:rPr sz="1200" b="0" i="0">
+                <a:solidFill>
+                  <a:srgbClr val="334155"/>
+                </a:solidFill>
+                <a:latin typeface="Consolas"/>
+              </a:rPr>
+              <a:t>      |</a:t>
+            </a:r>
+          </a:p>
+          <a:p>
+            <a:pPr>
+              <a:spcAft>
+                <a:spcPts val="100"/>
+              </a:spcAft>
+            </a:pPr>
+            <a:r>
+              <a:rPr sz="1200" b="0" i="0">
+                <a:solidFill>
+                  <a:srgbClr val="334155"/>
+                </a:solidFill>
+                <a:latin typeface="Consolas"/>
+              </a:rPr>
+              <a:t>  cloudflared (tunnel)</a:t>
+            </a:r>
+          </a:p>
+          <a:p>
+            <a:pPr>
+              <a:spcAft>
+                <a:spcPts val="100"/>
+              </a:spcAft>
+            </a:pPr>
+            <a:r>
+              <a:rPr sz="1200" b="0" i="0">
+                <a:solidFill>
+                  <a:srgbClr val="334155"/>
+                </a:solidFill>
+                <a:latin typeface="Consolas"/>
+              </a:rPr>
+              <a:t>      |</a:t>
+            </a:r>
+          </a:p>
+          <a:p>
+            <a:pPr>
+              <a:spcAft>
+                <a:spcPts val="100"/>
+              </a:spcAft>
+            </a:pPr>
+            <a:r>
+              <a:rPr sz="1200" b="0" i="0">
+                <a:solidFill>
+                  <a:srgbClr val="334155"/>
+                </a:solidFill>
+                <a:latin typeface="Consolas"/>
+              </a:rPr>
+              <a:t>  URL publique → navigateur</a:t>
+            </a:r>
+          </a:p>
+        </p:txBody>
+      </p:sp>
+      <p:sp>
+        <p:nvSpPr>
+          <p:cNvPr id="11" name="Rounded Rectangle 10"/>
+          <p:cNvSpPr/>
+          <p:nvPr/>
+        </p:nvSpPr>
+        <p:spPr>
+          <a:xfrm>
+            <a:off x="6056075" y="3895344"/>
+            <a:ext cx="5632699" cy="2798064"/>
+          </a:xfrm>
+          <a:prstGeom prst="roundRect">
+            <a:avLst>
+              <a:gd name="adj" fmla="val 5000"/>
+            </a:avLst>
+          </a:prstGeom>
+          <a:solidFill>
+            <a:srgbClr val="F8FAFC"/>
+          </a:solidFill>
+          <a:ln w="9525">
+            <a:solidFill>
+              <a:srgbClr val="E2E8F0"/>
+            </a:solidFill>
+          </a:ln>
+          <a:effectLst/>
+        </p:spPr>
+        <p:style>
+          <a:lnRef idx="1">
+            <a:schemeClr val="accent1"/>
+          </a:lnRef>
+          <a:fillRef idx="3">
+            <a:schemeClr val="accent1"/>
+          </a:fillRef>
+          <a:effectRef idx="2">
+            <a:schemeClr val="accent1"/>
+          </a:effectRef>
+          <a:fontRef idx="minor">
+            <a:schemeClr val="lt1"/>
+          </a:fontRef>
+        </p:style>
+        <p:txBody>
+          <a:bodyPr rtlCol="0" anchor="ctr"/>
+          <a:lstStyle/>
+          <a:p>
+            <a:pPr algn="ctr"/>
+          </a:p>
+        </p:txBody>
+      </p:sp>
+      <p:sp>
+        <p:nvSpPr>
+          <p:cNvPr id="12" name="Rectangle 11"/>
+          <p:cNvSpPr/>
+          <p:nvPr/>
+        </p:nvSpPr>
+        <p:spPr>
+          <a:xfrm>
+            <a:off x="6056075" y="3931920"/>
+            <a:ext cx="64008" cy="2724912"/>
+          </a:xfrm>
+          <a:prstGeom prst="rect">
+            <a:avLst/>
+          </a:prstGeom>
+          <a:solidFill>
+            <a:srgbClr val="059669"/>
+          </a:solidFill>
+          <a:ln>
+            <a:noFill/>
+          </a:ln>
+          <a:effectLst/>
+        </p:spPr>
+        <p:style>
+          <a:lnRef idx="1">
+            <a:schemeClr val="accent1"/>
+          </a:lnRef>
+          <a:fillRef idx="3">
+            <a:schemeClr val="accent1"/>
+          </a:fillRef>
+          <a:effectRef idx="2">
+            <a:schemeClr val="accent1"/>
+          </a:effectRef>
+          <a:fontRef idx="minor">
+            <a:schemeClr val="lt1"/>
+          </a:fontRef>
+        </p:style>
+        <p:txBody>
+          <a:bodyPr rtlCol="0" anchor="ctr"/>
+          <a:lstStyle/>
+          <a:p>
+            <a:pPr algn="ctr"/>
+          </a:p>
+        </p:txBody>
+      </p:sp>
+      <p:sp>
+        <p:nvSpPr>
+          <p:cNvPr id="13" name="TextBox 12"/>
+          <p:cNvSpPr txBox="1"/>
+          <p:nvPr/>
+        </p:nvSpPr>
+        <p:spPr>
+          <a:xfrm>
+            <a:off x="6248099" y="3895344"/>
+            <a:ext cx="5367523" cy="2798064"/>
+          </a:xfrm>
+          <a:prstGeom prst="rect">
+            <a:avLst/>
+          </a:prstGeom>
+          <a:noFill/>
+        </p:spPr>
+        <p:txBody>
+          <a:bodyPr wrap="square" anchor="ctr" lIns="50800" rIns="50800" tIns="76200" bIns="76200">
+            <a:spAutoFit/>
+          </a:bodyPr>
+          <a:lstStyle/>
+          <a:p>
+            <a:pPr>
+              <a:spcAft>
+                <a:spcPts val="500"/>
+              </a:spcAft>
+            </a:pPr>
+            <a:r>
+              <a:rPr sz="1400" b="1" i="0">
+                <a:solidFill>
+                  <a:srgbClr val="0F172A"/>
+                </a:solidFill>
+                <a:latin typeface="Calibri"/>
+              </a:rPr>
+              <a:t>Quantification optionnelle</a:t>
+            </a:r>
+          </a:p>
           <a:p>
             <a:pPr>
               <a:spcAft>
@@ -12341,13 +12766,13 @@
               </a:spcAft>
             </a:pPr>
             <a:r>
-              <a:rPr sz="1200" b="0" i="0">
+              <a:rPr sz="1100" b="0" i="0">
                 <a:solidFill>
                   <a:srgbClr val="334155"/>
                 </a:solidFill>
-                <a:latin typeface="Consolas"/>
-              </a:rPr>
-              <a:t>GPU Colab A100</a:t>
+                <a:latin typeface="Calibri"/>
+              </a:rPr>
+              <a:t>· 4 ou 8 bits via bitsandbytes</a:t>
             </a:r>
           </a:p>
           <a:p>
@@ -12357,13 +12782,13 @@
               </a:spcAft>
             </a:pPr>
             <a:r>
-              <a:rPr sz="1200" b="0" i="0">
+              <a:rPr sz="1100" b="0" i="0">
                 <a:solidFill>
                   <a:srgbClr val="334155"/>
                 </a:solidFill>
-                <a:latin typeface="Consolas"/>
-              </a:rPr>
-              <a:t>      |</a:t>
+                <a:latin typeface="Calibri"/>
+              </a:rPr>
+              <a:t>· Variables : LOAD_IN_4BIT / LOAD_IN_8BIT</a:t>
             </a:r>
           </a:p>
           <a:p>
@@ -12373,242 +12798,13 @@
               </a:spcAft>
             </a:pPr>
             <a:r>
-              <a:rPr sz="1200" b="0" i="0">
+              <a:rPr sz="1100" b="0" i="0">
                 <a:solidFill>
                   <a:srgbClr val="334155"/>
                 </a:solidFill>
-                <a:latin typeface="Consolas"/>
-              </a:rPr>
-              <a:t>  uvicorn : 8000</a:t>
-            </a:r>
-          </a:p>
-          <a:p>
-            <a:pPr>
-              <a:spcAft>
-                <a:spcPts val="200"/>
-              </a:spcAft>
-            </a:pPr>
-            <a:r>
-              <a:rPr sz="1200" b="0" i="0">
-                <a:solidFill>
-                  <a:srgbClr val="334155"/>
-                </a:solidFill>
-                <a:latin typeface="Consolas"/>
-              </a:rPr>
-              <a:t>      |</a:t>
-            </a:r>
-          </a:p>
-          <a:p>
-            <a:pPr>
-              <a:spcAft>
-                <a:spcPts val="200"/>
-              </a:spcAft>
-            </a:pPr>
-            <a:r>
-              <a:rPr sz="1200" b="0" i="0">
-                <a:solidFill>
-                  <a:srgbClr val="334155"/>
-                </a:solidFill>
-                <a:latin typeface="Consolas"/>
-              </a:rPr>
-              <a:t>  cloudflared (tunnel)</a:t>
-            </a:r>
-          </a:p>
-          <a:p>
-            <a:pPr>
-              <a:spcAft>
-                <a:spcPts val="200"/>
-              </a:spcAft>
-            </a:pPr>
-            <a:r>
-              <a:rPr sz="1200" b="0" i="0">
-                <a:solidFill>
-                  <a:srgbClr val="334155"/>
-                </a:solidFill>
-                <a:latin typeface="Consolas"/>
-              </a:rPr>
-              <a:t>      |</a:t>
-            </a:r>
-          </a:p>
-          <a:p>
-            <a:pPr>
-              <a:spcAft>
-                <a:spcPts val="200"/>
-              </a:spcAft>
-            </a:pPr>
-            <a:r>
-              <a:rPr sz="1200" b="0" i="0">
-                <a:solidFill>
-                  <a:srgbClr val="334155"/>
-                </a:solidFill>
-                <a:latin typeface="Consolas"/>
-              </a:rPr>
-              <a:t>  URL publique -&gt; navigateur</a:t>
-            </a:r>
-          </a:p>
-        </p:txBody>
-      </p:sp>
-      <p:sp>
-        <p:nvSpPr>
-          <p:cNvPr id="11" name="Rounded Rectangle 10"/>
-          <p:cNvSpPr/>
-          <p:nvPr/>
-        </p:nvSpPr>
-        <p:spPr>
-          <a:xfrm>
-            <a:off x="6400800" y="4297680"/>
-            <a:ext cx="5120640" cy="1737360"/>
-          </a:xfrm>
-          <a:prstGeom prst="roundRect">
-            <a:avLst>
-              <a:gd name="adj" fmla="val 6000"/>
-            </a:avLst>
-          </a:prstGeom>
-          <a:solidFill>
-            <a:srgbClr val="F8FAFC"/>
-          </a:solidFill>
-          <a:ln w="12700">
-            <a:solidFill>
-              <a:srgbClr val="E2E8F0"/>
-            </a:solidFill>
-          </a:ln>
-          <a:effectLst/>
-        </p:spPr>
-        <p:style>
-          <a:lnRef idx="1">
-            <a:schemeClr val="accent1"/>
-          </a:lnRef>
-          <a:fillRef idx="3">
-            <a:schemeClr val="accent1"/>
-          </a:fillRef>
-          <a:effectRef idx="2">
-            <a:schemeClr val="accent1"/>
-          </a:effectRef>
-          <a:fontRef idx="minor">
-            <a:schemeClr val="lt1"/>
-          </a:fontRef>
-        </p:style>
-        <p:txBody>
-          <a:bodyPr rtlCol="0" anchor="ctr"/>
-          <a:lstStyle/>
-          <a:p>
-            <a:pPr algn="ctr"/>
-          </a:p>
-        </p:txBody>
-      </p:sp>
-      <p:sp>
-        <p:nvSpPr>
-          <p:cNvPr id="12" name="Rounded Rectangle 11"/>
-          <p:cNvSpPr/>
-          <p:nvPr/>
-        </p:nvSpPr>
-        <p:spPr>
-          <a:xfrm>
-            <a:off x="6400800" y="4297680"/>
-            <a:ext cx="64008" cy="1737360"/>
-          </a:xfrm>
-          <a:prstGeom prst="roundRect">
-            <a:avLst>
-              <a:gd name="adj" fmla="val 50000"/>
-            </a:avLst>
-          </a:prstGeom>
-          <a:solidFill>
-            <a:srgbClr val="059669"/>
-          </a:solidFill>
-          <a:ln>
-            <a:noFill/>
-          </a:ln>
-          <a:effectLst/>
-        </p:spPr>
-        <p:style>
-          <a:lnRef idx="1">
-            <a:schemeClr val="accent1"/>
-          </a:lnRef>
-          <a:fillRef idx="3">
-            <a:schemeClr val="accent1"/>
-          </a:fillRef>
-          <a:effectRef idx="2">
-            <a:schemeClr val="accent1"/>
-          </a:effectRef>
-          <a:fontRef idx="minor">
-            <a:schemeClr val="lt1"/>
-          </a:fontRef>
-        </p:style>
-        <p:txBody>
-          <a:bodyPr rtlCol="0" anchor="ctr"/>
-          <a:lstStyle/>
-          <a:p>
-            <a:pPr algn="ctr"/>
-          </a:p>
-        </p:txBody>
-      </p:sp>
-      <p:sp>
-        <p:nvSpPr>
-          <p:cNvPr id="13" name="TextBox 12"/>
-          <p:cNvSpPr txBox="1"/>
-          <p:nvPr/>
-        </p:nvSpPr>
-        <p:spPr>
-          <a:xfrm>
-            <a:off x="6656832" y="4480560"/>
-            <a:ext cx="4709159" cy="1417319"/>
-          </a:xfrm>
-          <a:prstGeom prst="rect">
-            <a:avLst/>
-          </a:prstGeom>
-          <a:noFill/>
-        </p:spPr>
-        <p:txBody>
-          <a:bodyPr wrap="square" anchor="t" lIns="0" rIns="0" tIns="0" bIns="0">
-            <a:spAutoFit/>
-          </a:bodyPr>
-          <a:lstStyle/>
-          <a:p>
-            <a:pPr>
-              <a:spcAft>
-                <a:spcPts val="600"/>
-              </a:spcAft>
-            </a:pPr>
-            <a:r>
-              <a:rPr sz="1500" b="1" i="0">
-                <a:solidFill>
-                  <a:srgbClr val="0F172A"/>
-                </a:solidFill>
-                <a:latin typeface="Arial"/>
-              </a:rPr>
-              <a:t>Quantification optionnelle</a:t>
-            </a:r>
-          </a:p>
-          <a:p>
-            <a:pPr>
-              <a:spcAft>
-                <a:spcPts val="300"/>
-              </a:spcAft>
-            </a:pPr>
-            <a:r>
-              <a:rPr sz="1200" b="0" i="0">
-                <a:solidFill>
-                  <a:srgbClr val="334155"/>
-                </a:solidFill>
-                <a:latin typeface="Arial"/>
-              </a:rPr>
-              <a:t>4 ou 8 bits via bitsandbytes (LOAD_IN_4BIT / 8BIT)</a:t>
-            </a:r>
-          </a:p>
-          <a:p>
-            <a:pPr>
-              <a:spcAft>
-                <a:spcPts val="300"/>
-              </a:spcAft>
-            </a:pPr>
-            <a:r>
-              <a:rPr sz="1200" b="0" i="0">
-                <a:solidFill>
-                  <a:srgbClr val="334155"/>
-                </a:solidFill>
-                <a:latin typeface="Arial"/>
-              </a:rPr>
-              <a:t>Permet d'exécuter le modèle sur des GPU plus modestes (ex. Colab T4 ~15 Go)</a:t>
+                <a:latin typeface="Calibri"/>
+              </a:rPr>
+              <a:t>· Pour les GPU &lt; 16 Go (ex. Colab T4)</a:t>
             </a:r>
           </a:p>
         </p:txBody>
@@ -12683,8 +12879,8 @@
         </p:nvSpPr>
         <p:spPr>
           <a:xfrm>
-            <a:off x="640080" y="411480"/>
-            <a:ext cx="9601200" cy="731520"/>
+            <a:off x="502920" y="329184"/>
+            <a:ext cx="9722815" cy="713232"/>
           </a:xfrm>
           <a:prstGeom prst="rect">
             <a:avLst/>
@@ -12692,17 +12888,17 @@
           <a:noFill/>
         </p:spPr>
         <p:txBody>
-          <a:bodyPr wrap="square" anchor="t" lIns="0" rIns="0" tIns="0" bIns="0">
+          <a:bodyPr wrap="square" anchor="ctr" lIns="0" rIns="0" tIns="0" bIns="0">
             <a:spAutoFit/>
           </a:bodyPr>
           <a:lstStyle/>
           <a:p>
             <a:r>
-              <a:rPr sz="2800" b="1" i="0">
+              <a:rPr sz="2600" b="1" i="0">
                 <a:solidFill>
                   <a:srgbClr val="4338CA"/>
                 </a:solidFill>
-                <a:latin typeface="Arial"/>
+                <a:latin typeface="Calibri"/>
               </a:rPr>
               <a:t>Difficultés &amp; solutions</a:t>
             </a:r>
@@ -12717,8 +12913,8 @@
         </p:nvSpPr>
         <p:spPr>
           <a:xfrm>
-            <a:off x="10424160" y="502920"/>
-            <a:ext cx="1188720" cy="457200"/>
+            <a:off x="10408615" y="329184"/>
+            <a:ext cx="1280160" cy="713232"/>
           </a:xfrm>
           <a:prstGeom prst="rect">
             <a:avLst/>
@@ -12726,14 +12922,14 @@
           <a:noFill/>
         </p:spPr>
         <p:txBody>
-          <a:bodyPr wrap="square" anchor="t" lIns="0" rIns="0" tIns="0" bIns="0">
+          <a:bodyPr wrap="square" anchor="ctr" lIns="0" rIns="0" tIns="0" bIns="0">
             <a:spAutoFit/>
           </a:bodyPr>
           <a:lstStyle/>
           <a:p>
             <a:pPr algn="r"/>
             <a:r>
-              <a:rPr sz="1200" b="0" i="0">
+              <a:rPr sz="1100" b="0" i="0">
                 <a:solidFill>
                   <a:srgbClr val="94A3B8"/>
                 </a:solidFill>
@@ -12752,8 +12948,8 @@
         </p:nvSpPr>
         <p:spPr>
           <a:xfrm>
-            <a:off x="640080" y="1207008"/>
-            <a:ext cx="10908792" cy="31750"/>
+            <a:off x="502920" y="1143000"/>
+            <a:ext cx="11185855" cy="31750"/>
           </a:xfrm>
           <a:prstGeom prst="rect">
             <a:avLst/>
@@ -12796,18 +12992,18 @@
         </p:nvSpPr>
         <p:spPr>
           <a:xfrm>
-            <a:off x="640080" y="1554480"/>
-            <a:ext cx="10908792" cy="1417320"/>
+            <a:off x="502920" y="1353312"/>
+            <a:ext cx="11185855" cy="1694688"/>
           </a:xfrm>
           <a:prstGeom prst="roundRect">
             <a:avLst>
-              <a:gd name="adj" fmla="val 6000"/>
+              <a:gd name="adj" fmla="val 5000"/>
             </a:avLst>
           </a:prstGeom>
           <a:solidFill>
             <a:srgbClr val="F8FAFC"/>
           </a:solidFill>
-          <a:ln w="12700">
+          <a:ln w="9525">
             <a:solidFill>
               <a:srgbClr val="E2E8F0"/>
             </a:solidFill>
@@ -12838,19 +13034,17 @@
       </p:sp>
       <p:sp>
         <p:nvSpPr>
-          <p:cNvPr id="7" name="Rounded Rectangle 6"/>
+          <p:cNvPr id="7" name="Rectangle 6"/>
           <p:cNvSpPr/>
           <p:nvPr/>
         </p:nvSpPr>
         <p:spPr>
           <a:xfrm>
-            <a:off x="640080" y="1554480"/>
-            <a:ext cx="64008" cy="1417320"/>
-          </a:xfrm>
-          <a:prstGeom prst="roundRect">
-            <a:avLst>
-              <a:gd name="adj" fmla="val 50000"/>
-            </a:avLst>
+            <a:off x="502920" y="1389888"/>
+            <a:ext cx="64008" cy="1621536"/>
+          </a:xfrm>
+          <a:prstGeom prst="rect">
+            <a:avLst/>
           </a:prstGeom>
           <a:solidFill>
             <a:srgbClr val="4F46E5"/>
@@ -12890,8 +13084,8 @@
         </p:nvSpPr>
         <p:spPr>
           <a:xfrm>
-            <a:off x="914400" y="1719072"/>
-            <a:ext cx="10424160" cy="1143000"/>
+            <a:off x="694944" y="1353312"/>
+            <a:ext cx="10920679" cy="1694688"/>
           </a:xfrm>
           <a:prstGeom prst="rect">
             <a:avLst/>
@@ -12899,14 +13093,14 @@
           <a:noFill/>
         </p:spPr>
         <p:txBody>
-          <a:bodyPr wrap="square" anchor="t" lIns="0" rIns="0" tIns="0" bIns="0">
+          <a:bodyPr wrap="square" anchor="t" lIns="50800" rIns="76200" tIns="152400" bIns="101600">
             <a:spAutoFit/>
           </a:bodyPr>
           <a:lstStyle/>
           <a:p>
             <a:pPr>
               <a:spcAft>
-                <a:spcPts val="400"/>
+                <a:spcPts val="600"/>
               </a:spcAft>
             </a:pPr>
             <a:r>
@@ -12914,7 +13108,7 @@
                 <a:solidFill>
                   <a:srgbClr val="0F172A"/>
                 </a:solidFill>
-                <a:latin typeface="Arial"/>
+                <a:latin typeface="Calibri"/>
               </a:rPr>
               <a:t>Formats audio hétérogènes</a:t>
             </a:r>
@@ -12925,9 +13119,9 @@
                 <a:solidFill>
                   <a:srgbClr val="334155"/>
                 </a:solidFill>
-                <a:latin typeface="Arial"/>
-              </a:rPr>
-              <a:t>Les navigateurs enregistrent en WebM/Opus, non géré par soundfile. Solution : double décodeur — soundfile, puis librosa + ffmpeg en secours.</a:t>
+                <a:latin typeface="Calibri"/>
+              </a:rPr>
+              <a:t>Les navigateurs enregistrent en WebM/Opus, non géré par soundfile. Solution : double décodeur — soundfile d'abord, puis librosa + ffmpeg en secours.</a:t>
             </a:r>
           </a:p>
         </p:txBody>
@@ -12940,18 +13134,18 @@
         </p:nvSpPr>
         <p:spPr>
           <a:xfrm>
-            <a:off x="640080" y="3081528"/>
-            <a:ext cx="10908792" cy="1417320"/>
+            <a:off x="502920" y="3176016"/>
+            <a:ext cx="11185855" cy="1694688"/>
           </a:xfrm>
           <a:prstGeom prst="roundRect">
             <a:avLst>
-              <a:gd name="adj" fmla="val 6000"/>
+              <a:gd name="adj" fmla="val 5000"/>
             </a:avLst>
           </a:prstGeom>
           <a:solidFill>
             <a:srgbClr val="F8FAFC"/>
           </a:solidFill>
-          <a:ln w="12700">
+          <a:ln w="9525">
             <a:solidFill>
               <a:srgbClr val="E2E8F0"/>
             </a:solidFill>
@@ -12982,19 +13176,17 @@
       </p:sp>
       <p:sp>
         <p:nvSpPr>
-          <p:cNvPr id="10" name="Rounded Rectangle 9"/>
+          <p:cNvPr id="10" name="Rectangle 9"/>
           <p:cNvSpPr/>
           <p:nvPr/>
         </p:nvSpPr>
         <p:spPr>
           <a:xfrm>
-            <a:off x="640080" y="3081528"/>
-            <a:ext cx="64008" cy="1417320"/>
-          </a:xfrm>
-          <a:prstGeom prst="roundRect">
-            <a:avLst>
-              <a:gd name="adj" fmla="val 50000"/>
-            </a:avLst>
+            <a:off x="502920" y="3212592"/>
+            <a:ext cx="64008" cy="1621536"/>
+          </a:xfrm>
+          <a:prstGeom prst="rect">
+            <a:avLst/>
           </a:prstGeom>
           <a:solidFill>
             <a:srgbClr val="4F46E5"/>
@@ -13034,8 +13226,8 @@
         </p:nvSpPr>
         <p:spPr>
           <a:xfrm>
-            <a:off x="914400" y="3246120"/>
-            <a:ext cx="10424160" cy="1143000"/>
+            <a:off x="694944" y="3176016"/>
+            <a:ext cx="10920679" cy="1694688"/>
           </a:xfrm>
           <a:prstGeom prst="rect">
             <a:avLst/>
@@ -13043,14 +13235,14 @@
           <a:noFill/>
         </p:spPr>
         <p:txBody>
-          <a:bodyPr wrap="square" anchor="t" lIns="0" rIns="0" tIns="0" bIns="0">
+          <a:bodyPr wrap="square" anchor="t" lIns="50800" rIns="76200" tIns="152400" bIns="101600">
             <a:spAutoFit/>
           </a:bodyPr>
           <a:lstStyle/>
           <a:p>
             <a:pPr>
               <a:spcAft>
-                <a:spcPts val="400"/>
+                <a:spcPts val="600"/>
               </a:spcAft>
             </a:pPr>
             <a:r>
@@ -13058,7 +13250,7 @@
                 <a:solidFill>
                   <a:srgbClr val="0F172A"/>
                 </a:solidFill>
-                <a:latin typeface="Arial"/>
+                <a:latin typeface="Calibri"/>
               </a:rPr>
               <a:t>Audio non transmis au modèle</a:t>
             </a:r>
@@ -13069,9 +13261,9 @@
                 <a:solidFill>
                   <a:srgbClr val="334155"/>
                 </a:solidFill>
-                <a:latin typeface="Arial"/>
-              </a:rPr>
-              <a:t>Le modèle répondait « je ne peux pas accéder à l'audio », sans erreur. Cause : l'argument du processeur a été renommé selon la version de transformers (audios → audio) et était ignoré silencieusement. Solution : essayer les deux noms, vérifier la présence de input_features (échec explicite sinon) et aligner le type (float16).</a:t>
+                <a:latin typeface="Calibri"/>
+              </a:rPr>
+              <a:t>Le modèle répondait « je ne peux pas accéder à l'audio » sans erreur visible. Cause : l'argument du processeur a été renommé selon la version de transformers (audios → audio) et était silencieusement ignoré. Solution : essayer les deux noms, vérifier input_features (erreur explicite sinon) et aligner le dtype audio en float16.</a:t>
             </a:r>
           </a:p>
         </p:txBody>
@@ -13084,18 +13276,18 @@
         </p:nvSpPr>
         <p:spPr>
           <a:xfrm>
-            <a:off x="640080" y="4608576"/>
-            <a:ext cx="10908792" cy="1417320"/>
+            <a:off x="502920" y="4998720"/>
+            <a:ext cx="11185855" cy="1694688"/>
           </a:xfrm>
           <a:prstGeom prst="roundRect">
             <a:avLst>
-              <a:gd name="adj" fmla="val 6000"/>
+              <a:gd name="adj" fmla="val 5000"/>
             </a:avLst>
           </a:prstGeom>
           <a:solidFill>
             <a:srgbClr val="F8FAFC"/>
           </a:solidFill>
-          <a:ln w="12700">
+          <a:ln w="9525">
             <a:solidFill>
               <a:srgbClr val="E2E8F0"/>
             </a:solidFill>
@@ -13126,19 +13318,17 @@
       </p:sp>
       <p:sp>
         <p:nvSpPr>
-          <p:cNvPr id="13" name="Rounded Rectangle 12"/>
+          <p:cNvPr id="13" name="Rectangle 12"/>
           <p:cNvSpPr/>
           <p:nvPr/>
         </p:nvSpPr>
         <p:spPr>
           <a:xfrm>
-            <a:off x="640080" y="4608576"/>
-            <a:ext cx="64008" cy="1417320"/>
-          </a:xfrm>
-          <a:prstGeom prst="roundRect">
-            <a:avLst>
-              <a:gd name="adj" fmla="val 50000"/>
-            </a:avLst>
+            <a:off x="502920" y="5035296"/>
+            <a:ext cx="64008" cy="1621536"/>
+          </a:xfrm>
+          <a:prstGeom prst="rect">
+            <a:avLst/>
           </a:prstGeom>
           <a:solidFill>
             <a:srgbClr val="4F46E5"/>
@@ -13178,8 +13368,8 @@
         </p:nvSpPr>
         <p:spPr>
           <a:xfrm>
-            <a:off x="914400" y="4773168"/>
-            <a:ext cx="10424160" cy="1143000"/>
+            <a:off x="694944" y="4998720"/>
+            <a:ext cx="10920679" cy="1694688"/>
           </a:xfrm>
           <a:prstGeom prst="rect">
             <a:avLst/>
@@ -13187,14 +13377,14 @@
           <a:noFill/>
         </p:spPr>
         <p:txBody>
-          <a:bodyPr wrap="square" anchor="t" lIns="0" rIns="0" tIns="0" bIns="0">
+          <a:bodyPr wrap="square" anchor="t" lIns="50800" rIns="76200" tIns="152400" bIns="101600">
             <a:spAutoFit/>
           </a:bodyPr>
           <a:lstStyle/>
           <a:p>
             <a:pPr>
               <a:spcAft>
-                <a:spcPts val="400"/>
+                <a:spcPts val="600"/>
               </a:spcAft>
             </a:pPr>
             <a:r>
@@ -13202,7 +13392,7 @@
                 <a:solidFill>
                   <a:srgbClr val="0F172A"/>
                 </a:solidFill>
-                <a:latin typeface="Arial"/>
+                <a:latin typeface="Calibri"/>
               </a:rPr>
               <a:t>Ressources mémoire (~16 Go VRAM)</a:t>
             </a:r>
@@ -13213,9 +13403,9 @@
                 <a:solidFill>
                   <a:srgbClr val="334155"/>
                 </a:solidFill>
-                <a:latin typeface="Arial"/>
-              </a:rPr>
-              <a:t>Le modèle 7B en float16 exige un GPU conséquent. Solution : GPU Colab A100 + option de quantification 4/8 bits pour les cartes plus petites.</a:t>
+                <a:latin typeface="Calibri"/>
+              </a:rPr>
+              <a:t>Le modèle 7B en float16 exige un GPU conséquent. Solution : GPU Colab A100 + quantification 4/8 bits pour les GPU plus modestes.</a:t>
             </a:r>
           </a:p>
         </p:txBody>

--- a/presentation/presentation.pptx
+++ b/presentation/presentation.pptx
@@ -12121,7 +12121,7 @@
                 </a:solidFill>
                 <a:latin typeface="Calibri"/>
               </a:rPr>
-              <a:t>Google Colab</a:t>
+              <a:t>Google Colab T4 + 4-bit</a:t>
             </a:r>
           </a:p>
         </p:txBody>
@@ -12239,7 +12239,7 @@
                 </a:solidFill>
                 <a:latin typeface="Calibri"/>
               </a:rPr>
-              <a:t>Mise en service</a:t>
+              <a:t>Pourquoi la quantification est obligatoire</a:t>
             </a:r>
           </a:p>
           <a:p>
@@ -12264,7 +12264,7 @@
                 </a:solidFill>
                 <a:latin typeface="Calibri"/>
               </a:rPr>
-              <a:t>GPU NVIDIA A100 — modèle float16 complet (~16 Go)</a:t>
+              <a:t>T4 GPU : 15 Go VRAM — modèle fp16 : ~16 Go → dépassement</a:t>
             </a:r>
           </a:p>
           <a:p>
@@ -12289,7 +12289,7 @@
                 </a:solidFill>
                 <a:latin typeface="Calibri"/>
               </a:rPr>
-              <a:t>Clonage du dépôt GitHub dans l'environnement Colab</a:t>
+              <a:t>4-bit NF4 (bitsandbytes) réduit à ~5 Go → compatible T4</a:t>
             </a:r>
           </a:p>
           <a:p>
@@ -12314,7 +12314,7 @@
                 </a:solidFill>
                 <a:latin typeface="Calibri"/>
               </a:rPr>
-              <a:t>Serveur uvicorn lancé sur le port 8000</a:t>
+              <a:t>NF4 conçu pour poids gaussiens → faible perte de qualité</a:t>
             </a:r>
           </a:p>
           <a:p>
@@ -12339,7 +12339,7 @@
                 </a:solidFill>
                 <a:latin typeface="Calibri"/>
               </a:rPr>
-              <a:t>Tunnel public cloudflared → URL trycloudflare.com</a:t>
+              <a:t>Double quantification + compute dtype fp16</a:t>
             </a:r>
           </a:p>
           <a:p>
@@ -12364,7 +12364,7 @@
                 </a:solidFill>
                 <a:latin typeface="Calibri"/>
               </a:rPr>
-              <a:t>UI et API servies sur la même origine : une seule URL</a:t>
+              <a:t>LOAD_IN_4BIT=true activé dans le notebook</a:t>
             </a:r>
           </a:p>
         </p:txBody>
@@ -12398,7 +12398,7 @@
                 </a:solidFill>
                 <a:latin typeface="Calibri"/>
               </a:rPr>
-              <a:t>Flux de déploiement</a:t>
+              <a:t>Empreinte mémoire</a:t>
             </a:r>
           </a:p>
         </p:txBody>
@@ -12412,7 +12412,7 @@
         <p:spPr>
           <a:xfrm>
             <a:off x="6056075" y="1755648"/>
-            <a:ext cx="5632699" cy="2011680"/>
+            <a:ext cx="5632699" cy="1389888"/>
           </a:xfrm>
           <a:prstGeom prst="roundRect">
             <a:avLst>
@@ -12460,7 +12460,7 @@
         <p:spPr>
           <a:xfrm>
             <a:off x="6056075" y="1792224"/>
-            <a:ext cx="64008" cy="1938528"/>
+            <a:ext cx="64008" cy="1316736"/>
           </a:xfrm>
           <a:prstGeom prst="rect">
             <a:avLst/>
@@ -12504,7 +12504,7 @@
         <p:spPr>
           <a:xfrm>
             <a:off x="6248099" y="1755648"/>
-            <a:ext cx="5367523" cy="2011680"/>
+            <a:ext cx="5367523" cy="1389888"/>
           </a:xfrm>
           <a:prstGeom prst="rect">
             <a:avLst/>
@@ -12523,13 +12523,13 @@
               </a:spcAft>
             </a:pPr>
             <a:r>
-              <a:rPr sz="1200" b="0" i="0">
+              <a:rPr sz="1100" b="0" i="0">
                 <a:solidFill>
                   <a:srgbClr val="334155"/>
                 </a:solidFill>
                 <a:latin typeface="Consolas"/>
               </a:rPr>
-              <a:t>GPU Colab A100</a:t>
+              <a:t>float16  ~16 Go  → A100 seulement</a:t>
             </a:r>
           </a:p>
           <a:p>
@@ -12539,13 +12539,13 @@
               </a:spcAft>
             </a:pPr>
             <a:r>
-              <a:rPr sz="1200" b="0" i="0">
+              <a:rPr sz="1100" b="0" i="0">
                 <a:solidFill>
                   <a:srgbClr val="334155"/>
                 </a:solidFill>
                 <a:latin typeface="Consolas"/>
               </a:rPr>
-              <a:t>      |</a:t>
+              <a:t>8-bit    ~8 Go   → A100 / V100</a:t>
             </a:r>
           </a:p>
           <a:p>
@@ -12555,91 +12555,61 @@
               </a:spcAft>
             </a:pPr>
             <a:r>
-              <a:rPr sz="1200" b="0" i="0">
+              <a:rPr sz="1100" b="0" i="0">
                 <a:solidFill>
                   <a:srgbClr val="334155"/>
                 </a:solidFill>
                 <a:latin typeface="Consolas"/>
               </a:rPr>
-              <a:t>  uvicorn : 8000</a:t>
-            </a:r>
-          </a:p>
-          <a:p>
-            <a:pPr>
-              <a:spcAft>
-                <a:spcPts val="100"/>
-              </a:spcAft>
-            </a:pPr>
-            <a:r>
-              <a:rPr sz="1200" b="0" i="0">
-                <a:solidFill>
-                  <a:srgbClr val="334155"/>
-                </a:solidFill>
-                <a:latin typeface="Consolas"/>
-              </a:rPr>
-              <a:t>      |</a:t>
-            </a:r>
-          </a:p>
-          <a:p>
-            <a:pPr>
-              <a:spcAft>
-                <a:spcPts val="100"/>
-              </a:spcAft>
-            </a:pPr>
-            <a:r>
-              <a:rPr sz="1200" b="0" i="0">
-                <a:solidFill>
-                  <a:srgbClr val="334155"/>
-                </a:solidFill>
-                <a:latin typeface="Consolas"/>
-              </a:rPr>
-              <a:t>  cloudflared (tunnel)</a:t>
-            </a:r>
-          </a:p>
-          <a:p>
-            <a:pPr>
-              <a:spcAft>
-                <a:spcPts val="100"/>
-              </a:spcAft>
-            </a:pPr>
-            <a:r>
-              <a:rPr sz="1200" b="0" i="0">
-                <a:solidFill>
-                  <a:srgbClr val="334155"/>
-                </a:solidFill>
-                <a:latin typeface="Consolas"/>
-              </a:rPr>
-              <a:t>      |</a:t>
-            </a:r>
-          </a:p>
-          <a:p>
-            <a:pPr>
-              <a:spcAft>
-                <a:spcPts val="100"/>
-              </a:spcAft>
-            </a:pPr>
-            <a:r>
-              <a:rPr sz="1200" b="0" i="0">
-                <a:solidFill>
-                  <a:srgbClr val="334155"/>
-                </a:solidFill>
-                <a:latin typeface="Consolas"/>
-              </a:rPr>
-              <a:t>  URL publique → navigateur</a:t>
-            </a:r>
-          </a:p>
-        </p:txBody>
-      </p:sp>
-      <p:sp>
-        <p:nvSpPr>
-          <p:cNvPr id="11" name="Rounded Rectangle 10"/>
+              <a:t>4-bit    ~5 Go   → T4, tout GPU &gt;= 6 Go</a:t>
+            </a:r>
+          </a:p>
+        </p:txBody>
+      </p:sp>
+      <p:sp>
+        <p:nvSpPr>
+          <p:cNvPr id="11" name="TextBox 10"/>
+          <p:cNvSpPr txBox="1"/>
+          <p:nvPr/>
+        </p:nvSpPr>
+        <p:spPr>
+          <a:xfrm>
+            <a:off x="6056075" y="3273552"/>
+            <a:ext cx="5632699" cy="347472"/>
+          </a:xfrm>
+          <a:prstGeom prst="rect">
+            <a:avLst/>
+          </a:prstGeom>
+          <a:noFill/>
+        </p:spPr>
+        <p:txBody>
+          <a:bodyPr wrap="square" anchor="t" lIns="0" rIns="0" tIns="0" bIns="0">
+            <a:spAutoFit/>
+          </a:bodyPr>
+          <a:lstStyle/>
+          <a:p>
+            <a:r>
+              <a:rPr sz="1500" b="1" i="0">
+                <a:solidFill>
+                  <a:srgbClr val="4338CA"/>
+                </a:solidFill>
+                <a:latin typeface="Calibri"/>
+              </a:rPr>
+              <a:t>Flux de déploiement</a:t>
+            </a:r>
+          </a:p>
+        </p:txBody>
+      </p:sp>
+      <p:sp>
+        <p:nvSpPr>
+          <p:cNvPr id="12" name="Rounded Rectangle 11"/>
           <p:cNvSpPr/>
           <p:nvPr/>
         </p:nvSpPr>
         <p:spPr>
           <a:xfrm>
-            <a:off x="6056075" y="3895344"/>
-            <a:ext cx="5632699" cy="2798064"/>
+            <a:off x="6056075" y="3657600"/>
+            <a:ext cx="5632699" cy="1828800"/>
           </a:xfrm>
           <a:prstGeom prst="roundRect">
             <a:avLst>
@@ -12680,20 +12650,20 @@
       </p:sp>
       <p:sp>
         <p:nvSpPr>
-          <p:cNvPr id="12" name="Rectangle 11"/>
+          <p:cNvPr id="13" name="Rectangle 12"/>
           <p:cNvSpPr/>
           <p:nvPr/>
         </p:nvSpPr>
         <p:spPr>
           <a:xfrm>
-            <a:off x="6056075" y="3931920"/>
-            <a:ext cx="64008" cy="2724912"/>
-          </a:xfrm>
-          <a:prstGeom prst="rect">
-            <a:avLst/>
-          </a:prstGeom>
-          <a:solidFill>
-            <a:srgbClr val="059669"/>
+            <a:off x="6056075" y="3694176"/>
+            <a:ext cx="64008" cy="1755648"/>
+          </a:xfrm>
+          <a:prstGeom prst="rect">
+            <a:avLst/>
+          </a:prstGeom>
+          <a:solidFill>
+            <a:srgbClr val="4F46E5"/>
           </a:solidFill>
           <a:ln>
             <a:noFill/>
@@ -12724,14 +12694,14 @@
       </p:sp>
       <p:sp>
         <p:nvSpPr>
-          <p:cNvPr id="13" name="TextBox 12"/>
+          <p:cNvPr id="14" name="TextBox 13"/>
           <p:cNvSpPr txBox="1"/>
           <p:nvPr/>
         </p:nvSpPr>
         <p:spPr>
           <a:xfrm>
-            <a:off x="6248099" y="3895344"/>
-            <a:ext cx="5367523" cy="2798064"/>
+            <a:off x="6248099" y="3657600"/>
+            <a:ext cx="5367523" cy="1828800"/>
           </a:xfrm>
           <a:prstGeom prst="rect">
             <a:avLst/>
@@ -12739,30 +12709,30 @@
           <a:noFill/>
         </p:spPr>
         <p:txBody>
-          <a:bodyPr wrap="square" anchor="ctr" lIns="50800" rIns="50800" tIns="76200" bIns="76200">
+          <a:bodyPr wrap="square" anchor="ctr" lIns="50800" rIns="50800" tIns="101600" bIns="101600">
             <a:spAutoFit/>
           </a:bodyPr>
           <a:lstStyle/>
           <a:p>
             <a:pPr>
               <a:spcAft>
-                <a:spcPts val="500"/>
+                <a:spcPts val="100"/>
               </a:spcAft>
             </a:pPr>
             <a:r>
-              <a:rPr sz="1400" b="1" i="0">
-                <a:solidFill>
-                  <a:srgbClr val="0F172A"/>
-                </a:solidFill>
-                <a:latin typeface="Calibri"/>
-              </a:rPr>
-              <a:t>Quantification optionnelle</a:t>
+              <a:rPr sz="1100" b="0" i="0">
+                <a:solidFill>
+                  <a:srgbClr val="334155"/>
+                </a:solidFill>
+                <a:latin typeface="Consolas"/>
+              </a:rPr>
+              <a:t>GPU Colab T4 (15 Go)</a:t>
             </a:r>
           </a:p>
           <a:p>
             <a:pPr>
               <a:spcAft>
-                <a:spcPts val="200"/>
+                <a:spcPts val="100"/>
               </a:spcAft>
             </a:pPr>
             <a:r>
@@ -12770,15 +12740,15 @@
                 <a:solidFill>
                   <a:srgbClr val="334155"/>
                 </a:solidFill>
-                <a:latin typeface="Calibri"/>
-              </a:rPr>
-              <a:t>· 4 ou 8 bits via bitsandbytes</a:t>
+                <a:latin typeface="Consolas"/>
+              </a:rPr>
+              <a:t>  LOAD_IN_4BIT=true</a:t>
             </a:r>
           </a:p>
           <a:p>
             <a:pPr>
               <a:spcAft>
-                <a:spcPts val="200"/>
+                <a:spcPts val="100"/>
               </a:spcAft>
             </a:pPr>
             <a:r>
@@ -12786,15 +12756,15 @@
                 <a:solidFill>
                   <a:srgbClr val="334155"/>
                 </a:solidFill>
-                <a:latin typeface="Calibri"/>
-              </a:rPr>
-              <a:t>· Variables : LOAD_IN_4BIT / LOAD_IN_8BIT</a:t>
+                <a:latin typeface="Consolas"/>
+              </a:rPr>
+              <a:t>      |</a:t>
             </a:r>
           </a:p>
           <a:p>
             <a:pPr>
               <a:spcAft>
-                <a:spcPts val="200"/>
+                <a:spcPts val="100"/>
               </a:spcAft>
             </a:pPr>
             <a:r>
@@ -12802,9 +12772,73 @@
                 <a:solidFill>
                   <a:srgbClr val="334155"/>
                 </a:solidFill>
-                <a:latin typeface="Calibri"/>
-              </a:rPr>
-              <a:t>· Pour les GPU &lt; 16 Go (ex. Colab T4)</a:t>
+                <a:latin typeface="Consolas"/>
+              </a:rPr>
+              <a:t>  uvicorn : 8000</a:t>
+            </a:r>
+          </a:p>
+          <a:p>
+            <a:pPr>
+              <a:spcAft>
+                <a:spcPts val="100"/>
+              </a:spcAft>
+            </a:pPr>
+            <a:r>
+              <a:rPr sz="1100" b="0" i="0">
+                <a:solidFill>
+                  <a:srgbClr val="334155"/>
+                </a:solidFill>
+                <a:latin typeface="Consolas"/>
+              </a:rPr>
+              <a:t>      |</a:t>
+            </a:r>
+          </a:p>
+          <a:p>
+            <a:pPr>
+              <a:spcAft>
+                <a:spcPts val="100"/>
+              </a:spcAft>
+            </a:pPr>
+            <a:r>
+              <a:rPr sz="1100" b="0" i="0">
+                <a:solidFill>
+                  <a:srgbClr val="334155"/>
+                </a:solidFill>
+                <a:latin typeface="Consolas"/>
+              </a:rPr>
+              <a:t>  cloudflared (tunnel)</a:t>
+            </a:r>
+          </a:p>
+          <a:p>
+            <a:pPr>
+              <a:spcAft>
+                <a:spcPts val="100"/>
+              </a:spcAft>
+            </a:pPr>
+            <a:r>
+              <a:rPr sz="1100" b="0" i="0">
+                <a:solidFill>
+                  <a:srgbClr val="334155"/>
+                </a:solidFill>
+                <a:latin typeface="Consolas"/>
+              </a:rPr>
+              <a:t>      |</a:t>
+            </a:r>
+          </a:p>
+          <a:p>
+            <a:pPr>
+              <a:spcAft>
+                <a:spcPts val="100"/>
+              </a:spcAft>
+            </a:pPr>
+            <a:r>
+              <a:rPr sz="1100" b="0" i="0">
+                <a:solidFill>
+                  <a:srgbClr val="334155"/>
+                </a:solidFill>
+                <a:latin typeface="Consolas"/>
+              </a:rPr>
+              <a:t>  URL publique → navigateur</a:t>
             </a:r>
           </a:p>
         </p:txBody>
@@ -13394,7 +13428,7 @@
                 </a:solidFill>
                 <a:latin typeface="Calibri"/>
               </a:rPr>
-              <a:t>Ressources mémoire (~16 Go VRAM)</a:t>
+              <a:t>Contrainte mémoire GPU (T4 = 15 Go &lt; 16 Go requis)</a:t>
             </a:r>
           </a:p>
           <a:p>
@@ -13405,7 +13439,7 @@
                 </a:solidFill>
                 <a:latin typeface="Calibri"/>
               </a:rPr>
-              <a:t>Le modèle 7B en float16 exige un GPU conséquent. Solution : GPU Colab A100 + quantification 4/8 bits pour les GPU plus modestes.</a:t>
+              <a:t>Le modèle 7B en float16 exige ~16 Go de VRAM, dépassant le T4 Colab (15 Go). Solution : quantification 4-bit NF4 via bitsandbytes — empreinte réduite à ~5 Go, compatible T4, perte de qualité minimale.</a:t>
             </a:r>
           </a:p>
         </p:txBody>
